--- a/template.pptx
+++ b/template.pptx
@@ -2,8 +2,8 @@
 <file path=ppt/presentation.xml><?xml version="1.0" encoding="utf-8"?>
 <p:presentation xmlns:a="http://schemas.openxmlformats.org/drawingml/2006/main" xmlns:r="http://schemas.openxmlformats.org/officeDocument/2006/relationships" xmlns:p="http://schemas.openxmlformats.org/presentationml/2006/main" saveSubsetFonts="1" autoCompressPictures="0">
   <p:sldMasterIdLst>
-    <p:sldMasterId id="2147483648" r:id="rId1"/>
-    <p:sldMasterId id="2147483662" r:id="rId2"/>
+    <p:sldMasterId id="2147483662" r:id="rId1"/>
+    <p:sldMasterId id="2147483669" r:id="rId2"/>
   </p:sldMasterIdLst>
   <p:sldIdLst>
     <p:sldId id="350" r:id="rId3"/>
@@ -114,181 +114,46 @@
 </p:presentation>
 </file>
 
-<file path=ppt/revisionInfo.xml><?xml version="1.0" encoding="utf-8"?>
-<p1510:revInfo xmlns:a="http://schemas.openxmlformats.org/drawingml/2006/main" xmlns:r="http://schemas.openxmlformats.org/officeDocument/2006/relationships" xmlns:p1510="http://schemas.microsoft.com/office/powerpoint/2015/10/main">
-  <p1510:revLst>
-    <p1510:client id="{9F04EF91-AD59-DB42-8C91-DA74278E5BA3}" v="1" dt="2023-09-11T19:53:45.178"/>
-  </p1510:revLst>
-</p1510:revInfo>
-</file>
-
 <file path=ppt/changesInfos/changesInfo1.xml><?xml version="1.0" encoding="utf-8"?>
 <pc:chgInfo xmlns:a="http://schemas.openxmlformats.org/drawingml/2006/main" xmlns:r="http://schemas.openxmlformats.org/officeDocument/2006/relationships" xmlns:ac="http://schemas.microsoft.com/office/drawing/2013/main/command" xmlns:pc="http://schemas.microsoft.com/office/powerpoint/2013/main/command">
   <pc:docChgLst>
-    <pc:chgData name="Ashutosh Nandeshwar" userId="a9ab2e22-fa7a-4aa5-ad68-eb0c0d41c1c1" providerId="ADAL" clId="{0F620F38-C139-3F46-8E55-13192B8D315A}"/>
-    <pc:docChg chg="undo custSel addSld delSld modSld sldOrd addMainMaster delMainMaster modMainMaster">
-      <pc:chgData name="Ashutosh Nandeshwar" userId="a9ab2e22-fa7a-4aa5-ad68-eb0c0d41c1c1" providerId="ADAL" clId="{0F620F38-C139-3F46-8E55-13192B8D315A}" dt="2023-05-13T03:06:41.834" v="243" actId="478"/>
+    <pc:chgData name="Devin Heanue" userId="7590fe87-f85b-4db3-af49-40606f5bf96f" providerId="ADAL" clId="{0AE716D6-5FAA-4FA4-BA3F-12263BBDF976}"/>
+    <pc:docChg chg="undo custSel addSld delSld modSld modMainMaster">
+      <pc:chgData name="Devin Heanue" userId="7590fe87-f85b-4db3-af49-40606f5bf96f" providerId="ADAL" clId="{0AE716D6-5FAA-4FA4-BA3F-12263BBDF976}" dt="2026-03-26T14:54:47.439" v="86" actId="1076"/>
       <pc:docMkLst>
         <pc:docMk/>
       </pc:docMkLst>
-      <pc:sldChg chg="delSp del mod modClrScheme chgLayout">
-        <pc:chgData name="Ashutosh Nandeshwar" userId="a9ab2e22-fa7a-4aa5-ad68-eb0c0d41c1c1" providerId="ADAL" clId="{0F620F38-C139-3F46-8E55-13192B8D315A}" dt="2023-05-13T00:16:26.420" v="3" actId="2696"/>
-        <pc:sldMkLst>
-          <pc:docMk/>
-          <pc:sldMk cId="1082142596" sldId="256"/>
-        </pc:sldMkLst>
-        <pc:spChg chg="del">
-          <ac:chgData name="Ashutosh Nandeshwar" userId="a9ab2e22-fa7a-4aa5-ad68-eb0c0d41c1c1" providerId="ADAL" clId="{0F620F38-C139-3F46-8E55-13192B8D315A}" dt="2023-05-13T00:16:21.447" v="2" actId="700"/>
-          <ac:spMkLst>
-            <pc:docMk/>
-            <pc:sldMk cId="1082142596" sldId="256"/>
-            <ac:spMk id="4" creationId="{AF56097D-7CCA-AF14-ACCB-BAE79D839FDC}"/>
-          </ac:spMkLst>
-        </pc:spChg>
-        <pc:spChg chg="del">
-          <ac:chgData name="Ashutosh Nandeshwar" userId="a9ab2e22-fa7a-4aa5-ad68-eb0c0d41c1c1" providerId="ADAL" clId="{0F620F38-C139-3F46-8E55-13192B8D315A}" dt="2023-05-13T00:16:21.447" v="2" actId="700"/>
-          <ac:spMkLst>
-            <pc:docMk/>
-            <pc:sldMk cId="1082142596" sldId="256"/>
-            <ac:spMk id="5" creationId="{A7D2F3EC-064A-63BC-6858-AF270245F806}"/>
-          </ac:spMkLst>
-        </pc:spChg>
-        <pc:spChg chg="del">
-          <ac:chgData name="Ashutosh Nandeshwar" userId="a9ab2e22-fa7a-4aa5-ad68-eb0c0d41c1c1" providerId="ADAL" clId="{0F620F38-C139-3F46-8E55-13192B8D315A}" dt="2023-05-13T00:16:21.447" v="2" actId="700"/>
-          <ac:spMkLst>
-            <pc:docMk/>
-            <pc:sldMk cId="1082142596" sldId="256"/>
-            <ac:spMk id="6" creationId="{1FF00762-0B01-CF3B-8A13-C3BA6E8EFAFD}"/>
-          </ac:spMkLst>
-        </pc:spChg>
-        <pc:spChg chg="del">
-          <ac:chgData name="Ashutosh Nandeshwar" userId="a9ab2e22-fa7a-4aa5-ad68-eb0c0d41c1c1" providerId="ADAL" clId="{0F620F38-C139-3F46-8E55-13192B8D315A}" dt="2023-05-13T00:16:21.447" v="2" actId="700"/>
-          <ac:spMkLst>
-            <pc:docMk/>
-            <pc:sldMk cId="1082142596" sldId="256"/>
-            <ac:spMk id="7" creationId="{2B9296E0-A60A-B59C-60E8-E62C0BB3FE84}"/>
-          </ac:spMkLst>
-        </pc:spChg>
-      </pc:sldChg>
-      <pc:sldChg chg="addSp delSp modSp new add del mod ord modClrScheme chgLayout">
-        <pc:chgData name="Ashutosh Nandeshwar" userId="a9ab2e22-fa7a-4aa5-ad68-eb0c0d41c1c1" providerId="ADAL" clId="{0F620F38-C139-3F46-8E55-13192B8D315A}" dt="2023-05-13T03:06:41.834" v="243" actId="478"/>
+      <pc:sldChg chg="modSp mod">
+        <pc:chgData name="Devin Heanue" userId="7590fe87-f85b-4db3-af49-40606f5bf96f" providerId="ADAL" clId="{0AE716D6-5FAA-4FA4-BA3F-12263BBDF976}" dt="2026-03-19T15:26:10.314" v="9" actId="207"/>
         <pc:sldMkLst>
           <pc:docMk/>
           <pc:sldMk cId="327460940" sldId="257"/>
         </pc:sldMkLst>
-        <pc:spChg chg="add del mod">
-          <ac:chgData name="Ashutosh Nandeshwar" userId="a9ab2e22-fa7a-4aa5-ad68-eb0c0d41c1c1" providerId="ADAL" clId="{0F620F38-C139-3F46-8E55-13192B8D315A}" dt="2023-05-13T03:06:24.224" v="238" actId="478"/>
+        <pc:spChg chg="mod">
+          <ac:chgData name="Devin Heanue" userId="7590fe87-f85b-4db3-af49-40606f5bf96f" providerId="ADAL" clId="{0AE716D6-5FAA-4FA4-BA3F-12263BBDF976}" dt="2026-03-19T15:26:10.314" v="9" actId="207"/>
           <ac:spMkLst>
             <pc:docMk/>
             <pc:sldMk cId="327460940" sldId="257"/>
-            <ac:spMk id="2" creationId="{EF74BBFC-583F-4BBC-89E7-126DA97DBC7D}"/>
-          </ac:spMkLst>
-        </pc:spChg>
-        <pc:spChg chg="del">
-          <ac:chgData name="Ashutosh Nandeshwar" userId="a9ab2e22-fa7a-4aa5-ad68-eb0c0d41c1c1" providerId="ADAL" clId="{0F620F38-C139-3F46-8E55-13192B8D315A}" dt="2023-05-13T00:18:50.436" v="11" actId="700"/>
-          <ac:spMkLst>
-            <pc:docMk/>
-            <pc:sldMk cId="327460940" sldId="257"/>
-            <ac:spMk id="2" creationId="{F20C081C-9ACA-DBB6-3471-85A05D263550}"/>
-          </ac:spMkLst>
-        </pc:spChg>
-        <pc:spChg chg="add del mod">
-          <ac:chgData name="Ashutosh Nandeshwar" userId="a9ab2e22-fa7a-4aa5-ad68-eb0c0d41c1c1" providerId="ADAL" clId="{0F620F38-C139-3F46-8E55-13192B8D315A}" dt="2023-05-13T03:06:26.192" v="239" actId="478"/>
-          <ac:spMkLst>
-            <pc:docMk/>
-            <pc:sldMk cId="327460940" sldId="257"/>
-            <ac:spMk id="3" creationId="{C362FF4D-31C4-7CB3-5ECB-538915CF01E5}"/>
-          </ac:spMkLst>
-        </pc:spChg>
-        <pc:spChg chg="del">
-          <ac:chgData name="Ashutosh Nandeshwar" userId="a9ab2e22-fa7a-4aa5-ad68-eb0c0d41c1c1" providerId="ADAL" clId="{0F620F38-C139-3F46-8E55-13192B8D315A}" dt="2023-05-13T00:18:50.436" v="11" actId="700"/>
-          <ac:spMkLst>
-            <pc:docMk/>
-            <pc:sldMk cId="327460940" sldId="257"/>
-            <ac:spMk id="3" creationId="{EADE1F61-2EFC-10EA-4F39-F21BD69113E1}"/>
-          </ac:spMkLst>
-        </pc:spChg>
-        <pc:spChg chg="add del mod">
-          <ac:chgData name="Ashutosh Nandeshwar" userId="a9ab2e22-fa7a-4aa5-ad68-eb0c0d41c1c1" providerId="ADAL" clId="{0F620F38-C139-3F46-8E55-13192B8D315A}" dt="2023-05-13T03:06:41.834" v="243" actId="478"/>
-          <ac:spMkLst>
-            <pc:docMk/>
-            <pc:sldMk cId="327460940" sldId="257"/>
-            <ac:spMk id="4" creationId="{EFD537D9-AD77-5AB4-2E92-D2E3351778B8}"/>
-          </ac:spMkLst>
-        </pc:spChg>
-        <pc:spChg chg="add del mod">
-          <ac:chgData name="Ashutosh Nandeshwar" userId="a9ab2e22-fa7a-4aa5-ad68-eb0c0d41c1c1" providerId="ADAL" clId="{0F620F38-C139-3F46-8E55-13192B8D315A}" dt="2023-05-13T03:06:40.334" v="242" actId="478"/>
-          <ac:spMkLst>
-            <pc:docMk/>
-            <pc:sldMk cId="327460940" sldId="257"/>
-            <ac:spMk id="5" creationId="{CF3578FC-0E21-BBED-23D5-02BD3220FC88}"/>
-          </ac:spMkLst>
-        </pc:spChg>
-        <pc:spChg chg="add del mod">
-          <ac:chgData name="Ashutosh Nandeshwar" userId="a9ab2e22-fa7a-4aa5-ad68-eb0c0d41c1c1" providerId="ADAL" clId="{0F620F38-C139-3F46-8E55-13192B8D315A}" dt="2023-05-13T03:06:27.592" v="240" actId="478"/>
-          <ac:spMkLst>
-            <pc:docMk/>
-            <pc:sldMk cId="327460940" sldId="257"/>
-            <ac:spMk id="6" creationId="{EAC04F2D-0B47-802F-D06A-69C610EAA88D}"/>
-          </ac:spMkLst>
-        </pc:spChg>
-        <pc:spChg chg="add del mod">
-          <ac:chgData name="Ashutosh Nandeshwar" userId="a9ab2e22-fa7a-4aa5-ad68-eb0c0d41c1c1" providerId="ADAL" clId="{0F620F38-C139-3F46-8E55-13192B8D315A}" dt="2023-05-13T03:06:29.282" v="241" actId="478"/>
-          <ac:spMkLst>
-            <pc:docMk/>
-            <pc:sldMk cId="327460940" sldId="257"/>
-            <ac:spMk id="7" creationId="{EABD0232-B14C-1A18-FD2C-5455C6C6A753}"/>
+            <ac:spMk id="2" creationId="{FFB7382F-546E-F283-25FF-AEE2E88255DF}"/>
           </ac:spMkLst>
         </pc:spChg>
       </pc:sldChg>
-      <pc:sldChg chg="addSp delSp modSp add del mod ord chgLayout">
-        <pc:chgData name="Ashutosh Nandeshwar" userId="a9ab2e22-fa7a-4aa5-ad68-eb0c0d41c1c1" providerId="ADAL" clId="{0F620F38-C139-3F46-8E55-13192B8D315A}" dt="2023-05-13T02:15:42.584" v="199" actId="478"/>
+      <pc:sldChg chg="modSp">
+        <pc:chgData name="Devin Heanue" userId="7590fe87-f85b-4db3-af49-40606f5bf96f" providerId="ADAL" clId="{0AE716D6-5FAA-4FA4-BA3F-12263BBDF976}" dt="2026-03-19T13:58:48.720" v="1"/>
         <pc:sldMkLst>
           <pc:docMk/>
           <pc:sldMk cId="3275027838" sldId="350"/>
         </pc:sldMkLst>
-        <pc:spChg chg="add del mod ord">
-          <ac:chgData name="Ashutosh Nandeshwar" userId="a9ab2e22-fa7a-4aa5-ad68-eb0c0d41c1c1" providerId="ADAL" clId="{0F620F38-C139-3F46-8E55-13192B8D315A}" dt="2023-05-13T01:56:52.102" v="171" actId="700"/>
-          <ac:spMkLst>
-            <pc:docMk/>
-            <pc:sldMk cId="3275027838" sldId="350"/>
-            <ac:spMk id="2" creationId="{12C350F0-7CBB-B374-DCBC-34295039CCE9}"/>
-          </ac:spMkLst>
-        </pc:spChg>
-        <pc:spChg chg="mod ord">
-          <ac:chgData name="Ashutosh Nandeshwar" userId="a9ab2e22-fa7a-4aa5-ad68-eb0c0d41c1c1" providerId="ADAL" clId="{0F620F38-C139-3F46-8E55-13192B8D315A}" dt="2023-05-13T01:56:54.480" v="172" actId="700"/>
+        <pc:spChg chg="mod">
+          <ac:chgData name="Devin Heanue" userId="7590fe87-f85b-4db3-af49-40606f5bf96f" providerId="ADAL" clId="{0AE716D6-5FAA-4FA4-BA3F-12263BBDF976}" dt="2026-03-19T13:58:48.720" v="1"/>
           <ac:spMkLst>
             <pc:docMk/>
             <pc:sldMk cId="3275027838" sldId="350"/>
             <ac:spMk id="3" creationId="{5AC44777-8983-4366-4BC2-D62330047D28}"/>
           </ac:spMkLst>
         </pc:spChg>
-        <pc:spChg chg="mod ord">
-          <ac:chgData name="Ashutosh Nandeshwar" userId="a9ab2e22-fa7a-4aa5-ad68-eb0c0d41c1c1" providerId="ADAL" clId="{0F620F38-C139-3F46-8E55-13192B8D315A}" dt="2023-05-13T01:56:54.480" v="172" actId="700"/>
-          <ac:spMkLst>
-            <pc:docMk/>
-            <pc:sldMk cId="3275027838" sldId="350"/>
-            <ac:spMk id="4" creationId="{55D5CC37-6EC0-38CE-DA82-C7FD08377C00}"/>
-          </ac:spMkLst>
-        </pc:spChg>
-        <pc:spChg chg="add del mod ord">
-          <ac:chgData name="Ashutosh Nandeshwar" userId="a9ab2e22-fa7a-4aa5-ad68-eb0c0d41c1c1" providerId="ADAL" clId="{0F620F38-C139-3F46-8E55-13192B8D315A}" dt="2023-05-13T01:56:54.480" v="172" actId="700"/>
-          <ac:spMkLst>
-            <pc:docMk/>
-            <pc:sldMk cId="3275027838" sldId="350"/>
-            <ac:spMk id="6" creationId="{CB5FBF51-AA0B-0DE2-722E-40B23F2C9849}"/>
-          </ac:spMkLst>
-        </pc:spChg>
-        <pc:spChg chg="add del mod ord">
-          <ac:chgData name="Ashutosh Nandeshwar" userId="a9ab2e22-fa7a-4aa5-ad68-eb0c0d41c1c1" providerId="ADAL" clId="{0F620F38-C139-3F46-8E55-13192B8D315A}" dt="2023-05-13T02:15:42.584" v="199" actId="478"/>
-          <ac:spMkLst>
-            <pc:docMk/>
-            <pc:sldMk cId="3275027838" sldId="350"/>
-            <ac:spMk id="9" creationId="{53AADC11-0282-CBAF-4717-64ED38A0E823}"/>
-          </ac:spMkLst>
-        </pc:spChg>
-        <pc:picChg chg="mod ord modCrop">
-          <ac:chgData name="Ashutosh Nandeshwar" userId="a9ab2e22-fa7a-4aa5-ad68-eb0c0d41c1c1" providerId="ADAL" clId="{0F620F38-C139-3F46-8E55-13192B8D315A}" dt="2023-05-13T01:56:54.480" v="172" actId="700"/>
+        <pc:picChg chg="mod">
+          <ac:chgData name="Devin Heanue" userId="7590fe87-f85b-4db3-af49-40606f5bf96f" providerId="ADAL" clId="{0AE716D6-5FAA-4FA4-BA3F-12263BBDF976}" dt="2026-03-19T13:58:48.720" v="1"/>
           <ac:picMkLst>
             <pc:docMk/>
             <pc:sldMk cId="3275027838" sldId="350"/>
@@ -296,352 +161,21 @@
           </ac:picMkLst>
         </pc:picChg>
       </pc:sldChg>
-      <pc:sldChg chg="addSp delSp modSp new del mod chgLayout">
-        <pc:chgData name="Ashutosh Nandeshwar" userId="a9ab2e22-fa7a-4aa5-ad68-eb0c0d41c1c1" providerId="ADAL" clId="{0F620F38-C139-3F46-8E55-13192B8D315A}" dt="2023-05-13T01:57:28.856" v="175" actId="2696"/>
-        <pc:sldMkLst>
-          <pc:docMk/>
-          <pc:sldMk cId="503981436" sldId="351"/>
-        </pc:sldMkLst>
-        <pc:spChg chg="del">
-          <ac:chgData name="Ashutosh Nandeshwar" userId="a9ab2e22-fa7a-4aa5-ad68-eb0c0d41c1c1" providerId="ADAL" clId="{0F620F38-C139-3F46-8E55-13192B8D315A}" dt="2023-05-13T01:57:26.045" v="174" actId="700"/>
-          <ac:spMkLst>
-            <pc:docMk/>
-            <pc:sldMk cId="503981436" sldId="351"/>
-            <ac:spMk id="2" creationId="{81A027C2-F259-DBAD-F9C2-DA5CF480F77F}"/>
-          </ac:spMkLst>
-        </pc:spChg>
-        <pc:spChg chg="del">
-          <ac:chgData name="Ashutosh Nandeshwar" userId="a9ab2e22-fa7a-4aa5-ad68-eb0c0d41c1c1" providerId="ADAL" clId="{0F620F38-C139-3F46-8E55-13192B8D315A}" dt="2023-05-13T01:57:26.045" v="174" actId="700"/>
-          <ac:spMkLst>
-            <pc:docMk/>
-            <pc:sldMk cId="503981436" sldId="351"/>
-            <ac:spMk id="3" creationId="{9DAA9507-749D-9959-15B6-C7E79759BB42}"/>
-          </ac:spMkLst>
-        </pc:spChg>
-        <pc:spChg chg="del">
-          <ac:chgData name="Ashutosh Nandeshwar" userId="a9ab2e22-fa7a-4aa5-ad68-eb0c0d41c1c1" providerId="ADAL" clId="{0F620F38-C139-3F46-8E55-13192B8D315A}" dt="2023-05-13T01:57:26.045" v="174" actId="700"/>
-          <ac:spMkLst>
-            <pc:docMk/>
-            <pc:sldMk cId="503981436" sldId="351"/>
-            <ac:spMk id="4" creationId="{EC1D75B2-253B-07AE-126E-6E522EC00D0D}"/>
-          </ac:spMkLst>
-        </pc:spChg>
-        <pc:spChg chg="del">
-          <ac:chgData name="Ashutosh Nandeshwar" userId="a9ab2e22-fa7a-4aa5-ad68-eb0c0d41c1c1" providerId="ADAL" clId="{0F620F38-C139-3F46-8E55-13192B8D315A}" dt="2023-05-13T01:57:26.045" v="174" actId="700"/>
-          <ac:spMkLst>
-            <pc:docMk/>
-            <pc:sldMk cId="503981436" sldId="351"/>
-            <ac:spMk id="5" creationId="{DE979C5E-E86A-19BA-6352-6287B2BD65BD}"/>
-          </ac:spMkLst>
-        </pc:spChg>
-        <pc:spChg chg="add mod ord">
-          <ac:chgData name="Ashutosh Nandeshwar" userId="a9ab2e22-fa7a-4aa5-ad68-eb0c0d41c1c1" providerId="ADAL" clId="{0F620F38-C139-3F46-8E55-13192B8D315A}" dt="2023-05-13T01:57:26.045" v="174" actId="700"/>
-          <ac:spMkLst>
-            <pc:docMk/>
-            <pc:sldMk cId="503981436" sldId="351"/>
-            <ac:spMk id="6" creationId="{09EEC556-A02F-411D-8DD6-859E228331ED}"/>
-          </ac:spMkLst>
-        </pc:spChg>
-        <pc:spChg chg="add mod ord">
-          <ac:chgData name="Ashutosh Nandeshwar" userId="a9ab2e22-fa7a-4aa5-ad68-eb0c0d41c1c1" providerId="ADAL" clId="{0F620F38-C139-3F46-8E55-13192B8D315A}" dt="2023-05-13T01:57:26.045" v="174" actId="700"/>
-          <ac:spMkLst>
-            <pc:docMk/>
-            <pc:sldMk cId="503981436" sldId="351"/>
-            <ac:spMk id="7" creationId="{082020B0-A3B8-A177-C85F-5352D818CD39}"/>
-          </ac:spMkLst>
-        </pc:spChg>
-        <pc:spChg chg="add mod ord">
-          <ac:chgData name="Ashutosh Nandeshwar" userId="a9ab2e22-fa7a-4aa5-ad68-eb0c0d41c1c1" providerId="ADAL" clId="{0F620F38-C139-3F46-8E55-13192B8D315A}" dt="2023-05-13T01:57:26.045" v="174" actId="700"/>
-          <ac:spMkLst>
-            <pc:docMk/>
-            <pc:sldMk cId="503981436" sldId="351"/>
-            <ac:spMk id="8" creationId="{09747D85-AE5F-9D67-BC23-1CC73CE90B93}"/>
-          </ac:spMkLst>
-        </pc:spChg>
-        <pc:spChg chg="add mod ord">
-          <ac:chgData name="Ashutosh Nandeshwar" userId="a9ab2e22-fa7a-4aa5-ad68-eb0c0d41c1c1" providerId="ADAL" clId="{0F620F38-C139-3F46-8E55-13192B8D315A}" dt="2023-05-13T01:57:26.045" v="174" actId="700"/>
-          <ac:spMkLst>
-            <pc:docMk/>
-            <pc:sldMk cId="503981436" sldId="351"/>
-            <ac:spMk id="9" creationId="{96E0AAE7-4411-7F53-E124-6528F3FD39FB}"/>
-          </ac:spMkLst>
-        </pc:spChg>
-      </pc:sldChg>
-      <pc:sldMasterChg chg="add del addSldLayout delSldLayout modSldLayout">
-        <pc:chgData name="Ashutosh Nandeshwar" userId="a9ab2e22-fa7a-4aa5-ad68-eb0c0d41c1c1" providerId="ADAL" clId="{0F620F38-C139-3F46-8E55-13192B8D315A}" dt="2023-05-13T03:02:37.178" v="236" actId="166"/>
-        <pc:sldMasterMkLst>
-          <pc:docMk/>
-          <pc:sldMasterMk cId="983183760" sldId="2147483648"/>
-        </pc:sldMasterMkLst>
-        <pc:sldLayoutChg chg="add del">
-          <pc:chgData name="Ashutosh Nandeshwar" userId="a9ab2e22-fa7a-4aa5-ad68-eb0c0d41c1c1" providerId="ADAL" clId="{0F620F38-C139-3F46-8E55-13192B8D315A}" dt="2023-05-13T00:17:48.550" v="9" actId="2696"/>
-          <pc:sldLayoutMkLst>
-            <pc:docMk/>
-            <pc:sldMasterMk cId="983183760" sldId="2147483648"/>
-            <pc:sldLayoutMk cId="1478776492" sldId="2147483649"/>
-          </pc:sldLayoutMkLst>
-        </pc:sldLayoutChg>
-        <pc:sldLayoutChg chg="add del">
-          <pc:chgData name="Ashutosh Nandeshwar" userId="a9ab2e22-fa7a-4aa5-ad68-eb0c0d41c1c1" providerId="ADAL" clId="{0F620F38-C139-3F46-8E55-13192B8D315A}" dt="2023-05-13T00:17:48.550" v="9" actId="2696"/>
-          <pc:sldLayoutMkLst>
-            <pc:docMk/>
-            <pc:sldMasterMk cId="983183760" sldId="2147483648"/>
-            <pc:sldLayoutMk cId="1958294226" sldId="2147483650"/>
-          </pc:sldLayoutMkLst>
-        </pc:sldLayoutChg>
-        <pc:sldLayoutChg chg="add del">
-          <pc:chgData name="Ashutosh Nandeshwar" userId="a9ab2e22-fa7a-4aa5-ad68-eb0c0d41c1c1" providerId="ADAL" clId="{0F620F38-C139-3F46-8E55-13192B8D315A}" dt="2023-05-13T00:17:48.550" v="9" actId="2696"/>
-          <pc:sldLayoutMkLst>
-            <pc:docMk/>
-            <pc:sldMasterMk cId="983183760" sldId="2147483648"/>
-            <pc:sldLayoutMk cId="385001653" sldId="2147483651"/>
-          </pc:sldLayoutMkLst>
-        </pc:sldLayoutChg>
-        <pc:sldLayoutChg chg="add del">
-          <pc:chgData name="Ashutosh Nandeshwar" userId="a9ab2e22-fa7a-4aa5-ad68-eb0c0d41c1c1" providerId="ADAL" clId="{0F620F38-C139-3F46-8E55-13192B8D315A}" dt="2023-05-13T00:17:48.550" v="9" actId="2696"/>
-          <pc:sldLayoutMkLst>
-            <pc:docMk/>
-            <pc:sldMasterMk cId="983183760" sldId="2147483648"/>
-            <pc:sldLayoutMk cId="1473286501" sldId="2147483652"/>
-          </pc:sldLayoutMkLst>
-        </pc:sldLayoutChg>
-        <pc:sldLayoutChg chg="add del">
-          <pc:chgData name="Ashutosh Nandeshwar" userId="a9ab2e22-fa7a-4aa5-ad68-eb0c0d41c1c1" providerId="ADAL" clId="{0F620F38-C139-3F46-8E55-13192B8D315A}" dt="2023-05-13T00:17:48.550" v="9" actId="2696"/>
-          <pc:sldLayoutMkLst>
-            <pc:docMk/>
-            <pc:sldMasterMk cId="983183760" sldId="2147483648"/>
-            <pc:sldLayoutMk cId="1934921637" sldId="2147483653"/>
-          </pc:sldLayoutMkLst>
-        </pc:sldLayoutChg>
-        <pc:sldLayoutChg chg="add del">
-          <pc:chgData name="Ashutosh Nandeshwar" userId="a9ab2e22-fa7a-4aa5-ad68-eb0c0d41c1c1" providerId="ADAL" clId="{0F620F38-C139-3F46-8E55-13192B8D315A}" dt="2023-05-13T00:17:48.550" v="9" actId="2696"/>
-          <pc:sldLayoutMkLst>
-            <pc:docMk/>
-            <pc:sldMasterMk cId="983183760" sldId="2147483648"/>
-            <pc:sldLayoutMk cId="3175046048" sldId="2147483654"/>
-          </pc:sldLayoutMkLst>
-        </pc:sldLayoutChg>
-        <pc:sldLayoutChg chg="add del">
-          <pc:chgData name="Ashutosh Nandeshwar" userId="a9ab2e22-fa7a-4aa5-ad68-eb0c0d41c1c1" providerId="ADAL" clId="{0F620F38-C139-3F46-8E55-13192B8D315A}" dt="2023-05-13T00:17:48.550" v="9" actId="2696"/>
-          <pc:sldLayoutMkLst>
-            <pc:docMk/>
-            <pc:sldMasterMk cId="983183760" sldId="2147483648"/>
-            <pc:sldLayoutMk cId="1521871201" sldId="2147483655"/>
-          </pc:sldLayoutMkLst>
-        </pc:sldLayoutChg>
-        <pc:sldLayoutChg chg="add del">
-          <pc:chgData name="Ashutosh Nandeshwar" userId="a9ab2e22-fa7a-4aa5-ad68-eb0c0d41c1c1" providerId="ADAL" clId="{0F620F38-C139-3F46-8E55-13192B8D315A}" dt="2023-05-13T00:17:48.550" v="9" actId="2696"/>
-          <pc:sldLayoutMkLst>
-            <pc:docMk/>
-            <pc:sldMasterMk cId="983183760" sldId="2147483648"/>
-            <pc:sldLayoutMk cId="4267360594" sldId="2147483656"/>
-          </pc:sldLayoutMkLst>
-        </pc:sldLayoutChg>
-        <pc:sldLayoutChg chg="add del">
-          <pc:chgData name="Ashutosh Nandeshwar" userId="a9ab2e22-fa7a-4aa5-ad68-eb0c0d41c1c1" providerId="ADAL" clId="{0F620F38-C139-3F46-8E55-13192B8D315A}" dt="2023-05-13T00:17:48.550" v="9" actId="2696"/>
-          <pc:sldLayoutMkLst>
-            <pc:docMk/>
-            <pc:sldMasterMk cId="983183760" sldId="2147483648"/>
-            <pc:sldLayoutMk cId="3425159626" sldId="2147483657"/>
-          </pc:sldLayoutMkLst>
-        </pc:sldLayoutChg>
-        <pc:sldLayoutChg chg="add del">
-          <pc:chgData name="Ashutosh Nandeshwar" userId="a9ab2e22-fa7a-4aa5-ad68-eb0c0d41c1c1" providerId="ADAL" clId="{0F620F38-C139-3F46-8E55-13192B8D315A}" dt="2023-05-13T00:17:48.550" v="9" actId="2696"/>
-          <pc:sldLayoutMkLst>
-            <pc:docMk/>
-            <pc:sldMasterMk cId="983183760" sldId="2147483648"/>
-            <pc:sldLayoutMk cId="1429792901" sldId="2147483658"/>
-          </pc:sldLayoutMkLst>
-        </pc:sldLayoutChg>
-        <pc:sldLayoutChg chg="add del">
-          <pc:chgData name="Ashutosh Nandeshwar" userId="a9ab2e22-fa7a-4aa5-ad68-eb0c0d41c1c1" providerId="ADAL" clId="{0F620F38-C139-3F46-8E55-13192B8D315A}" dt="2023-05-13T00:17:48.550" v="9" actId="2696"/>
-          <pc:sldLayoutMkLst>
-            <pc:docMk/>
-            <pc:sldMasterMk cId="983183760" sldId="2147483648"/>
-            <pc:sldLayoutMk cId="101494739" sldId="2147483659"/>
-          </pc:sldLayoutMkLst>
-        </pc:sldLayoutChg>
-        <pc:sldLayoutChg chg="addSp delSp modSp add del mod">
-          <pc:chgData name="Ashutosh Nandeshwar" userId="a9ab2e22-fa7a-4aa5-ad68-eb0c0d41c1c1" providerId="ADAL" clId="{0F620F38-C139-3F46-8E55-13192B8D315A}" dt="2023-05-13T03:02:37.178" v="236" actId="166"/>
-          <pc:sldLayoutMkLst>
-            <pc:docMk/>
-            <pc:sldMasterMk cId="983183760" sldId="2147483648"/>
-            <pc:sldLayoutMk cId="1127028118" sldId="2147483661"/>
-          </pc:sldLayoutMkLst>
-          <pc:spChg chg="add del">
-            <ac:chgData name="Ashutosh Nandeshwar" userId="a9ab2e22-fa7a-4aa5-ad68-eb0c0d41c1c1" providerId="ADAL" clId="{0F620F38-C139-3F46-8E55-13192B8D315A}" dt="2023-05-13T01:36:21.532" v="114" actId="11529"/>
-            <ac:spMkLst>
-              <pc:docMk/>
-              <pc:sldMasterMk cId="983183760" sldId="2147483648"/>
-              <pc:sldLayoutMk cId="1127028118" sldId="2147483661"/>
-              <ac:spMk id="2" creationId="{28D66DBA-EED4-A007-F3BF-09AA7FDD2D71}"/>
-            </ac:spMkLst>
-          </pc:spChg>
-          <pc:spChg chg="mod">
-            <ac:chgData name="Ashutosh Nandeshwar" userId="a9ab2e22-fa7a-4aa5-ad68-eb0c0d41c1c1" providerId="ADAL" clId="{0F620F38-C139-3F46-8E55-13192B8D315A}" dt="2023-05-13T01:36:34.930" v="116" actId="12788"/>
-            <ac:spMkLst>
-              <pc:docMk/>
-              <pc:sldMasterMk cId="983183760" sldId="2147483648"/>
-              <pc:sldLayoutMk cId="1127028118" sldId="2147483661"/>
-              <ac:spMk id="3" creationId="{4B628F13-B15B-4945-6975-DCF8412B5C9E}"/>
-            </ac:spMkLst>
-          </pc:spChg>
-          <pc:spChg chg="add mod">
-            <ac:chgData name="Ashutosh Nandeshwar" userId="a9ab2e22-fa7a-4aa5-ad68-eb0c0d41c1c1" providerId="ADAL" clId="{0F620F38-C139-3F46-8E55-13192B8D315A}" dt="2023-05-13T03:02:37.178" v="236" actId="166"/>
-            <ac:spMkLst>
-              <pc:docMk/>
-              <pc:sldMasterMk cId="983183760" sldId="2147483648"/>
-              <pc:sldLayoutMk cId="1127028118" sldId="2147483661"/>
-              <ac:spMk id="4" creationId="{4192AA94-D130-27CA-2D26-05CB7CD00567}"/>
-            </ac:spMkLst>
-          </pc:spChg>
-          <pc:spChg chg="mod">
-            <ac:chgData name="Ashutosh Nandeshwar" userId="a9ab2e22-fa7a-4aa5-ad68-eb0c0d41c1c1" providerId="ADAL" clId="{0F620F38-C139-3F46-8E55-13192B8D315A}" dt="2023-05-13T03:02:37.178" v="236" actId="166"/>
-            <ac:spMkLst>
-              <pc:docMk/>
-              <pc:sldMasterMk cId="983183760" sldId="2147483648"/>
-              <pc:sldLayoutMk cId="1127028118" sldId="2147483661"/>
-              <ac:spMk id="7" creationId="{5D25FE66-B53A-8B48-70E2-83DC098AC097}"/>
-            </ac:spMkLst>
-          </pc:spChg>
-          <pc:spChg chg="del mod">
-            <ac:chgData name="Ashutosh Nandeshwar" userId="a9ab2e22-fa7a-4aa5-ad68-eb0c0d41c1c1" providerId="ADAL" clId="{0F620F38-C139-3F46-8E55-13192B8D315A}" dt="2023-05-13T01:36:06.305" v="113" actId="478"/>
-            <ac:spMkLst>
-              <pc:docMk/>
-              <pc:sldMasterMk cId="983183760" sldId="2147483648"/>
-              <pc:sldLayoutMk cId="1127028118" sldId="2147483661"/>
-              <ac:spMk id="13" creationId="{1F80FBE2-B305-6111-CABC-2ABF46420359}"/>
-            </ac:spMkLst>
-          </pc:spChg>
-          <pc:spChg chg="mod">
-            <ac:chgData name="Ashutosh Nandeshwar" userId="a9ab2e22-fa7a-4aa5-ad68-eb0c0d41c1c1" providerId="ADAL" clId="{0F620F38-C139-3F46-8E55-13192B8D315A}" dt="2023-05-13T01:27:11.307" v="83" actId="1035"/>
-            <ac:spMkLst>
-              <pc:docMk/>
-              <pc:sldMasterMk cId="983183760" sldId="2147483648"/>
-              <pc:sldLayoutMk cId="1127028118" sldId="2147483661"/>
-              <ac:spMk id="14" creationId="{50619ED4-83A9-4A87-B261-251D662DE27A}"/>
-            </ac:spMkLst>
-          </pc:spChg>
-        </pc:sldLayoutChg>
-      </pc:sldMasterChg>
-      <pc:sldMasterChg chg="delSldLayout modSldLayout sldLayoutOrd">
-        <pc:chgData name="Ashutosh Nandeshwar" userId="a9ab2e22-fa7a-4aa5-ad68-eb0c0d41c1c1" providerId="ADAL" clId="{0F620F38-C139-3F46-8E55-13192B8D315A}" dt="2023-05-13T02:55:30.463" v="216" actId="1035"/>
+      <pc:sldMasterChg chg="modSldLayout">
+        <pc:chgData name="Devin Heanue" userId="7590fe87-f85b-4db3-af49-40606f5bf96f" providerId="ADAL" clId="{0AE716D6-5FAA-4FA4-BA3F-12263BBDF976}" dt="2026-03-19T13:58:30.797" v="0" actId="16037"/>
         <pc:sldMasterMkLst>
           <pc:docMk/>
           <pc:sldMasterMk cId="1628519446" sldId="2147483662"/>
         </pc:sldMasterMkLst>
-        <pc:sldLayoutChg chg="del">
-          <pc:chgData name="Ashutosh Nandeshwar" userId="a9ab2e22-fa7a-4aa5-ad68-eb0c0d41c1c1" providerId="ADAL" clId="{0F620F38-C139-3F46-8E55-13192B8D315A}" dt="2023-05-13T01:26:54.734" v="13" actId="2696"/>
-          <pc:sldLayoutMkLst>
-            <pc:docMk/>
-            <pc:sldMasterMk cId="1628519446" sldId="2147483662"/>
-            <pc:sldLayoutMk cId="1936128597" sldId="2147483663"/>
-          </pc:sldLayoutMkLst>
-        </pc:sldLayoutChg>
-        <pc:sldLayoutChg chg="del">
-          <pc:chgData name="Ashutosh Nandeshwar" userId="a9ab2e22-fa7a-4aa5-ad68-eb0c0d41c1c1" providerId="ADAL" clId="{0F620F38-C139-3F46-8E55-13192B8D315A}" dt="2023-05-13T01:26:54.741" v="16" actId="2696"/>
-          <pc:sldLayoutMkLst>
-            <pc:docMk/>
-            <pc:sldMasterMk cId="1628519446" sldId="2147483662"/>
-            <pc:sldLayoutMk cId="2840838742" sldId="2147483664"/>
-          </pc:sldLayoutMkLst>
-        </pc:sldLayoutChg>
-        <pc:sldLayoutChg chg="del">
-          <pc:chgData name="Ashutosh Nandeshwar" userId="a9ab2e22-fa7a-4aa5-ad68-eb0c0d41c1c1" providerId="ADAL" clId="{0F620F38-C139-3F46-8E55-13192B8D315A}" dt="2023-05-13T01:26:54.766" v="27" actId="2696"/>
-          <pc:sldLayoutMkLst>
-            <pc:docMk/>
-            <pc:sldMasterMk cId="1628519446" sldId="2147483662"/>
-            <pc:sldLayoutMk cId="4263422065" sldId="2147483665"/>
-          </pc:sldLayoutMkLst>
-        </pc:sldLayoutChg>
-        <pc:sldLayoutChg chg="del">
-          <pc:chgData name="Ashutosh Nandeshwar" userId="a9ab2e22-fa7a-4aa5-ad68-eb0c0d41c1c1" providerId="ADAL" clId="{0F620F38-C139-3F46-8E55-13192B8D315A}" dt="2023-05-13T01:26:54.760" v="22" actId="2696"/>
-          <pc:sldLayoutMkLst>
-            <pc:docMk/>
-            <pc:sldMasterMk cId="1628519446" sldId="2147483662"/>
-            <pc:sldLayoutMk cId="3284813463" sldId="2147483666"/>
-          </pc:sldLayoutMkLst>
-        </pc:sldLayoutChg>
-        <pc:sldLayoutChg chg="del">
-          <pc:chgData name="Ashutosh Nandeshwar" userId="a9ab2e22-fa7a-4aa5-ad68-eb0c0d41c1c1" providerId="ADAL" clId="{0F620F38-C139-3F46-8E55-13192B8D315A}" dt="2023-05-13T01:26:55.133" v="51" actId="2696"/>
-          <pc:sldLayoutMkLst>
-            <pc:docMk/>
-            <pc:sldMasterMk cId="1628519446" sldId="2147483662"/>
-            <pc:sldLayoutMk cId="2734971234" sldId="2147483667"/>
-          </pc:sldLayoutMkLst>
-        </pc:sldLayoutChg>
-        <pc:sldLayoutChg chg="addSp delSp modSp mod ord">
-          <pc:chgData name="Ashutosh Nandeshwar" userId="a9ab2e22-fa7a-4aa5-ad68-eb0c0d41c1c1" providerId="ADAL" clId="{0F620F38-C139-3F46-8E55-13192B8D315A}" dt="2023-05-13T02:55:30.463" v="216" actId="1035"/>
+        <pc:sldLayoutChg chg="modSp">
+          <pc:chgData name="Devin Heanue" userId="7590fe87-f85b-4db3-af49-40606f5bf96f" providerId="ADAL" clId="{0AE716D6-5FAA-4FA4-BA3F-12263BBDF976}" dt="2026-03-19T13:58:30.797" v="0" actId="16037"/>
           <pc:sldLayoutMkLst>
             <pc:docMk/>
             <pc:sldMasterMk cId="1628519446" sldId="2147483662"/>
             <pc:sldLayoutMk cId="2057324489" sldId="2147483668"/>
           </pc:sldLayoutMkLst>
-          <pc:spChg chg="del mod">
-            <ac:chgData name="Ashutosh Nandeshwar" userId="a9ab2e22-fa7a-4aa5-ad68-eb0c0d41c1c1" providerId="ADAL" clId="{0F620F38-C139-3F46-8E55-13192B8D315A}" dt="2023-05-13T02:05:03.090" v="176" actId="478"/>
-            <ac:spMkLst>
-              <pc:docMk/>
-              <pc:sldMasterMk cId="1628519446" sldId="2147483662"/>
-              <pc:sldLayoutMk cId="2057324489" sldId="2147483668"/>
-              <ac:spMk id="3" creationId="{26846683-F462-1307-561B-B8F69DDDB4ED}"/>
-            </ac:spMkLst>
-          </pc:spChg>
-          <pc:spChg chg="add del">
-            <ac:chgData name="Ashutosh Nandeshwar" userId="a9ab2e22-fa7a-4aa5-ad68-eb0c0d41c1c1" providerId="ADAL" clId="{0F620F38-C139-3F46-8E55-13192B8D315A}" dt="2023-05-13T02:13:59.794" v="193" actId="11529"/>
-            <ac:spMkLst>
-              <pc:docMk/>
-              <pc:sldMasterMk cId="1628519446" sldId="2147483662"/>
-              <pc:sldLayoutMk cId="2057324489" sldId="2147483668"/>
-              <ac:spMk id="3" creationId="{E1993108-FF6D-70C1-CBA9-E64E7B828BC5}"/>
-            </ac:spMkLst>
-          </pc:spChg>
-          <pc:spChg chg="add del mod">
-            <ac:chgData name="Ashutosh Nandeshwar" userId="a9ab2e22-fa7a-4aa5-ad68-eb0c0d41c1c1" providerId="ADAL" clId="{0F620F38-C139-3F46-8E55-13192B8D315A}" dt="2023-05-13T02:13:48.604" v="191" actId="478"/>
-            <ac:spMkLst>
-              <pc:docMk/>
-              <pc:sldMasterMk cId="1628519446" sldId="2147483662"/>
-              <pc:sldLayoutMk cId="2057324489" sldId="2147483668"/>
-              <ac:spMk id="4" creationId="{B85C79D1-3A78-CB56-E9E8-AD4E591D0D25}"/>
-            </ac:spMkLst>
-          </pc:spChg>
-          <pc:spChg chg="add mod">
-            <ac:chgData name="Ashutosh Nandeshwar" userId="a9ab2e22-fa7a-4aa5-ad68-eb0c0d41c1c1" providerId="ADAL" clId="{0F620F38-C139-3F46-8E55-13192B8D315A}" dt="2023-05-13T02:55:25.140" v="214" actId="552"/>
-            <ac:spMkLst>
-              <pc:docMk/>
-              <pc:sldMasterMk cId="1628519446" sldId="2147483662"/>
-              <pc:sldLayoutMk cId="2057324489" sldId="2147483668"/>
-              <ac:spMk id="5" creationId="{33A7C9B6-DBD7-2B61-DD27-B359459C6DBE}"/>
-            </ac:spMkLst>
-          </pc:spChg>
-          <pc:spChg chg="add del">
-            <ac:chgData name="Ashutosh Nandeshwar" userId="a9ab2e22-fa7a-4aa5-ad68-eb0c0d41c1c1" providerId="ADAL" clId="{0F620F38-C139-3F46-8E55-13192B8D315A}" dt="2023-05-13T02:05:30.414" v="178" actId="11529"/>
-            <ac:spMkLst>
-              <pc:docMk/>
-              <pc:sldMasterMk cId="1628519446" sldId="2147483662"/>
-              <pc:sldLayoutMk cId="2057324489" sldId="2147483668"/>
-              <ac:spMk id="5" creationId="{6D1E7A38-AF22-6A81-FE15-CB00BF715AE7}"/>
-            </ac:spMkLst>
-          </pc:spChg>
-          <pc:spChg chg="add del mod">
-            <ac:chgData name="Ashutosh Nandeshwar" userId="a9ab2e22-fa7a-4aa5-ad68-eb0c0d41c1c1" providerId="ADAL" clId="{0F620F38-C139-3F46-8E55-13192B8D315A}" dt="2023-05-13T02:13:51.987" v="192" actId="478"/>
-            <ac:spMkLst>
-              <pc:docMk/>
-              <pc:sldMasterMk cId="1628519446" sldId="2147483662"/>
-              <pc:sldLayoutMk cId="2057324489" sldId="2147483668"/>
-              <ac:spMk id="6" creationId="{8C11D3BD-CB50-F07E-FF83-D6E1B065B970}"/>
-            </ac:spMkLst>
-          </pc:spChg>
-          <pc:spChg chg="add mod">
-            <ac:chgData name="Ashutosh Nandeshwar" userId="a9ab2e22-fa7a-4aa5-ad68-eb0c0d41c1c1" providerId="ADAL" clId="{0F620F38-C139-3F46-8E55-13192B8D315A}" dt="2023-05-13T02:55:30.463" v="216" actId="1035"/>
-            <ac:spMkLst>
-              <pc:docMk/>
-              <pc:sldMasterMk cId="1628519446" sldId="2147483662"/>
-              <pc:sldLayoutMk cId="2057324489" sldId="2147483668"/>
-              <ac:spMk id="7" creationId="{6F5952BE-55A5-1C39-5E5E-035243667E75}"/>
-            </ac:spMkLst>
-          </pc:spChg>
           <pc:spChg chg="mod">
-            <ac:chgData name="Ashutosh Nandeshwar" userId="a9ab2e22-fa7a-4aa5-ad68-eb0c0d41c1c1" providerId="ADAL" clId="{0F620F38-C139-3F46-8E55-13192B8D315A}" dt="2023-05-13T02:55:25.140" v="214" actId="552"/>
+            <ac:chgData name="Devin Heanue" userId="7590fe87-f85b-4db3-af49-40606f5bf96f" providerId="ADAL" clId="{0AE716D6-5FAA-4FA4-BA3F-12263BBDF976}" dt="2026-03-19T13:58:30.797" v="0" actId="16037"/>
             <ac:spMkLst>
               <pc:docMk/>
               <pc:sldMasterMk cId="1628519446" sldId="2147483662"/>
@@ -650,437 +184,105 @@
             </ac:spMkLst>
           </pc:spChg>
         </pc:sldLayoutChg>
-        <pc:sldLayoutChg chg="del">
-          <pc:chgData name="Ashutosh Nandeshwar" userId="a9ab2e22-fa7a-4aa5-ad68-eb0c0d41c1c1" providerId="ADAL" clId="{0F620F38-C139-3F46-8E55-13192B8D315A}" dt="2023-05-13T01:26:55.132" v="49" actId="2696"/>
+      </pc:sldMasterChg>
+      <pc:sldMasterChg chg="addSp modSldLayout sldLayoutOrd">
+        <pc:chgData name="Devin Heanue" userId="7590fe87-f85b-4db3-af49-40606f5bf96f" providerId="ADAL" clId="{0AE716D6-5FAA-4FA4-BA3F-12263BBDF976}" dt="2026-03-26T14:54:47.439" v="86" actId="1076"/>
+        <pc:sldMasterMkLst>
+          <pc:docMk/>
+          <pc:sldMasterMk cId="2908370257" sldId="2147483669"/>
+        </pc:sldMasterMkLst>
+        <pc:spChg chg="add">
+          <ac:chgData name="Devin Heanue" userId="7590fe87-f85b-4db3-af49-40606f5bf96f" providerId="ADAL" clId="{0AE716D6-5FAA-4FA4-BA3F-12263BBDF976}" dt="2026-03-19T13:58:48.720" v="1"/>
+          <ac:spMkLst>
+            <pc:docMk/>
+            <pc:sldMasterMk cId="2908370257" sldId="2147483669"/>
+            <ac:spMk id="7" creationId="{4DB2B117-B05E-B3D6-71CB-835C5A728637}"/>
+          </ac:spMkLst>
+        </pc:spChg>
+        <pc:sldLayoutChg chg="delSp modSp mod ord">
+          <pc:chgData name="Devin Heanue" userId="7590fe87-f85b-4db3-af49-40606f5bf96f" providerId="ADAL" clId="{0AE716D6-5FAA-4FA4-BA3F-12263BBDF976}" dt="2026-03-19T15:55:16.510" v="26" actId="14100"/>
           <pc:sldLayoutMkLst>
             <pc:docMk/>
-            <pc:sldMasterMk cId="1628519446" sldId="2147483662"/>
-            <pc:sldLayoutMk cId="1945495013" sldId="2147483669"/>
+            <pc:sldMasterMk cId="2908370257" sldId="2147483669"/>
+            <pc:sldLayoutMk cId="176462580" sldId="2147483671"/>
           </pc:sldLayoutMkLst>
+          <pc:spChg chg="mod">
+            <ac:chgData name="Devin Heanue" userId="7590fe87-f85b-4db3-af49-40606f5bf96f" providerId="ADAL" clId="{0AE716D6-5FAA-4FA4-BA3F-12263BBDF976}" dt="2026-03-19T15:55:16.510" v="26" actId="14100"/>
+            <ac:spMkLst>
+              <pc:docMk/>
+              <pc:sldMasterMk cId="2908370257" sldId="2147483669"/>
+              <pc:sldLayoutMk cId="176462580" sldId="2147483671"/>
+              <ac:spMk id="3" creationId="{161CCDB9-B20B-B812-9DCA-0122035D8EEE}"/>
+            </ac:spMkLst>
+          </pc:spChg>
         </pc:sldLayoutChg>
-        <pc:sldLayoutChg chg="del">
-          <pc:chgData name="Ashutosh Nandeshwar" userId="a9ab2e22-fa7a-4aa5-ad68-eb0c0d41c1c1" providerId="ADAL" clId="{0F620F38-C139-3F46-8E55-13192B8D315A}" dt="2023-05-13T01:26:55.159" v="62" actId="2696"/>
+        <pc:sldLayoutChg chg="modSp mod ord">
+          <pc:chgData name="Devin Heanue" userId="7590fe87-f85b-4db3-af49-40606f5bf96f" providerId="ADAL" clId="{0AE716D6-5FAA-4FA4-BA3F-12263BBDF976}" dt="2026-03-19T15:49:12.740" v="19" actId="12"/>
           <pc:sldLayoutMkLst>
             <pc:docMk/>
-            <pc:sldMasterMk cId="1628519446" sldId="2147483662"/>
-            <pc:sldLayoutMk cId="4056619387" sldId="2147483670"/>
+            <pc:sldMasterMk cId="2908370257" sldId="2147483669"/>
+            <pc:sldLayoutMk cId="652845060" sldId="2147483681"/>
           </pc:sldLayoutMkLst>
+          <pc:spChg chg="mod">
+            <ac:chgData name="Devin Heanue" userId="7590fe87-f85b-4db3-af49-40606f5bf96f" providerId="ADAL" clId="{0AE716D6-5FAA-4FA4-BA3F-12263BBDF976}" dt="2026-03-19T15:41:37.800" v="10" actId="12"/>
+            <ac:spMkLst>
+              <pc:docMk/>
+              <pc:sldMasterMk cId="2908370257" sldId="2147483669"/>
+              <pc:sldLayoutMk cId="652845060" sldId="2147483681"/>
+              <ac:spMk id="5" creationId="{33A7C9B6-DBD7-2B61-DD27-B359459C6DBE}"/>
+            </ac:spMkLst>
+          </pc:spChg>
+          <pc:spChg chg="mod">
+            <ac:chgData name="Devin Heanue" userId="7590fe87-f85b-4db3-af49-40606f5bf96f" providerId="ADAL" clId="{0AE716D6-5FAA-4FA4-BA3F-12263BBDF976}" dt="2026-03-19T15:49:12.740" v="19" actId="12"/>
+            <ac:spMkLst>
+              <pc:docMk/>
+              <pc:sldMasterMk cId="2908370257" sldId="2147483669"/>
+              <pc:sldLayoutMk cId="652845060" sldId="2147483681"/>
+              <ac:spMk id="7" creationId="{6F5952BE-55A5-1C39-5E5E-035243667E75}"/>
+            </ac:spMkLst>
+          </pc:spChg>
         </pc:sldLayoutChg>
-        <pc:sldLayoutChg chg="del">
-          <pc:chgData name="Ashutosh Nandeshwar" userId="a9ab2e22-fa7a-4aa5-ad68-eb0c0d41c1c1" providerId="ADAL" clId="{0F620F38-C139-3F46-8E55-13192B8D315A}" dt="2023-05-13T01:26:54.775" v="33" actId="2696"/>
+        <pc:sldLayoutChg chg="modSp mod ord">
+          <pc:chgData name="Devin Heanue" userId="7590fe87-f85b-4db3-af49-40606f5bf96f" providerId="ADAL" clId="{0AE716D6-5FAA-4FA4-BA3F-12263BBDF976}" dt="2026-03-26T14:54:47.439" v="86" actId="1076"/>
           <pc:sldLayoutMkLst>
             <pc:docMk/>
-            <pc:sldMasterMk cId="1628519446" sldId="2147483662"/>
-            <pc:sldLayoutMk cId="1622815521" sldId="2147483671"/>
-          </pc:sldLayoutMkLst>
-        </pc:sldLayoutChg>
-        <pc:sldLayoutChg chg="del">
-          <pc:chgData name="Ashutosh Nandeshwar" userId="a9ab2e22-fa7a-4aa5-ad68-eb0c0d41c1c1" providerId="ADAL" clId="{0F620F38-C139-3F46-8E55-13192B8D315A}" dt="2023-05-13T01:26:54.956" v="43" actId="2696"/>
-          <pc:sldLayoutMkLst>
-            <pc:docMk/>
-            <pc:sldMasterMk cId="1628519446" sldId="2147483662"/>
-            <pc:sldLayoutMk cId="2098058602" sldId="2147483672"/>
-          </pc:sldLayoutMkLst>
-        </pc:sldLayoutChg>
-        <pc:sldLayoutChg chg="del">
-          <pc:chgData name="Ashutosh Nandeshwar" userId="a9ab2e22-fa7a-4aa5-ad68-eb0c0d41c1c1" providerId="ADAL" clId="{0F620F38-C139-3F46-8E55-13192B8D315A}" dt="2023-05-13T01:26:54.772" v="29" actId="2696"/>
-          <pc:sldLayoutMkLst>
-            <pc:docMk/>
-            <pc:sldMasterMk cId="1628519446" sldId="2147483662"/>
-            <pc:sldLayoutMk cId="633637811" sldId="2147483673"/>
-          </pc:sldLayoutMkLst>
-        </pc:sldLayoutChg>
-        <pc:sldLayoutChg chg="del">
-          <pc:chgData name="Ashutosh Nandeshwar" userId="a9ab2e22-fa7a-4aa5-ad68-eb0c0d41c1c1" providerId="ADAL" clId="{0F620F38-C139-3F46-8E55-13192B8D315A}" dt="2023-05-13T01:26:54.765" v="26" actId="2696"/>
-          <pc:sldLayoutMkLst>
-            <pc:docMk/>
-            <pc:sldMasterMk cId="1628519446" sldId="2147483662"/>
-            <pc:sldLayoutMk cId="2983984519" sldId="2147483674"/>
-          </pc:sldLayoutMkLst>
-        </pc:sldLayoutChg>
-        <pc:sldLayoutChg chg="del">
-          <pc:chgData name="Ashutosh Nandeshwar" userId="a9ab2e22-fa7a-4aa5-ad68-eb0c0d41c1c1" providerId="ADAL" clId="{0F620F38-C139-3F46-8E55-13192B8D315A}" dt="2023-05-13T01:26:54.759" v="21" actId="2696"/>
-          <pc:sldLayoutMkLst>
-            <pc:docMk/>
-            <pc:sldMasterMk cId="1628519446" sldId="2147483662"/>
-            <pc:sldLayoutMk cId="3650155559" sldId="2147483675"/>
-          </pc:sldLayoutMkLst>
-        </pc:sldLayoutChg>
-        <pc:sldLayoutChg chg="del">
-          <pc:chgData name="Ashutosh Nandeshwar" userId="a9ab2e22-fa7a-4aa5-ad68-eb0c0d41c1c1" providerId="ADAL" clId="{0F620F38-C139-3F46-8E55-13192B8D315A}" dt="2023-05-13T01:26:55.166" v="63" actId="2696"/>
-          <pc:sldLayoutMkLst>
-            <pc:docMk/>
-            <pc:sldMasterMk cId="1628519446" sldId="2147483662"/>
-            <pc:sldLayoutMk cId="46111502" sldId="2147483676"/>
-          </pc:sldLayoutMkLst>
-        </pc:sldLayoutChg>
-        <pc:sldLayoutChg chg="del">
-          <pc:chgData name="Ashutosh Nandeshwar" userId="a9ab2e22-fa7a-4aa5-ad68-eb0c0d41c1c1" providerId="ADAL" clId="{0F620F38-C139-3F46-8E55-13192B8D315A}" dt="2023-05-13T01:26:54.954" v="40" actId="2696"/>
-          <pc:sldLayoutMkLst>
-            <pc:docMk/>
-            <pc:sldMasterMk cId="1628519446" sldId="2147483662"/>
-            <pc:sldLayoutMk cId="1749466535" sldId="2147483677"/>
-          </pc:sldLayoutMkLst>
-        </pc:sldLayoutChg>
-        <pc:sldLayoutChg chg="del">
-          <pc:chgData name="Ashutosh Nandeshwar" userId="a9ab2e22-fa7a-4aa5-ad68-eb0c0d41c1c1" providerId="ADAL" clId="{0F620F38-C139-3F46-8E55-13192B8D315A}" dt="2023-05-13T01:26:54.764" v="25" actId="2696"/>
-          <pc:sldLayoutMkLst>
-            <pc:docMk/>
-            <pc:sldMasterMk cId="1628519446" sldId="2147483662"/>
-            <pc:sldLayoutMk cId="617830710" sldId="2147483678"/>
-          </pc:sldLayoutMkLst>
-        </pc:sldLayoutChg>
-        <pc:sldLayoutChg chg="del">
-          <pc:chgData name="Ashutosh Nandeshwar" userId="a9ab2e22-fa7a-4aa5-ad68-eb0c0d41c1c1" providerId="ADAL" clId="{0F620F38-C139-3F46-8E55-13192B8D315A}" dt="2023-05-13T01:26:55.139" v="56" actId="2696"/>
-          <pc:sldLayoutMkLst>
-            <pc:docMk/>
-            <pc:sldMasterMk cId="1628519446" sldId="2147483662"/>
-            <pc:sldLayoutMk cId="1414632775" sldId="2147483679"/>
-          </pc:sldLayoutMkLst>
-        </pc:sldLayoutChg>
-        <pc:sldLayoutChg chg="del">
-          <pc:chgData name="Ashutosh Nandeshwar" userId="a9ab2e22-fa7a-4aa5-ad68-eb0c0d41c1c1" providerId="ADAL" clId="{0F620F38-C139-3F46-8E55-13192B8D315A}" dt="2023-05-13T01:26:54.751" v="20" actId="2696"/>
-          <pc:sldLayoutMkLst>
-            <pc:docMk/>
-            <pc:sldMasterMk cId="1628519446" sldId="2147483662"/>
-            <pc:sldLayoutMk cId="2846355647" sldId="2147483680"/>
-          </pc:sldLayoutMkLst>
-        </pc:sldLayoutChg>
-        <pc:sldLayoutChg chg="del">
-          <pc:chgData name="Ashutosh Nandeshwar" userId="a9ab2e22-fa7a-4aa5-ad68-eb0c0d41c1c1" providerId="ADAL" clId="{0F620F38-C139-3F46-8E55-13192B8D315A}" dt="2023-05-13T01:26:55.158" v="61" actId="2696"/>
-          <pc:sldLayoutMkLst>
-            <pc:docMk/>
-            <pc:sldMasterMk cId="1628519446" sldId="2147483662"/>
-            <pc:sldLayoutMk cId="2078559584" sldId="2147483681"/>
-          </pc:sldLayoutMkLst>
-        </pc:sldLayoutChg>
-        <pc:sldLayoutChg chg="del">
-          <pc:chgData name="Ashutosh Nandeshwar" userId="a9ab2e22-fa7a-4aa5-ad68-eb0c0d41c1c1" providerId="ADAL" clId="{0F620F38-C139-3F46-8E55-13192B8D315A}" dt="2023-05-13T01:26:55.129" v="46" actId="2696"/>
-          <pc:sldLayoutMkLst>
-            <pc:docMk/>
-            <pc:sldMasterMk cId="1628519446" sldId="2147483662"/>
-            <pc:sldLayoutMk cId="3620340875" sldId="2147483682"/>
-          </pc:sldLayoutMkLst>
-        </pc:sldLayoutChg>
-        <pc:sldLayoutChg chg="del">
-          <pc:chgData name="Ashutosh Nandeshwar" userId="a9ab2e22-fa7a-4aa5-ad68-eb0c0d41c1c1" providerId="ADAL" clId="{0F620F38-C139-3F46-8E55-13192B8D315A}" dt="2023-05-13T01:26:54.953" v="39" actId="2696"/>
-          <pc:sldLayoutMkLst>
-            <pc:docMk/>
-            <pc:sldMasterMk cId="1628519446" sldId="2147483662"/>
-            <pc:sldLayoutMk cId="3905293468" sldId="2147483683"/>
-          </pc:sldLayoutMkLst>
-        </pc:sldLayoutChg>
-        <pc:sldLayoutChg chg="del">
-          <pc:chgData name="Ashutosh Nandeshwar" userId="a9ab2e22-fa7a-4aa5-ad68-eb0c0d41c1c1" providerId="ADAL" clId="{0F620F38-C139-3F46-8E55-13192B8D315A}" dt="2023-05-13T01:26:54.951" v="36" actId="2696"/>
-          <pc:sldLayoutMkLst>
-            <pc:docMk/>
-            <pc:sldMasterMk cId="1628519446" sldId="2147483662"/>
-            <pc:sldLayoutMk cId="187861256" sldId="2147483684"/>
-          </pc:sldLayoutMkLst>
-        </pc:sldLayoutChg>
-        <pc:sldLayoutChg chg="del">
-          <pc:chgData name="Ashutosh Nandeshwar" userId="a9ab2e22-fa7a-4aa5-ad68-eb0c0d41c1c1" providerId="ADAL" clId="{0F620F38-C139-3F46-8E55-13192B8D315A}" dt="2023-05-13T01:26:54.750" v="19" actId="2696"/>
-          <pc:sldLayoutMkLst>
-            <pc:docMk/>
-            <pc:sldMasterMk cId="1628519446" sldId="2147483662"/>
-            <pc:sldLayoutMk cId="256668854" sldId="2147483685"/>
-          </pc:sldLayoutMkLst>
-        </pc:sldLayoutChg>
-        <pc:sldLayoutChg chg="del">
-          <pc:chgData name="Ashutosh Nandeshwar" userId="a9ab2e22-fa7a-4aa5-ad68-eb0c0d41c1c1" providerId="ADAL" clId="{0F620F38-C139-3F46-8E55-13192B8D315A}" dt="2023-05-13T01:26:55.136" v="52" actId="2696"/>
-          <pc:sldLayoutMkLst>
-            <pc:docMk/>
-            <pc:sldMasterMk cId="1628519446" sldId="2147483662"/>
-            <pc:sldLayoutMk cId="2965400551" sldId="2147483686"/>
-          </pc:sldLayoutMkLst>
-        </pc:sldLayoutChg>
-        <pc:sldLayoutChg chg="del">
-          <pc:chgData name="Ashutosh Nandeshwar" userId="a9ab2e22-fa7a-4aa5-ad68-eb0c0d41c1c1" providerId="ADAL" clId="{0F620F38-C139-3F46-8E55-13192B8D315A}" dt="2023-05-13T01:26:54.774" v="32" actId="2696"/>
-          <pc:sldLayoutMkLst>
-            <pc:docMk/>
-            <pc:sldMasterMk cId="1628519446" sldId="2147483662"/>
-            <pc:sldLayoutMk cId="1722498004" sldId="2147483687"/>
-          </pc:sldLayoutMkLst>
-        </pc:sldLayoutChg>
-        <pc:sldLayoutChg chg="del">
-          <pc:chgData name="Ashutosh Nandeshwar" userId="a9ab2e22-fa7a-4aa5-ad68-eb0c0d41c1c1" providerId="ADAL" clId="{0F620F38-C139-3F46-8E55-13192B8D315A}" dt="2023-05-13T01:26:54.952" v="38" actId="2696"/>
-          <pc:sldLayoutMkLst>
-            <pc:docMk/>
-            <pc:sldMasterMk cId="1628519446" sldId="2147483662"/>
-            <pc:sldLayoutMk cId="2653095786" sldId="2147483688"/>
-          </pc:sldLayoutMkLst>
-        </pc:sldLayoutChg>
-        <pc:sldLayoutChg chg="del">
-          <pc:chgData name="Ashutosh Nandeshwar" userId="a9ab2e22-fa7a-4aa5-ad68-eb0c0d41c1c1" providerId="ADAL" clId="{0F620F38-C139-3F46-8E55-13192B8D315A}" dt="2023-05-13T01:26:55.140" v="58" actId="2696"/>
-          <pc:sldLayoutMkLst>
-            <pc:docMk/>
-            <pc:sldMasterMk cId="1628519446" sldId="2147483662"/>
-            <pc:sldLayoutMk cId="3073173177" sldId="2147483689"/>
-          </pc:sldLayoutMkLst>
-        </pc:sldLayoutChg>
-        <pc:sldLayoutChg chg="del">
-          <pc:chgData name="Ashutosh Nandeshwar" userId="a9ab2e22-fa7a-4aa5-ad68-eb0c0d41c1c1" providerId="ADAL" clId="{0F620F38-C139-3F46-8E55-13192B8D315A}" dt="2023-05-13T01:26:54.772" v="30" actId="2696"/>
-          <pc:sldLayoutMkLst>
-            <pc:docMk/>
-            <pc:sldMasterMk cId="1628519446" sldId="2147483662"/>
-            <pc:sldLayoutMk cId="3736306220" sldId="2147483690"/>
-          </pc:sldLayoutMkLst>
-        </pc:sldLayoutChg>
-        <pc:sldLayoutChg chg="del">
-          <pc:chgData name="Ashutosh Nandeshwar" userId="a9ab2e22-fa7a-4aa5-ad68-eb0c0d41c1c1" providerId="ADAL" clId="{0F620F38-C139-3F46-8E55-13192B8D315A}" dt="2023-05-13T01:26:54.952" v="37" actId="2696"/>
-          <pc:sldLayoutMkLst>
-            <pc:docMk/>
-            <pc:sldMasterMk cId="1628519446" sldId="2147483662"/>
-            <pc:sldLayoutMk cId="1540257556" sldId="2147483691"/>
-          </pc:sldLayoutMkLst>
-        </pc:sldLayoutChg>
-        <pc:sldLayoutChg chg="del">
-          <pc:chgData name="Ashutosh Nandeshwar" userId="a9ab2e22-fa7a-4aa5-ad68-eb0c0d41c1c1" providerId="ADAL" clId="{0F620F38-C139-3F46-8E55-13192B8D315A}" dt="2023-05-13T01:26:55.139" v="57" actId="2696"/>
-          <pc:sldLayoutMkLst>
-            <pc:docMk/>
-            <pc:sldMasterMk cId="1628519446" sldId="2147483662"/>
-            <pc:sldLayoutMk cId="1963953103" sldId="2147483692"/>
-          </pc:sldLayoutMkLst>
-        </pc:sldLayoutChg>
-        <pc:sldLayoutChg chg="del">
-          <pc:chgData name="Ashutosh Nandeshwar" userId="a9ab2e22-fa7a-4aa5-ad68-eb0c0d41c1c1" providerId="ADAL" clId="{0F620F38-C139-3F46-8E55-13192B8D315A}" dt="2023-05-13T01:26:55.141" v="60" actId="2696"/>
-          <pc:sldLayoutMkLst>
-            <pc:docMk/>
-            <pc:sldMasterMk cId="1628519446" sldId="2147483662"/>
-            <pc:sldLayoutMk cId="1516476346" sldId="2147483693"/>
-          </pc:sldLayoutMkLst>
-        </pc:sldLayoutChg>
-        <pc:sldLayoutChg chg="del">
-          <pc:chgData name="Ashutosh Nandeshwar" userId="a9ab2e22-fa7a-4aa5-ad68-eb0c0d41c1c1" providerId="ADAL" clId="{0F620F38-C139-3F46-8E55-13192B8D315A}" dt="2023-05-13T01:26:55.140" v="59" actId="2696"/>
-          <pc:sldLayoutMkLst>
-            <pc:docMk/>
-            <pc:sldMasterMk cId="1628519446" sldId="2147483662"/>
-            <pc:sldLayoutMk cId="3718354204" sldId="2147483694"/>
-          </pc:sldLayoutMkLst>
-        </pc:sldLayoutChg>
-        <pc:sldLayoutChg chg="del">
-          <pc:chgData name="Ashutosh Nandeshwar" userId="a9ab2e22-fa7a-4aa5-ad68-eb0c0d41c1c1" providerId="ADAL" clId="{0F620F38-C139-3F46-8E55-13192B8D315A}" dt="2023-05-13T01:26:55.138" v="55" actId="2696"/>
-          <pc:sldLayoutMkLst>
-            <pc:docMk/>
-            <pc:sldMasterMk cId="1628519446" sldId="2147483662"/>
-            <pc:sldLayoutMk cId="1573534224" sldId="2147483695"/>
-          </pc:sldLayoutMkLst>
-        </pc:sldLayoutChg>
-        <pc:sldLayoutChg chg="del">
-          <pc:chgData name="Ashutosh Nandeshwar" userId="a9ab2e22-fa7a-4aa5-ad68-eb0c0d41c1c1" providerId="ADAL" clId="{0F620F38-C139-3F46-8E55-13192B8D315A}" dt="2023-05-13T01:26:54.955" v="41" actId="2696"/>
-          <pc:sldLayoutMkLst>
-            <pc:docMk/>
-            <pc:sldMasterMk cId="1628519446" sldId="2147483662"/>
-            <pc:sldLayoutMk cId="1805340407" sldId="2147483696"/>
-          </pc:sldLayoutMkLst>
-        </pc:sldLayoutChg>
-        <pc:sldLayoutChg chg="del">
-          <pc:chgData name="Ashutosh Nandeshwar" userId="a9ab2e22-fa7a-4aa5-ad68-eb0c0d41c1c1" providerId="ADAL" clId="{0F620F38-C139-3F46-8E55-13192B8D315A}" dt="2023-05-13T01:26:54.762" v="24" actId="2696"/>
-          <pc:sldLayoutMkLst>
-            <pc:docMk/>
-            <pc:sldMasterMk cId="1628519446" sldId="2147483662"/>
-            <pc:sldLayoutMk cId="3905245105" sldId="2147483697"/>
-          </pc:sldLayoutMkLst>
-        </pc:sldLayoutChg>
-        <pc:sldLayoutChg chg="del">
-          <pc:chgData name="Ashutosh Nandeshwar" userId="a9ab2e22-fa7a-4aa5-ad68-eb0c0d41c1c1" providerId="ADAL" clId="{0F620F38-C139-3F46-8E55-13192B8D315A}" dt="2023-05-13T01:26:54.770" v="28" actId="2696"/>
-          <pc:sldLayoutMkLst>
-            <pc:docMk/>
-            <pc:sldMasterMk cId="1628519446" sldId="2147483662"/>
-            <pc:sldLayoutMk cId="204674388" sldId="2147483698"/>
-          </pc:sldLayoutMkLst>
-        </pc:sldLayoutChg>
-        <pc:sldLayoutChg chg="del">
-          <pc:chgData name="Ashutosh Nandeshwar" userId="a9ab2e22-fa7a-4aa5-ad68-eb0c0d41c1c1" providerId="ADAL" clId="{0F620F38-C139-3F46-8E55-13192B8D315A}" dt="2023-05-13T01:26:54.776" v="35" actId="2696"/>
-          <pc:sldLayoutMkLst>
-            <pc:docMk/>
-            <pc:sldMasterMk cId="1628519446" sldId="2147483662"/>
-            <pc:sldLayoutMk cId="1439015726" sldId="2147483699"/>
-          </pc:sldLayoutMkLst>
-        </pc:sldLayoutChg>
-        <pc:sldLayoutChg chg="del">
-          <pc:chgData name="Ashutosh Nandeshwar" userId="a9ab2e22-fa7a-4aa5-ad68-eb0c0d41c1c1" providerId="ADAL" clId="{0F620F38-C139-3F46-8E55-13192B8D315A}" dt="2023-05-13T01:26:55.131" v="48" actId="2696"/>
-          <pc:sldLayoutMkLst>
-            <pc:docMk/>
-            <pc:sldMasterMk cId="1628519446" sldId="2147483662"/>
-            <pc:sldLayoutMk cId="1852443941" sldId="2147483700"/>
-          </pc:sldLayoutMkLst>
-        </pc:sldLayoutChg>
-        <pc:sldLayoutChg chg="del">
-          <pc:chgData name="Ashutosh Nandeshwar" userId="a9ab2e22-fa7a-4aa5-ad68-eb0c0d41c1c1" providerId="ADAL" clId="{0F620F38-C139-3F46-8E55-13192B8D315A}" dt="2023-05-13T01:26:54.748" v="18" actId="2696"/>
-          <pc:sldLayoutMkLst>
-            <pc:docMk/>
-            <pc:sldMasterMk cId="1628519446" sldId="2147483662"/>
-            <pc:sldLayoutMk cId="1181206331" sldId="2147483701"/>
-          </pc:sldLayoutMkLst>
-        </pc:sldLayoutChg>
-        <pc:sldLayoutChg chg="del">
-          <pc:chgData name="Ashutosh Nandeshwar" userId="a9ab2e22-fa7a-4aa5-ad68-eb0c0d41c1c1" providerId="ADAL" clId="{0F620F38-C139-3F46-8E55-13192B8D315A}" dt="2023-05-13T01:26:54.747" v="17" actId="2696"/>
-          <pc:sldLayoutMkLst>
-            <pc:docMk/>
-            <pc:sldMasterMk cId="1628519446" sldId="2147483662"/>
-            <pc:sldLayoutMk cId="2143993587" sldId="2147483702"/>
-          </pc:sldLayoutMkLst>
-        </pc:sldLayoutChg>
-        <pc:sldLayoutChg chg="del">
-          <pc:chgData name="Ashutosh Nandeshwar" userId="a9ab2e22-fa7a-4aa5-ad68-eb0c0d41c1c1" providerId="ADAL" clId="{0F620F38-C139-3F46-8E55-13192B8D315A}" dt="2023-05-13T01:26:54.957" v="44" actId="2696"/>
-          <pc:sldLayoutMkLst>
-            <pc:docMk/>
-            <pc:sldMasterMk cId="1628519446" sldId="2147483662"/>
-            <pc:sldLayoutMk cId="108114783" sldId="2147483703"/>
-          </pc:sldLayoutMkLst>
-        </pc:sldLayoutChg>
-        <pc:sldLayoutChg chg="del">
-          <pc:chgData name="Ashutosh Nandeshwar" userId="a9ab2e22-fa7a-4aa5-ad68-eb0c0d41c1c1" providerId="ADAL" clId="{0F620F38-C139-3F46-8E55-13192B8D315A}" dt="2023-05-13T01:26:54.739" v="15" actId="2696"/>
-          <pc:sldLayoutMkLst>
-            <pc:docMk/>
-            <pc:sldMasterMk cId="1628519446" sldId="2147483662"/>
-            <pc:sldLayoutMk cId="1420221853" sldId="2147483704"/>
-          </pc:sldLayoutMkLst>
-        </pc:sldLayoutChg>
-        <pc:sldLayoutChg chg="del">
-          <pc:chgData name="Ashutosh Nandeshwar" userId="a9ab2e22-fa7a-4aa5-ad68-eb0c0d41c1c1" providerId="ADAL" clId="{0F620F38-C139-3F46-8E55-13192B8D315A}" dt="2023-05-13T01:26:54.761" v="23" actId="2696"/>
-          <pc:sldLayoutMkLst>
-            <pc:docMk/>
-            <pc:sldMasterMk cId="1628519446" sldId="2147483662"/>
-            <pc:sldLayoutMk cId="1015372002" sldId="2147483705"/>
-          </pc:sldLayoutMkLst>
-        </pc:sldLayoutChg>
-        <pc:sldLayoutChg chg="del">
-          <pc:chgData name="Ashutosh Nandeshwar" userId="a9ab2e22-fa7a-4aa5-ad68-eb0c0d41c1c1" providerId="ADAL" clId="{0F620F38-C139-3F46-8E55-13192B8D315A}" dt="2023-05-13T01:26:54.956" v="42" actId="2696"/>
-          <pc:sldLayoutMkLst>
-            <pc:docMk/>
-            <pc:sldMasterMk cId="1628519446" sldId="2147483662"/>
-            <pc:sldLayoutMk cId="4225313397" sldId="2147483706"/>
-          </pc:sldLayoutMkLst>
-        </pc:sldLayoutChg>
-        <pc:sldLayoutChg chg="del">
-          <pc:chgData name="Ashutosh Nandeshwar" userId="a9ab2e22-fa7a-4aa5-ad68-eb0c0d41c1c1" providerId="ADAL" clId="{0F620F38-C139-3F46-8E55-13192B8D315A}" dt="2023-05-13T01:26:55.137" v="54" actId="2696"/>
-          <pc:sldLayoutMkLst>
-            <pc:docMk/>
-            <pc:sldMasterMk cId="1628519446" sldId="2147483662"/>
-            <pc:sldLayoutMk cId="591094825" sldId="2147483707"/>
-          </pc:sldLayoutMkLst>
-        </pc:sldLayoutChg>
-        <pc:sldLayoutChg chg="del">
-          <pc:chgData name="Ashutosh Nandeshwar" userId="a9ab2e22-fa7a-4aa5-ad68-eb0c0d41c1c1" providerId="ADAL" clId="{0F620F38-C139-3F46-8E55-13192B8D315A}" dt="2023-05-13T01:26:54.773" v="31" actId="2696"/>
-          <pc:sldLayoutMkLst>
-            <pc:docMk/>
-            <pc:sldMasterMk cId="1628519446" sldId="2147483662"/>
-            <pc:sldLayoutMk cId="1048327599" sldId="2147483708"/>
-          </pc:sldLayoutMkLst>
-        </pc:sldLayoutChg>
-        <pc:sldLayoutChg chg="del">
-          <pc:chgData name="Ashutosh Nandeshwar" userId="a9ab2e22-fa7a-4aa5-ad68-eb0c0d41c1c1" providerId="ADAL" clId="{0F620F38-C139-3F46-8E55-13192B8D315A}" dt="2023-05-13T01:26:54.776" v="34" actId="2696"/>
-          <pc:sldLayoutMkLst>
-            <pc:docMk/>
-            <pc:sldMasterMk cId="1628519446" sldId="2147483662"/>
-            <pc:sldLayoutMk cId="2387260848" sldId="2147483709"/>
-          </pc:sldLayoutMkLst>
-        </pc:sldLayoutChg>
-        <pc:sldLayoutChg chg="del">
-          <pc:chgData name="Ashutosh Nandeshwar" userId="a9ab2e22-fa7a-4aa5-ad68-eb0c0d41c1c1" providerId="ADAL" clId="{0F620F38-C139-3F46-8E55-13192B8D315A}" dt="2023-05-13T01:26:54.738" v="14" actId="2696"/>
-          <pc:sldLayoutMkLst>
-            <pc:docMk/>
-            <pc:sldMasterMk cId="1628519446" sldId="2147483662"/>
-            <pc:sldLayoutMk cId="1413367120" sldId="2147483710"/>
-          </pc:sldLayoutMkLst>
-        </pc:sldLayoutChg>
-        <pc:sldLayoutChg chg="del">
-          <pc:chgData name="Ashutosh Nandeshwar" userId="a9ab2e22-fa7a-4aa5-ad68-eb0c0d41c1c1" providerId="ADAL" clId="{0F620F38-C139-3F46-8E55-13192B8D315A}" dt="2023-05-13T01:26:54.958" v="45" actId="2696"/>
-          <pc:sldLayoutMkLst>
-            <pc:docMk/>
-            <pc:sldMasterMk cId="1628519446" sldId="2147483662"/>
-            <pc:sldLayoutMk cId="1353937925" sldId="2147483711"/>
-          </pc:sldLayoutMkLst>
-        </pc:sldLayoutChg>
-        <pc:sldLayoutChg chg="del">
-          <pc:chgData name="Ashutosh Nandeshwar" userId="a9ab2e22-fa7a-4aa5-ad68-eb0c0d41c1c1" providerId="ADAL" clId="{0F620F38-C139-3F46-8E55-13192B8D315A}" dt="2023-05-13T01:26:55.137" v="53" actId="2696"/>
-          <pc:sldLayoutMkLst>
-            <pc:docMk/>
-            <pc:sldMasterMk cId="1628519446" sldId="2147483662"/>
-            <pc:sldLayoutMk cId="1224505037" sldId="2147483712"/>
-          </pc:sldLayoutMkLst>
-        </pc:sldLayoutChg>
-        <pc:sldLayoutChg chg="del">
-          <pc:chgData name="Ashutosh Nandeshwar" userId="a9ab2e22-fa7a-4aa5-ad68-eb0c0d41c1c1" providerId="ADAL" clId="{0F620F38-C139-3F46-8E55-13192B8D315A}" dt="2023-05-13T01:26:55.130" v="47" actId="2696"/>
-          <pc:sldLayoutMkLst>
-            <pc:docMk/>
-            <pc:sldMasterMk cId="1628519446" sldId="2147483662"/>
-            <pc:sldLayoutMk cId="1835967805" sldId="2147483713"/>
-          </pc:sldLayoutMkLst>
-        </pc:sldLayoutChg>
-        <pc:sldLayoutChg chg="del">
-          <pc:chgData name="Ashutosh Nandeshwar" userId="a9ab2e22-fa7a-4aa5-ad68-eb0c0d41c1c1" providerId="ADAL" clId="{0F620F38-C139-3F46-8E55-13192B8D315A}" dt="2023-05-13T01:26:55.132" v="50" actId="2696"/>
-          <pc:sldLayoutMkLst>
-            <pc:docMk/>
-            <pc:sldMasterMk cId="1628519446" sldId="2147483662"/>
-            <pc:sldLayoutMk cId="1138812908" sldId="2147483714"/>
-          </pc:sldLayoutMkLst>
-        </pc:sldLayoutChg>
-      </pc:sldMasterChg>
-    </pc:docChg>
-  </pc:docChgLst>
-  <pc:docChgLst>
-    <pc:chgData name="Ashutosh Nandeshwar" userId="a9ab2e22-fa7a-4aa5-ad68-eb0c0d41c1c1" providerId="ADAL" clId="{9F04EF91-AD59-DB42-8C91-DA74278E5BA3}"/>
-    <pc:docChg chg="undo custSel modSld modMainMaster">
-      <pc:chgData name="Ashutosh Nandeshwar" userId="a9ab2e22-fa7a-4aa5-ad68-eb0c0d41c1c1" providerId="ADAL" clId="{9F04EF91-AD59-DB42-8C91-DA74278E5BA3}" dt="2023-09-12T01:11:22.149" v="19" actId="1076"/>
-      <pc:docMkLst>
-        <pc:docMk/>
-      </pc:docMkLst>
-      <pc:sldChg chg="addSp modSp mod">
-        <pc:chgData name="Ashutosh Nandeshwar" userId="a9ab2e22-fa7a-4aa5-ad68-eb0c0d41c1c1" providerId="ADAL" clId="{9F04EF91-AD59-DB42-8C91-DA74278E5BA3}" dt="2023-09-12T01:07:53.737" v="16" actId="14100"/>
-        <pc:sldMkLst>
-          <pc:docMk/>
-          <pc:sldMk cId="327460940" sldId="257"/>
-        </pc:sldMkLst>
-        <pc:spChg chg="add mod">
-          <ac:chgData name="Ashutosh Nandeshwar" userId="a9ab2e22-fa7a-4aa5-ad68-eb0c0d41c1c1" providerId="ADAL" clId="{9F04EF91-AD59-DB42-8C91-DA74278E5BA3}" dt="2023-09-12T01:07:53.737" v="16" actId="14100"/>
-          <ac:spMkLst>
-            <pc:docMk/>
-            <pc:sldMk cId="327460940" sldId="257"/>
-            <ac:spMk id="2" creationId="{FFB7382F-546E-F283-25FF-AEE2E88255DF}"/>
-          </ac:spMkLst>
-        </pc:spChg>
-      </pc:sldChg>
-      <pc:sldMasterChg chg="modSldLayout">
-        <pc:chgData name="Ashutosh Nandeshwar" userId="a9ab2e22-fa7a-4aa5-ad68-eb0c0d41c1c1" providerId="ADAL" clId="{9F04EF91-AD59-DB42-8C91-DA74278E5BA3}" dt="2023-09-12T01:11:22.149" v="19" actId="1076"/>
-        <pc:sldMasterMkLst>
-          <pc:docMk/>
-          <pc:sldMasterMk cId="983183760" sldId="2147483648"/>
-        </pc:sldMasterMkLst>
-        <pc:sldLayoutChg chg="modSp mod">
-          <pc:chgData name="Ashutosh Nandeshwar" userId="a9ab2e22-fa7a-4aa5-ad68-eb0c0d41c1c1" providerId="ADAL" clId="{9F04EF91-AD59-DB42-8C91-DA74278E5BA3}" dt="2023-09-12T01:11:22.149" v="19" actId="1076"/>
-          <pc:sldLayoutMkLst>
-            <pc:docMk/>
-            <pc:sldMasterMk cId="983183760" sldId="2147483648"/>
-            <pc:sldLayoutMk cId="1127028118" sldId="2147483661"/>
+            <pc:sldMasterMk cId="2908370257" sldId="2147483669"/>
+            <pc:sldLayoutMk cId="2751855050" sldId="2147483682"/>
           </pc:sldLayoutMkLst>
           <pc:spChg chg="mod">
-            <ac:chgData name="Ashutosh Nandeshwar" userId="a9ab2e22-fa7a-4aa5-ad68-eb0c0d41c1c1" providerId="ADAL" clId="{9F04EF91-AD59-DB42-8C91-DA74278E5BA3}" dt="2023-09-12T01:02:50.185" v="3" actId="207"/>
+            <ac:chgData name="Devin Heanue" userId="7590fe87-f85b-4db3-af49-40606f5bf96f" providerId="ADAL" clId="{0AE716D6-5FAA-4FA4-BA3F-12263BBDF976}" dt="2026-03-26T14:54:47.439" v="86" actId="1076"/>
             <ac:spMkLst>
               <pc:docMk/>
-              <pc:sldMasterMk cId="983183760" sldId="2147483648"/>
-              <pc:sldLayoutMk cId="1127028118" sldId="2147483661"/>
+              <pc:sldMasterMk cId="2908370257" sldId="2147483669"/>
+              <pc:sldLayoutMk cId="2751855050" sldId="2147483682"/>
               <ac:spMk id="3" creationId="{4B628F13-B15B-4945-6975-DCF8412B5C9E}"/>
             </ac:spMkLst>
           </pc:spChg>
           <pc:spChg chg="mod">
-            <ac:chgData name="Ashutosh Nandeshwar" userId="a9ab2e22-fa7a-4aa5-ad68-eb0c0d41c1c1" providerId="ADAL" clId="{9F04EF91-AD59-DB42-8C91-DA74278E5BA3}" dt="2023-09-12T01:11:22.149" v="19" actId="1076"/>
+            <ac:chgData name="Devin Heanue" userId="7590fe87-f85b-4db3-af49-40606f5bf96f" providerId="ADAL" clId="{0AE716D6-5FAA-4FA4-BA3F-12263BBDF976}" dt="2026-03-26T14:54:20.792" v="63" actId="1035"/>
             <ac:spMkLst>
               <pc:docMk/>
-              <pc:sldMasterMk cId="983183760" sldId="2147483648"/>
-              <pc:sldLayoutMk cId="1127028118" sldId="2147483661"/>
-              <ac:spMk id="5" creationId="{57949E57-FFBE-8336-E4A5-52A4E35DE163}"/>
+              <pc:sldMasterMk cId="2908370257" sldId="2147483669"/>
+              <pc:sldLayoutMk cId="2751855050" sldId="2147483682"/>
+              <ac:spMk id="7" creationId="{5D25FE66-B53A-8B48-70E2-83DC098AC097}"/>
             </ac:spMkLst>
           </pc:spChg>
           <pc:spChg chg="mod">
-            <ac:chgData name="Ashutosh Nandeshwar" userId="a9ab2e22-fa7a-4aa5-ad68-eb0c0d41c1c1" providerId="ADAL" clId="{9F04EF91-AD59-DB42-8C91-DA74278E5BA3}" dt="2023-09-11T19:55:19.815" v="1" actId="1076"/>
+            <ac:chgData name="Devin Heanue" userId="7590fe87-f85b-4db3-af49-40606f5bf96f" providerId="ADAL" clId="{0AE716D6-5FAA-4FA4-BA3F-12263BBDF976}" dt="2026-03-19T15:58:18.529" v="30" actId="2711"/>
             <ac:spMkLst>
               <pc:docMk/>
-              <pc:sldMasterMk cId="983183760" sldId="2147483648"/>
-              <pc:sldLayoutMk cId="1127028118" sldId="2147483661"/>
-              <ac:spMk id="12" creationId="{D692FE7A-E637-D8C3-9655-5D2DC4874DA1}"/>
+              <pc:sldMasterMk cId="2908370257" sldId="2147483669"/>
+              <pc:sldLayoutMk cId="2751855050" sldId="2147483682"/>
+              <ac:spMk id="11" creationId="{1D170998-718F-3990-FBF1-2156D86F9EBA}"/>
+            </ac:spMkLst>
+          </pc:spChg>
+          <pc:spChg chg="mod">
+            <ac:chgData name="Devin Heanue" userId="7590fe87-f85b-4db3-af49-40606f5bf96f" providerId="ADAL" clId="{0AE716D6-5FAA-4FA4-BA3F-12263BBDF976}" dt="2026-03-23T14:00:38.745" v="36" actId="947"/>
+            <ac:spMkLst>
+              <pc:docMk/>
+              <pc:sldMasterMk cId="2908370257" sldId="2147483669"/>
+              <pc:sldLayoutMk cId="2751855050" sldId="2147483682"/>
+              <ac:spMk id="14" creationId="{50619ED4-83A9-4A87-B261-251D662DE27A}"/>
             </ac:spMkLst>
           </pc:spChg>
         </pc:sldLayoutChg>
@@ -1092,6 +294,948 @@
 
 <file path=ppt/slideLayouts/slideLayout1.xml><?xml version="1.0" encoding="utf-8"?>
 <p:sldLayout xmlns:a="http://schemas.openxmlformats.org/drawingml/2006/main" xmlns:r="http://schemas.openxmlformats.org/officeDocument/2006/relationships" xmlns:p="http://schemas.openxmlformats.org/presentationml/2006/main" preserve="1" userDrawn="1">
+  <p:cSld name="Title 3">
+    <p:bg>
+      <p:bgPr>
+        <a:solidFill>
+          <a:schemeClr val="tx1"/>
+        </a:solidFill>
+        <a:effectLst/>
+      </p:bgPr>
+    </p:bg>
+    <p:spTree>
+      <p:nvGrpSpPr>
+        <p:cNvPr id="1" name=""/>
+        <p:cNvGrpSpPr/>
+        <p:nvPr/>
+      </p:nvGrpSpPr>
+      <p:grpSpPr>
+        <a:xfrm>
+          <a:off x="0" y="0"/>
+          <a:ext cx="0" cy="0"/>
+          <a:chOff x="0" y="0"/>
+          <a:chExt cx="0" cy="0"/>
+        </a:xfrm>
+      </p:grpSpPr>
+      <p:sp>
+        <p:nvSpPr>
+          <p:cNvPr id="29" name="Picture Placeholder 28">
+            <a:extLst>
+              <a:ext uri="{FF2B5EF4-FFF2-40B4-BE49-F238E27FC236}">
+                <a16:creationId xmlns:a16="http://schemas.microsoft.com/office/drawing/2014/main" id="{E2613DF8-3B01-5433-BB6D-F11366722BA7}"/>
+              </a:ext>
+            </a:extLst>
+          </p:cNvPr>
+          <p:cNvSpPr>
+            <a:spLocks noGrp="1"/>
+          </p:cNvSpPr>
+          <p:nvPr>
+            <p:ph type="pic" sz="quarter" idx="12"/>
+          </p:nvPr>
+        </p:nvSpPr>
+        <p:spPr>
+          <a:xfrm>
+            <a:off x="-30162" y="0"/>
+            <a:ext cx="7928911" cy="6858000"/>
+          </a:xfrm>
+          <a:custGeom>
+            <a:avLst/>
+            <a:gdLst>
+              <a:gd name="connsiteX0" fmla="*/ 0 w 7928911"/>
+              <a:gd name="connsiteY0" fmla="*/ 0 h 6858000"/>
+              <a:gd name="connsiteX1" fmla="*/ 7928911 w 7928911"/>
+              <a:gd name="connsiteY1" fmla="*/ 0 h 6858000"/>
+              <a:gd name="connsiteX2" fmla="*/ 1070911 w 7928911"/>
+              <a:gd name="connsiteY2" fmla="*/ 6858000 h 6858000"/>
+              <a:gd name="connsiteX3" fmla="*/ 0 w 7928911"/>
+              <a:gd name="connsiteY3" fmla="*/ 6858000 h 6858000"/>
+            </a:gdLst>
+            <a:ahLst/>
+            <a:cxnLst>
+              <a:cxn ang="0">
+                <a:pos x="connsiteX0" y="connsiteY0"/>
+              </a:cxn>
+              <a:cxn ang="0">
+                <a:pos x="connsiteX1" y="connsiteY1"/>
+              </a:cxn>
+              <a:cxn ang="0">
+                <a:pos x="connsiteX2" y="connsiteY2"/>
+              </a:cxn>
+              <a:cxn ang="0">
+                <a:pos x="connsiteX3" y="connsiteY3"/>
+              </a:cxn>
+            </a:cxnLst>
+            <a:rect l="l" t="t" r="r" b="b"/>
+            <a:pathLst>
+              <a:path w="7928911" h="6858000">
+                <a:moveTo>
+                  <a:pt x="0" y="0"/>
+                </a:moveTo>
+                <a:lnTo>
+                  <a:pt x="7928911" y="0"/>
+                </a:lnTo>
+                <a:lnTo>
+                  <a:pt x="1070911" y="6858000"/>
+                </a:lnTo>
+                <a:lnTo>
+                  <a:pt x="0" y="6858000"/>
+                </a:lnTo>
+                <a:close/>
+              </a:path>
+            </a:pathLst>
+          </a:custGeom>
+        </p:spPr>
+        <p:txBody>
+          <a:bodyPr wrap="square">
+            <a:noAutofit/>
+          </a:bodyPr>
+          <a:lstStyle/>
+          <a:p>
+            <a:endParaRPr lang="en-US" dirty="0"/>
+          </a:p>
+        </p:txBody>
+      </p:sp>
+      <p:sp>
+        <p:nvSpPr>
+          <p:cNvPr id="26" name="Presentation_TItle">
+            <a:extLst>
+              <a:ext uri="{FF2B5EF4-FFF2-40B4-BE49-F238E27FC236}">
+                <a16:creationId xmlns:a16="http://schemas.microsoft.com/office/drawing/2014/main" id="{ADD87412-82D6-A515-DF8B-025EDE80E7BF}"/>
+              </a:ext>
+            </a:extLst>
+          </p:cNvPr>
+          <p:cNvSpPr>
+            <a:spLocks noGrp="1"/>
+          </p:cNvSpPr>
+          <p:nvPr>
+            <p:ph type="title" hasCustomPrompt="1"/>
+          </p:nvPr>
+        </p:nvSpPr>
+        <p:spPr>
+          <a:xfrm>
+            <a:off x="6149365" y="3505200"/>
+            <a:ext cx="5562600" cy="1143001"/>
+          </a:xfrm>
+          <a:prstGeom prst="rect">
+            <a:avLst/>
+          </a:prstGeom>
+        </p:spPr>
+        <p:txBody>
+          <a:bodyPr vert="horz" lIns="91440" tIns="45720" rIns="91440" bIns="45720" rtlCol="0" anchor="ctr">
+            <a:noAutofit/>
+          </a:bodyPr>
+          <a:lstStyle>
+            <a:lvl1pPr>
+              <a:defRPr sz="4400"/>
+            </a:lvl1pPr>
+          </a:lstStyle>
+          <a:p>
+            <a:r>
+              <a:rPr lang="en-US" dirty="0"/>
+              <a:t>Multi-Line</a:t>
+            </a:r>
+            <a:br>
+              <a:rPr lang="en-US" dirty="0"/>
+            </a:br>
+            <a:r>
+              <a:rPr lang="en-US" dirty="0"/>
+              <a:t>Title of Presentation</a:t>
+            </a:r>
+          </a:p>
+        </p:txBody>
+      </p:sp>
+      <p:pic>
+        <p:nvPicPr>
+          <p:cNvPr id="2" name="Picture 1">
+            <a:extLst>
+              <a:ext uri="{FF2B5EF4-FFF2-40B4-BE49-F238E27FC236}">
+                <a16:creationId xmlns:a16="http://schemas.microsoft.com/office/drawing/2014/main" id="{B5422D96-EB6F-9EE4-2D78-3043BC60F2C3}"/>
+              </a:ext>
+            </a:extLst>
+          </p:cNvPr>
+          <p:cNvPicPr>
+            <a:picLocks noChangeAspect="1"/>
+          </p:cNvPicPr>
+          <p:nvPr userDrawn="1"/>
+        </p:nvPicPr>
+        <p:blipFill>
+          <a:blip r:embed="rId2">
+            <a:extLst>
+              <a:ext uri="{28A0092B-C50C-407E-A947-70E740481C1C}">
+                <a14:useLocalDpi xmlns:a14="http://schemas.microsoft.com/office/drawing/2010/main"/>
+              </a:ext>
+            </a:extLst>
+          </a:blip>
+          <a:stretch>
+            <a:fillRect/>
+          </a:stretch>
+        </p:blipFill>
+        <p:spPr>
+          <a:xfrm>
+            <a:off x="10703753" y="536878"/>
+            <a:ext cx="1018401" cy="590745"/>
+          </a:xfrm>
+          <a:prstGeom prst="rect">
+            <a:avLst/>
+          </a:prstGeom>
+        </p:spPr>
+      </p:pic>
+      <p:sp>
+        <p:nvSpPr>
+          <p:cNvPr id="5" name="orgname">
+            <a:extLst>
+              <a:ext uri="{FF2B5EF4-FFF2-40B4-BE49-F238E27FC236}">
+                <a16:creationId xmlns:a16="http://schemas.microsoft.com/office/drawing/2014/main" id="{33A7C9B6-DBD7-2B61-DD27-B359459C6DBE}"/>
+              </a:ext>
+            </a:extLst>
+          </p:cNvPr>
+          <p:cNvSpPr>
+            <a:spLocks noGrp="1"/>
+          </p:cNvSpPr>
+          <p:nvPr>
+            <p:ph type="body" sz="quarter" idx="13"/>
+          </p:nvPr>
+        </p:nvSpPr>
+        <p:spPr>
+          <a:xfrm>
+            <a:off x="6149365" y="4924425"/>
+            <a:ext cx="5561012" cy="320040"/>
+          </a:xfrm>
+        </p:spPr>
+        <p:txBody>
+          <a:bodyPr tIns="0" bIns="0" anchor="ctr" anchorCtr="0"/>
+          <a:lstStyle/>
+          <a:p>
+            <a:pPr lvl="0"/>
+            <a:endParaRPr lang="en-US" dirty="0"/>
+          </a:p>
+        </p:txBody>
+      </p:sp>
+      <p:sp>
+        <p:nvSpPr>
+          <p:cNvPr id="7" name="month_year">
+            <a:extLst>
+              <a:ext uri="{FF2B5EF4-FFF2-40B4-BE49-F238E27FC236}">
+                <a16:creationId xmlns:a16="http://schemas.microsoft.com/office/drawing/2014/main" id="{6F5952BE-55A5-1C39-5E5E-035243667E75}"/>
+              </a:ext>
+            </a:extLst>
+          </p:cNvPr>
+          <p:cNvSpPr>
+            <a:spLocks noGrp="1"/>
+          </p:cNvSpPr>
+          <p:nvPr>
+            <p:ph type="body" sz="quarter" idx="14"/>
+          </p:nvPr>
+        </p:nvSpPr>
+        <p:spPr>
+          <a:xfrm>
+            <a:off x="6149365" y="5275070"/>
+            <a:ext cx="5561012" cy="320040"/>
+          </a:xfrm>
+        </p:spPr>
+        <p:txBody>
+          <a:bodyPr tIns="0" bIns="0" anchor="ctr" anchorCtr="0"/>
+          <a:lstStyle/>
+          <a:p>
+            <a:pPr lvl="0"/>
+            <a:endParaRPr lang="en-US" dirty="0"/>
+          </a:p>
+        </p:txBody>
+      </p:sp>
+    </p:spTree>
+    <p:extLst>
+      <p:ext uri="{BB962C8B-B14F-4D97-AF65-F5344CB8AC3E}">
+        <p14:creationId xmlns:p14="http://schemas.microsoft.com/office/powerpoint/2010/main" val="2057324489"/>
+      </p:ext>
+    </p:extLst>
+  </p:cSld>
+  <p:clrMapOvr>
+    <a:masterClrMapping/>
+  </p:clrMapOvr>
+</p:sldLayout>
+</file>
+
+<file path=ppt/slideLayouts/slideLayout10.xml><?xml version="1.0" encoding="utf-8"?>
+<p:sldLayout xmlns:a="http://schemas.openxmlformats.org/drawingml/2006/main" xmlns:r="http://schemas.openxmlformats.org/officeDocument/2006/relationships" xmlns:p="http://schemas.openxmlformats.org/presentationml/2006/main" type="vertTx" preserve="1">
+  <p:cSld name="Title and Vertical Text">
+    <p:spTree>
+      <p:nvGrpSpPr>
+        <p:cNvPr id="1" name=""/>
+        <p:cNvGrpSpPr/>
+        <p:nvPr/>
+      </p:nvGrpSpPr>
+      <p:grpSpPr>
+        <a:xfrm>
+          <a:off x="0" y="0"/>
+          <a:ext cx="0" cy="0"/>
+          <a:chOff x="0" y="0"/>
+          <a:chExt cx="0" cy="0"/>
+        </a:xfrm>
+      </p:grpSpPr>
+      <p:sp>
+        <p:nvSpPr>
+          <p:cNvPr id="2" name="Title 1">
+            <a:extLst>
+              <a:ext uri="{FF2B5EF4-FFF2-40B4-BE49-F238E27FC236}">
+                <a16:creationId xmlns:a16="http://schemas.microsoft.com/office/drawing/2014/main" id="{31B9418A-DE57-FE10-A1C0-A6DC1DD1A382}"/>
+              </a:ext>
+            </a:extLst>
+          </p:cNvPr>
+          <p:cNvSpPr>
+            <a:spLocks noGrp="1"/>
+          </p:cNvSpPr>
+          <p:nvPr>
+            <p:ph type="title"/>
+          </p:nvPr>
+        </p:nvSpPr>
+        <p:spPr/>
+        <p:txBody>
+          <a:bodyPr/>
+          <a:lstStyle/>
+          <a:p>
+            <a:r>
+              <a:rPr lang="en-US"/>
+              <a:t>Click to edit Master title style</a:t>
+            </a:r>
+          </a:p>
+        </p:txBody>
+      </p:sp>
+      <p:sp>
+        <p:nvSpPr>
+          <p:cNvPr id="3" name="Vertical Text Placeholder 2">
+            <a:extLst>
+              <a:ext uri="{FF2B5EF4-FFF2-40B4-BE49-F238E27FC236}">
+                <a16:creationId xmlns:a16="http://schemas.microsoft.com/office/drawing/2014/main" id="{723B7BB6-620A-C21F-9352-8D9B6174A1AD}"/>
+              </a:ext>
+            </a:extLst>
+          </p:cNvPr>
+          <p:cNvSpPr>
+            <a:spLocks noGrp="1"/>
+          </p:cNvSpPr>
+          <p:nvPr>
+            <p:ph type="body" orient="vert" idx="1"/>
+          </p:nvPr>
+        </p:nvSpPr>
+        <p:spPr/>
+        <p:txBody>
+          <a:bodyPr vert="eaVert"/>
+          <a:lstStyle/>
+          <a:p>
+            <a:pPr lvl="0"/>
+            <a:r>
+              <a:rPr lang="en-US"/>
+              <a:t>Click to edit Master text styles</a:t>
+            </a:r>
+          </a:p>
+          <a:p>
+            <a:pPr lvl="1"/>
+            <a:r>
+              <a:rPr lang="en-US"/>
+              <a:t>Second level</a:t>
+            </a:r>
+          </a:p>
+          <a:p>
+            <a:pPr lvl="2"/>
+            <a:r>
+              <a:rPr lang="en-US"/>
+              <a:t>Third level</a:t>
+            </a:r>
+          </a:p>
+          <a:p>
+            <a:pPr lvl="3"/>
+            <a:r>
+              <a:rPr lang="en-US"/>
+              <a:t>Fourth level</a:t>
+            </a:r>
+          </a:p>
+          <a:p>
+            <a:pPr lvl="4"/>
+            <a:r>
+              <a:rPr lang="en-US"/>
+              <a:t>Fifth level</a:t>
+            </a:r>
+          </a:p>
+        </p:txBody>
+      </p:sp>
+      <p:sp>
+        <p:nvSpPr>
+          <p:cNvPr id="4" name="Date Placeholder 3">
+            <a:extLst>
+              <a:ext uri="{FF2B5EF4-FFF2-40B4-BE49-F238E27FC236}">
+                <a16:creationId xmlns:a16="http://schemas.microsoft.com/office/drawing/2014/main" id="{E0F1EFFB-FC7A-A41F-17B2-45F1B4BCA971}"/>
+              </a:ext>
+            </a:extLst>
+          </p:cNvPr>
+          <p:cNvSpPr>
+            <a:spLocks noGrp="1"/>
+          </p:cNvSpPr>
+          <p:nvPr>
+            <p:ph type="dt" sz="half" idx="10"/>
+          </p:nvPr>
+        </p:nvSpPr>
+        <p:spPr/>
+        <p:txBody>
+          <a:bodyPr/>
+          <a:lstStyle/>
+          <a:p>
+            <a:fld id="{35B24283-4C9C-384C-9A69-259DDC60D95C}" type="datetimeFigureOut">
+              <a:rPr lang="en-US" smtClean="0"/>
+              <a:t>3/26/2026</a:t>
+            </a:fld>
+            <a:endParaRPr lang="en-US"/>
+          </a:p>
+        </p:txBody>
+      </p:sp>
+      <p:sp>
+        <p:nvSpPr>
+          <p:cNvPr id="5" name="Footer Placeholder 4">
+            <a:extLst>
+              <a:ext uri="{FF2B5EF4-FFF2-40B4-BE49-F238E27FC236}">
+                <a16:creationId xmlns:a16="http://schemas.microsoft.com/office/drawing/2014/main" id="{9D3524EC-4DC5-4B39-9780-E77E044D402D}"/>
+              </a:ext>
+            </a:extLst>
+          </p:cNvPr>
+          <p:cNvSpPr>
+            <a:spLocks noGrp="1"/>
+          </p:cNvSpPr>
+          <p:nvPr>
+            <p:ph type="ftr" sz="quarter" idx="11"/>
+          </p:nvPr>
+        </p:nvSpPr>
+        <p:spPr/>
+        <p:txBody>
+          <a:bodyPr/>
+          <a:lstStyle/>
+          <a:p>
+            <a:endParaRPr lang="en-US"/>
+          </a:p>
+        </p:txBody>
+      </p:sp>
+      <p:sp>
+        <p:nvSpPr>
+          <p:cNvPr id="6" name="Slide Number Placeholder 5">
+            <a:extLst>
+              <a:ext uri="{FF2B5EF4-FFF2-40B4-BE49-F238E27FC236}">
+                <a16:creationId xmlns:a16="http://schemas.microsoft.com/office/drawing/2014/main" id="{910FD795-18A7-21E1-FAEC-9EB7C42D9F19}"/>
+              </a:ext>
+            </a:extLst>
+          </p:cNvPr>
+          <p:cNvSpPr>
+            <a:spLocks noGrp="1"/>
+          </p:cNvSpPr>
+          <p:nvPr>
+            <p:ph type="sldNum" sz="quarter" idx="12"/>
+          </p:nvPr>
+        </p:nvSpPr>
+        <p:spPr/>
+        <p:txBody>
+          <a:bodyPr/>
+          <a:lstStyle/>
+          <a:p>
+            <a:fld id="{37587DFE-4FDB-D24C-BF31-EE770609F131}" type="slidenum">
+              <a:rPr lang="en-US" smtClean="0"/>
+              <a:t>‹#›</a:t>
+            </a:fld>
+            <a:endParaRPr lang="en-US"/>
+          </a:p>
+        </p:txBody>
+      </p:sp>
+    </p:spTree>
+    <p:extLst>
+      <p:ext uri="{BB962C8B-B14F-4D97-AF65-F5344CB8AC3E}">
+        <p14:creationId xmlns:p14="http://schemas.microsoft.com/office/powerpoint/2010/main" val="266306793"/>
+      </p:ext>
+    </p:extLst>
+  </p:cSld>
+  <p:clrMapOvr>
+    <a:masterClrMapping/>
+  </p:clrMapOvr>
+</p:sldLayout>
+</file>
+
+<file path=ppt/slideLayouts/slideLayout11.xml><?xml version="1.0" encoding="utf-8"?>
+<p:sldLayout xmlns:a="http://schemas.openxmlformats.org/drawingml/2006/main" xmlns:r="http://schemas.openxmlformats.org/officeDocument/2006/relationships" xmlns:p="http://schemas.openxmlformats.org/presentationml/2006/main" type="vertTitleAndTx" preserve="1">
+  <p:cSld name="Vertical Title and Text">
+    <p:spTree>
+      <p:nvGrpSpPr>
+        <p:cNvPr id="1" name=""/>
+        <p:cNvGrpSpPr/>
+        <p:nvPr/>
+      </p:nvGrpSpPr>
+      <p:grpSpPr>
+        <a:xfrm>
+          <a:off x="0" y="0"/>
+          <a:ext cx="0" cy="0"/>
+          <a:chOff x="0" y="0"/>
+          <a:chExt cx="0" cy="0"/>
+        </a:xfrm>
+      </p:grpSpPr>
+      <p:sp>
+        <p:nvSpPr>
+          <p:cNvPr id="2" name="Vertical Title 1">
+            <a:extLst>
+              <a:ext uri="{FF2B5EF4-FFF2-40B4-BE49-F238E27FC236}">
+                <a16:creationId xmlns:a16="http://schemas.microsoft.com/office/drawing/2014/main" id="{AED0C766-9EFF-1E7F-1FE9-6FC778F29AA2}"/>
+              </a:ext>
+            </a:extLst>
+          </p:cNvPr>
+          <p:cNvSpPr>
+            <a:spLocks noGrp="1"/>
+          </p:cNvSpPr>
+          <p:nvPr>
+            <p:ph type="title" orient="vert"/>
+          </p:nvPr>
+        </p:nvSpPr>
+        <p:spPr>
+          <a:xfrm>
+            <a:off x="8724900" y="365125"/>
+            <a:ext cx="2628900" cy="5811838"/>
+          </a:xfrm>
+        </p:spPr>
+        <p:txBody>
+          <a:bodyPr vert="eaVert"/>
+          <a:lstStyle/>
+          <a:p>
+            <a:r>
+              <a:rPr lang="en-US"/>
+              <a:t>Click to edit Master title style</a:t>
+            </a:r>
+          </a:p>
+        </p:txBody>
+      </p:sp>
+      <p:sp>
+        <p:nvSpPr>
+          <p:cNvPr id="3" name="Vertical Text Placeholder 2">
+            <a:extLst>
+              <a:ext uri="{FF2B5EF4-FFF2-40B4-BE49-F238E27FC236}">
+                <a16:creationId xmlns:a16="http://schemas.microsoft.com/office/drawing/2014/main" id="{43453528-D16B-0C7F-B794-31654DC1AA7E}"/>
+              </a:ext>
+            </a:extLst>
+          </p:cNvPr>
+          <p:cNvSpPr>
+            <a:spLocks noGrp="1"/>
+          </p:cNvSpPr>
+          <p:nvPr>
+            <p:ph type="body" orient="vert" idx="1"/>
+          </p:nvPr>
+        </p:nvSpPr>
+        <p:spPr>
+          <a:xfrm>
+            <a:off x="838200" y="365125"/>
+            <a:ext cx="7734300" cy="5811838"/>
+          </a:xfrm>
+        </p:spPr>
+        <p:txBody>
+          <a:bodyPr vert="eaVert"/>
+          <a:lstStyle/>
+          <a:p>
+            <a:pPr lvl="0"/>
+            <a:r>
+              <a:rPr lang="en-US"/>
+              <a:t>Click to edit Master text styles</a:t>
+            </a:r>
+          </a:p>
+          <a:p>
+            <a:pPr lvl="1"/>
+            <a:r>
+              <a:rPr lang="en-US"/>
+              <a:t>Second level</a:t>
+            </a:r>
+          </a:p>
+          <a:p>
+            <a:pPr lvl="2"/>
+            <a:r>
+              <a:rPr lang="en-US"/>
+              <a:t>Third level</a:t>
+            </a:r>
+          </a:p>
+          <a:p>
+            <a:pPr lvl="3"/>
+            <a:r>
+              <a:rPr lang="en-US"/>
+              <a:t>Fourth level</a:t>
+            </a:r>
+          </a:p>
+          <a:p>
+            <a:pPr lvl="4"/>
+            <a:r>
+              <a:rPr lang="en-US"/>
+              <a:t>Fifth level</a:t>
+            </a:r>
+          </a:p>
+        </p:txBody>
+      </p:sp>
+      <p:sp>
+        <p:nvSpPr>
+          <p:cNvPr id="4" name="Date Placeholder 3">
+            <a:extLst>
+              <a:ext uri="{FF2B5EF4-FFF2-40B4-BE49-F238E27FC236}">
+                <a16:creationId xmlns:a16="http://schemas.microsoft.com/office/drawing/2014/main" id="{875E47AB-4F36-1CC1-51E4-C2D4CC120C4F}"/>
+              </a:ext>
+            </a:extLst>
+          </p:cNvPr>
+          <p:cNvSpPr>
+            <a:spLocks noGrp="1"/>
+          </p:cNvSpPr>
+          <p:nvPr>
+            <p:ph type="dt" sz="half" idx="10"/>
+          </p:nvPr>
+        </p:nvSpPr>
+        <p:spPr/>
+        <p:txBody>
+          <a:bodyPr/>
+          <a:lstStyle/>
+          <a:p>
+            <a:fld id="{35B24283-4C9C-384C-9A69-259DDC60D95C}" type="datetimeFigureOut">
+              <a:rPr lang="en-US" smtClean="0"/>
+              <a:t>3/26/2026</a:t>
+            </a:fld>
+            <a:endParaRPr lang="en-US"/>
+          </a:p>
+        </p:txBody>
+      </p:sp>
+      <p:sp>
+        <p:nvSpPr>
+          <p:cNvPr id="5" name="Footer Placeholder 4">
+            <a:extLst>
+              <a:ext uri="{FF2B5EF4-FFF2-40B4-BE49-F238E27FC236}">
+                <a16:creationId xmlns:a16="http://schemas.microsoft.com/office/drawing/2014/main" id="{0540C66A-7D88-6F77-22A1-CE0FA0DDBB30}"/>
+              </a:ext>
+            </a:extLst>
+          </p:cNvPr>
+          <p:cNvSpPr>
+            <a:spLocks noGrp="1"/>
+          </p:cNvSpPr>
+          <p:nvPr>
+            <p:ph type="ftr" sz="quarter" idx="11"/>
+          </p:nvPr>
+        </p:nvSpPr>
+        <p:spPr/>
+        <p:txBody>
+          <a:bodyPr/>
+          <a:lstStyle/>
+          <a:p>
+            <a:endParaRPr lang="en-US"/>
+          </a:p>
+        </p:txBody>
+      </p:sp>
+      <p:sp>
+        <p:nvSpPr>
+          <p:cNvPr id="6" name="Slide Number Placeholder 5">
+            <a:extLst>
+              <a:ext uri="{FF2B5EF4-FFF2-40B4-BE49-F238E27FC236}">
+                <a16:creationId xmlns:a16="http://schemas.microsoft.com/office/drawing/2014/main" id="{AA6F5492-4146-BBE9-A3F1-EABD7D1B0E02}"/>
+              </a:ext>
+            </a:extLst>
+          </p:cNvPr>
+          <p:cNvSpPr>
+            <a:spLocks noGrp="1"/>
+          </p:cNvSpPr>
+          <p:nvPr>
+            <p:ph type="sldNum" sz="quarter" idx="12"/>
+          </p:nvPr>
+        </p:nvSpPr>
+        <p:spPr/>
+        <p:txBody>
+          <a:bodyPr/>
+          <a:lstStyle/>
+          <a:p>
+            <a:fld id="{37587DFE-4FDB-D24C-BF31-EE770609F131}" type="slidenum">
+              <a:rPr lang="en-US" smtClean="0"/>
+              <a:t>‹#›</a:t>
+            </a:fld>
+            <a:endParaRPr lang="en-US"/>
+          </a:p>
+        </p:txBody>
+      </p:sp>
+    </p:spTree>
+    <p:extLst>
+      <p:ext uri="{BB962C8B-B14F-4D97-AF65-F5344CB8AC3E}">
+        <p14:creationId xmlns:p14="http://schemas.microsoft.com/office/powerpoint/2010/main" val="3547338083"/>
+      </p:ext>
+    </p:extLst>
+  </p:cSld>
+  <p:clrMapOvr>
+    <a:masterClrMapping/>
+  </p:clrMapOvr>
+</p:sldLayout>
+</file>
+
+<file path=ppt/slideLayouts/slideLayout12.xml><?xml version="1.0" encoding="utf-8"?>
+<p:sldLayout xmlns:a="http://schemas.openxmlformats.org/drawingml/2006/main" xmlns:r="http://schemas.openxmlformats.org/officeDocument/2006/relationships" xmlns:p="http://schemas.openxmlformats.org/presentationml/2006/main" userDrawn="1">
+  <p:cSld name="Title 3">
+    <p:bg>
+      <p:bgPr>
+        <a:solidFill>
+          <a:schemeClr val="tx1"/>
+        </a:solidFill>
+        <a:effectLst/>
+      </p:bgPr>
+    </p:bg>
+    <p:spTree>
+      <p:nvGrpSpPr>
+        <p:cNvPr id="1" name=""/>
+        <p:cNvGrpSpPr/>
+        <p:nvPr/>
+      </p:nvGrpSpPr>
+      <p:grpSpPr>
+        <a:xfrm>
+          <a:off x="0" y="0"/>
+          <a:ext cx="0" cy="0"/>
+          <a:chOff x="0" y="0"/>
+          <a:chExt cx="0" cy="0"/>
+        </a:xfrm>
+      </p:grpSpPr>
+      <p:sp>
+        <p:nvSpPr>
+          <p:cNvPr id="29" name="Picture Placeholder 28">
+            <a:extLst>
+              <a:ext uri="{FF2B5EF4-FFF2-40B4-BE49-F238E27FC236}">
+                <a16:creationId xmlns:a16="http://schemas.microsoft.com/office/drawing/2014/main" id="{E2613DF8-3B01-5433-BB6D-F11366722BA7}"/>
+              </a:ext>
+            </a:extLst>
+          </p:cNvPr>
+          <p:cNvSpPr>
+            <a:spLocks noGrp="1"/>
+          </p:cNvSpPr>
+          <p:nvPr>
+            <p:ph type="pic" sz="quarter" idx="12"/>
+          </p:nvPr>
+        </p:nvSpPr>
+        <p:spPr>
+          <a:xfrm>
+            <a:off x="-30162" y="0"/>
+            <a:ext cx="7928911" cy="6858000"/>
+          </a:xfrm>
+          <a:custGeom>
+            <a:avLst/>
+            <a:gdLst>
+              <a:gd name="connsiteX0" fmla="*/ 0 w 7928911"/>
+              <a:gd name="connsiteY0" fmla="*/ 0 h 6858000"/>
+              <a:gd name="connsiteX1" fmla="*/ 7928911 w 7928911"/>
+              <a:gd name="connsiteY1" fmla="*/ 0 h 6858000"/>
+              <a:gd name="connsiteX2" fmla="*/ 1070911 w 7928911"/>
+              <a:gd name="connsiteY2" fmla="*/ 6858000 h 6858000"/>
+              <a:gd name="connsiteX3" fmla="*/ 0 w 7928911"/>
+              <a:gd name="connsiteY3" fmla="*/ 6858000 h 6858000"/>
+            </a:gdLst>
+            <a:ahLst/>
+            <a:cxnLst>
+              <a:cxn ang="0">
+                <a:pos x="connsiteX0" y="connsiteY0"/>
+              </a:cxn>
+              <a:cxn ang="0">
+                <a:pos x="connsiteX1" y="connsiteY1"/>
+              </a:cxn>
+              <a:cxn ang="0">
+                <a:pos x="connsiteX2" y="connsiteY2"/>
+              </a:cxn>
+              <a:cxn ang="0">
+                <a:pos x="connsiteX3" y="connsiteY3"/>
+              </a:cxn>
+            </a:cxnLst>
+            <a:rect l="l" t="t" r="r" b="b"/>
+            <a:pathLst>
+              <a:path w="7928911" h="6858000">
+                <a:moveTo>
+                  <a:pt x="0" y="0"/>
+                </a:moveTo>
+                <a:lnTo>
+                  <a:pt x="7928911" y="0"/>
+                </a:lnTo>
+                <a:lnTo>
+                  <a:pt x="1070911" y="6858000"/>
+                </a:lnTo>
+                <a:lnTo>
+                  <a:pt x="0" y="6858000"/>
+                </a:lnTo>
+                <a:close/>
+              </a:path>
+            </a:pathLst>
+          </a:custGeom>
+        </p:spPr>
+        <p:txBody>
+          <a:bodyPr wrap="square">
+            <a:noAutofit/>
+          </a:bodyPr>
+          <a:lstStyle/>
+          <a:p>
+            <a:endParaRPr lang="en-US" dirty="0"/>
+          </a:p>
+        </p:txBody>
+      </p:sp>
+      <p:sp>
+        <p:nvSpPr>
+          <p:cNvPr id="26" name="Presentation_TItle">
+            <a:extLst>
+              <a:ext uri="{FF2B5EF4-FFF2-40B4-BE49-F238E27FC236}">
+                <a16:creationId xmlns:a16="http://schemas.microsoft.com/office/drawing/2014/main" id="{ADD87412-82D6-A515-DF8B-025EDE80E7BF}"/>
+              </a:ext>
+            </a:extLst>
+          </p:cNvPr>
+          <p:cNvSpPr>
+            <a:spLocks noGrp="1"/>
+          </p:cNvSpPr>
+          <p:nvPr>
+            <p:ph type="title" hasCustomPrompt="1"/>
+          </p:nvPr>
+        </p:nvSpPr>
+        <p:spPr>
+          <a:xfrm>
+            <a:off x="6149365" y="3505200"/>
+            <a:ext cx="5562600" cy="1143001"/>
+          </a:xfrm>
+          <a:prstGeom prst="rect">
+            <a:avLst/>
+          </a:prstGeom>
+        </p:spPr>
+        <p:txBody>
+          <a:bodyPr vert="horz" lIns="91440" tIns="45720" rIns="91440" bIns="45720" rtlCol="0" anchor="ctr">
+            <a:noAutofit/>
+          </a:bodyPr>
+          <a:lstStyle>
+            <a:lvl1pPr>
+              <a:defRPr sz="4400"/>
+            </a:lvl1pPr>
+          </a:lstStyle>
+          <a:p>
+            <a:r>
+              <a:rPr lang="en-US" dirty="0"/>
+              <a:t>Multi-Line</a:t>
+            </a:r>
+            <a:br>
+              <a:rPr lang="en-US" dirty="0"/>
+            </a:br>
+            <a:r>
+              <a:rPr lang="en-US" dirty="0"/>
+              <a:t>Title of Presentation</a:t>
+            </a:r>
+          </a:p>
+        </p:txBody>
+      </p:sp>
+      <p:pic>
+        <p:nvPicPr>
+          <p:cNvPr id="2" name="Picture 1">
+            <a:extLst>
+              <a:ext uri="{FF2B5EF4-FFF2-40B4-BE49-F238E27FC236}">
+                <a16:creationId xmlns:a16="http://schemas.microsoft.com/office/drawing/2014/main" id="{B5422D96-EB6F-9EE4-2D78-3043BC60F2C3}"/>
+              </a:ext>
+            </a:extLst>
+          </p:cNvPr>
+          <p:cNvPicPr>
+            <a:picLocks noChangeAspect="1"/>
+          </p:cNvPicPr>
+          <p:nvPr userDrawn="1"/>
+        </p:nvPicPr>
+        <p:blipFill>
+          <a:blip r:embed="rId2">
+            <a:extLst>
+              <a:ext uri="{28A0092B-C50C-407E-A947-70E740481C1C}">
+                <a14:useLocalDpi xmlns:a14="http://schemas.microsoft.com/office/drawing/2010/main"/>
+              </a:ext>
+            </a:extLst>
+          </a:blip>
+          <a:stretch>
+            <a:fillRect/>
+          </a:stretch>
+        </p:blipFill>
+        <p:spPr>
+          <a:xfrm>
+            <a:off x="10703753" y="536878"/>
+            <a:ext cx="1018401" cy="590745"/>
+          </a:xfrm>
+          <a:prstGeom prst="rect">
+            <a:avLst/>
+          </a:prstGeom>
+        </p:spPr>
+      </p:pic>
+      <p:sp>
+        <p:nvSpPr>
+          <p:cNvPr id="5" name="orgname">
+            <a:extLst>
+              <a:ext uri="{FF2B5EF4-FFF2-40B4-BE49-F238E27FC236}">
+                <a16:creationId xmlns:a16="http://schemas.microsoft.com/office/drawing/2014/main" id="{33A7C9B6-DBD7-2B61-DD27-B359459C6DBE}"/>
+              </a:ext>
+            </a:extLst>
+          </p:cNvPr>
+          <p:cNvSpPr>
+            <a:spLocks noGrp="1"/>
+          </p:cNvSpPr>
+          <p:nvPr>
+            <p:ph type="body" sz="quarter" idx="13"/>
+          </p:nvPr>
+        </p:nvSpPr>
+        <p:spPr>
+          <a:xfrm>
+            <a:off x="6149365" y="4924425"/>
+            <a:ext cx="5561012" cy="320040"/>
+          </a:xfrm>
+        </p:spPr>
+        <p:txBody>
+          <a:bodyPr tIns="0" bIns="0" anchor="ctr" anchorCtr="0"/>
+          <a:lstStyle>
+            <a:lvl1pPr>
+              <a:buNone/>
+              <a:defRPr/>
+            </a:lvl1pPr>
+          </a:lstStyle>
+          <a:p>
+            <a:pPr lvl="0"/>
+            <a:endParaRPr lang="en-US" dirty="0"/>
+          </a:p>
+        </p:txBody>
+      </p:sp>
+      <p:sp>
+        <p:nvSpPr>
+          <p:cNvPr id="7" name="month_year">
+            <a:extLst>
+              <a:ext uri="{FF2B5EF4-FFF2-40B4-BE49-F238E27FC236}">
+                <a16:creationId xmlns:a16="http://schemas.microsoft.com/office/drawing/2014/main" id="{6F5952BE-55A5-1C39-5E5E-035243667E75}"/>
+              </a:ext>
+            </a:extLst>
+          </p:cNvPr>
+          <p:cNvSpPr>
+            <a:spLocks noGrp="1"/>
+          </p:cNvSpPr>
+          <p:nvPr>
+            <p:ph type="body" sz="quarter" idx="14"/>
+          </p:nvPr>
+        </p:nvSpPr>
+        <p:spPr>
+          <a:xfrm>
+            <a:off x="6149365" y="5275070"/>
+            <a:ext cx="5561012" cy="320040"/>
+          </a:xfrm>
+        </p:spPr>
+        <p:txBody>
+          <a:bodyPr tIns="0" bIns="0" anchor="ctr" anchorCtr="0"/>
+          <a:lstStyle>
+            <a:lvl1pPr>
+              <a:buNone/>
+              <a:defRPr/>
+            </a:lvl1pPr>
+          </a:lstStyle>
+          <a:p>
+            <a:pPr lvl="0"/>
+            <a:endParaRPr lang="en-US" dirty="0"/>
+          </a:p>
+        </p:txBody>
+      </p:sp>
+    </p:spTree>
+    <p:extLst>
+      <p:ext uri="{BB962C8B-B14F-4D97-AF65-F5344CB8AC3E}">
+        <p14:creationId xmlns:p14="http://schemas.microsoft.com/office/powerpoint/2010/main" val="652845060"/>
+      </p:ext>
+    </p:extLst>
+  </p:cSld>
+  <p:clrMapOvr>
+    <a:masterClrMapping/>
+  </p:clrMapOvr>
+</p:sldLayout>
+</file>
+
+<file path=ppt/slideLayouts/slideLayout13.xml><?xml version="1.0" encoding="utf-8"?>
+<p:sldLayout xmlns:a="http://schemas.openxmlformats.org/drawingml/2006/main" xmlns:r="http://schemas.openxmlformats.org/officeDocument/2006/relationships" xmlns:p="http://schemas.openxmlformats.org/presentationml/2006/main" userDrawn="1">
   <p:cSld name="plot_table_side_by_side">
     <p:spTree>
       <p:nvGrpSpPr>
@@ -1139,13 +1283,11 @@
           <a:lstStyle>
             <a:lvl1pPr marL="0" indent="0">
               <a:buNone/>
-              <a:defRPr sz="2000" b="0" i="0" spc="200" baseline="0">
+              <a:defRPr sz="1400" b="0" i="0" spc="0" baseline="0">
                 <a:solidFill>
-                  <a:schemeClr val="bg1">
-                    <a:lumMod val="50000"/>
-                  </a:schemeClr>
+                  <a:schemeClr val="tx1"/>
                 </a:solidFill>
-                <a:latin typeface="Karla" panose="020B0004030503030003" pitchFamily="34" charset="77"/>
+                <a:latin typeface="+mn-lt"/>
               </a:defRPr>
             </a:lvl1pPr>
             <a:lvl2pPr marL="457200" indent="0">
@@ -1234,7 +1376,7 @@
                 <a:solidFill>
                   <a:srgbClr val="254A5D"/>
                 </a:solidFill>
-                <a:latin typeface="Karla Medium" panose="020B0004030503030003" pitchFamily="34" charset="77"/>
+                <a:latin typeface="+mj-lt"/>
               </a:defRPr>
             </a:lvl1pPr>
             <a:lvl2pPr marL="457200" indent="0">
@@ -1534,7 +1676,7 @@
         </p:nvSpPr>
         <p:spPr>
           <a:xfrm>
-            <a:off x="457199" y="2113995"/>
+            <a:off x="457199" y="1806062"/>
             <a:ext cx="7562335" cy="4410629"/>
           </a:xfrm>
           <a:solidFill>
@@ -1611,7 +1753,7 @@
         </p:nvSpPr>
         <p:spPr>
           <a:xfrm>
-            <a:off x="457199" y="1779102"/>
+            <a:off x="457199" y="1425426"/>
             <a:ext cx="7562335" cy="330200"/>
           </a:xfrm>
         </p:spPr>
@@ -1717,7 +1859,7 @@
     </p:spTree>
     <p:extLst>
       <p:ext uri="{BB962C8B-B14F-4D97-AF65-F5344CB8AC3E}">
-        <p14:creationId xmlns:p14="http://schemas.microsoft.com/office/powerpoint/2010/main" val="1127028118"/>
+        <p14:creationId xmlns:p14="http://schemas.microsoft.com/office/powerpoint/2010/main" val="2751855050"/>
       </p:ext>
     </p:extLst>
   </p:cSld>
@@ -1743,9 +1885,9 @@
 </p:sldLayout>
 </file>
 
-<file path=ppt/slideLayouts/slideLayout10.xml><?xml version="1.0" encoding="utf-8"?>
-<p:sldLayout xmlns:a="http://schemas.openxmlformats.org/drawingml/2006/main" xmlns:r="http://schemas.openxmlformats.org/officeDocument/2006/relationships" xmlns:p="http://schemas.openxmlformats.org/presentationml/2006/main" type="picTx" preserve="1">
-  <p:cSld name="Picture with Caption">
+<file path=ppt/slideLayouts/slideLayout14.xml><?xml version="1.0" encoding="utf-8"?>
+<p:sldLayout xmlns:a="http://schemas.openxmlformats.org/drawingml/2006/main" xmlns:r="http://schemas.openxmlformats.org/officeDocument/2006/relationships" xmlns:p="http://schemas.openxmlformats.org/presentationml/2006/main" type="obj" preserve="1">
+  <p:cSld name="Title and Content">
     <p:spTree>
       <p:nvGrpSpPr>
         <p:cNvPr id="1" name=""/>
@@ -1765,7 +1907,7 @@
           <p:cNvPr id="2" name="Title 1">
             <a:extLst>
               <a:ext uri="{FF2B5EF4-FFF2-40B4-BE49-F238E27FC236}">
-                <a16:creationId xmlns:a16="http://schemas.microsoft.com/office/drawing/2014/main" id="{0F164A5B-DB2E-BC57-29EC-B11FB2FAC93F}"/>
+                <a16:creationId xmlns:a16="http://schemas.microsoft.com/office/drawing/2014/main" id="{33E7AB35-C707-962D-810F-EDE9B859E07D}"/>
               </a:ext>
             </a:extLst>
           </p:cNvPr>
@@ -1774,923 +1916,91 @@
           </p:cNvSpPr>
           <p:nvPr>
             <p:ph type="title"/>
+          </p:nvPr>
+        </p:nvSpPr>
+        <p:spPr/>
+        <p:txBody>
+          <a:bodyPr/>
+          <a:lstStyle/>
+          <a:p>
+            <a:r>
+              <a:rPr lang="en-US" dirty="0"/>
+              <a:t>Click to edit Master title style</a:t>
+            </a:r>
+          </a:p>
+        </p:txBody>
+      </p:sp>
+      <p:sp>
+        <p:nvSpPr>
+          <p:cNvPr id="3" name="Content Placeholder 2">
+            <a:extLst>
+              <a:ext uri="{FF2B5EF4-FFF2-40B4-BE49-F238E27FC236}">
+                <a16:creationId xmlns:a16="http://schemas.microsoft.com/office/drawing/2014/main" id="{161CCDB9-B20B-B812-9DCA-0122035D8EEE}"/>
+              </a:ext>
+            </a:extLst>
+          </p:cNvPr>
+          <p:cNvSpPr>
+            <a:spLocks noGrp="1"/>
+          </p:cNvSpPr>
+          <p:nvPr>
+            <p:ph idx="1"/>
           </p:nvPr>
         </p:nvSpPr>
         <p:spPr>
           <a:xfrm>
-            <a:off x="839788" y="457200"/>
-            <a:ext cx="3932237" cy="1600200"/>
+            <a:off x="838200" y="1825625"/>
+            <a:ext cx="10515600" cy="4667250"/>
           </a:xfrm>
         </p:spPr>
         <p:txBody>
-          <a:bodyPr anchor="b"/>
+          <a:bodyPr/>
           <a:lstStyle>
             <a:lvl1pPr>
-              <a:defRPr sz="3200"/>
+              <a:buNone/>
+              <a:defRPr/>
             </a:lvl1pPr>
           </a:lstStyle>
           <a:p>
-            <a:r>
-              <a:rPr lang="en-US"/>
-              <a:t>Click to edit Master title style</a:t>
-            </a:r>
-          </a:p>
-        </p:txBody>
-      </p:sp>
-      <p:sp>
-        <p:nvSpPr>
-          <p:cNvPr id="3" name="Picture Placeholder 2">
-            <a:extLst>
-              <a:ext uri="{FF2B5EF4-FFF2-40B4-BE49-F238E27FC236}">
-                <a16:creationId xmlns:a16="http://schemas.microsoft.com/office/drawing/2014/main" id="{16CB9DB9-6589-8069-8DFD-BE4A0C6A7664}"/>
-              </a:ext>
-            </a:extLst>
-          </p:cNvPr>
-          <p:cNvSpPr>
-            <a:spLocks noGrp="1"/>
-          </p:cNvSpPr>
-          <p:nvPr>
-            <p:ph type="pic" idx="1"/>
-          </p:nvPr>
-        </p:nvSpPr>
-        <p:spPr>
-          <a:xfrm>
-            <a:off x="5183188" y="987425"/>
-            <a:ext cx="6172200" cy="4873625"/>
-          </a:xfrm>
-        </p:spPr>
-        <p:txBody>
-          <a:bodyPr/>
-          <a:lstStyle>
-            <a:lvl1pPr marL="0" indent="0">
-              <a:buNone/>
-              <a:defRPr sz="3200"/>
-            </a:lvl1pPr>
-            <a:lvl2pPr marL="457200" indent="0">
-              <a:buNone/>
-              <a:defRPr sz="2800"/>
-            </a:lvl2pPr>
-            <a:lvl3pPr marL="914400" indent="0">
-              <a:buNone/>
-              <a:defRPr sz="2400"/>
-            </a:lvl3pPr>
-            <a:lvl4pPr marL="1371600" indent="0">
-              <a:buNone/>
-              <a:defRPr sz="2000"/>
-            </a:lvl4pPr>
-            <a:lvl5pPr marL="1828800" indent="0">
-              <a:buNone/>
-              <a:defRPr sz="2000"/>
-            </a:lvl5pPr>
-            <a:lvl6pPr marL="2286000" indent="0">
-              <a:buNone/>
-              <a:defRPr sz="2000"/>
-            </a:lvl6pPr>
-            <a:lvl7pPr marL="2743200" indent="0">
-              <a:buNone/>
-              <a:defRPr sz="2000"/>
-            </a:lvl7pPr>
-            <a:lvl8pPr marL="3200400" indent="0">
-              <a:buNone/>
-              <a:defRPr sz="2000"/>
-            </a:lvl8pPr>
-            <a:lvl9pPr marL="3657600" indent="0">
-              <a:buNone/>
-              <a:defRPr sz="2000"/>
-            </a:lvl9pPr>
-          </a:lstStyle>
-          <a:p>
-            <a:endParaRPr lang="en-US"/>
-          </a:p>
-        </p:txBody>
-      </p:sp>
-      <p:sp>
-        <p:nvSpPr>
-          <p:cNvPr id="4" name="Text Placeholder 3">
-            <a:extLst>
-              <a:ext uri="{FF2B5EF4-FFF2-40B4-BE49-F238E27FC236}">
-                <a16:creationId xmlns:a16="http://schemas.microsoft.com/office/drawing/2014/main" id="{1481F631-9B87-5045-0084-FE7B5A433EE6}"/>
-              </a:ext>
-            </a:extLst>
-          </p:cNvPr>
-          <p:cNvSpPr>
-            <a:spLocks noGrp="1"/>
-          </p:cNvSpPr>
-          <p:nvPr>
-            <p:ph type="body" sz="half" idx="2"/>
-          </p:nvPr>
-        </p:nvSpPr>
-        <p:spPr>
-          <a:xfrm>
-            <a:off x="839788" y="2057400"/>
-            <a:ext cx="3932237" cy="3811588"/>
-          </a:xfrm>
-        </p:spPr>
-        <p:txBody>
-          <a:bodyPr/>
-          <a:lstStyle>
-            <a:lvl1pPr marL="0" indent="0">
-              <a:buNone/>
-              <a:defRPr sz="1600"/>
-            </a:lvl1pPr>
-            <a:lvl2pPr marL="457200" indent="0">
-              <a:buNone/>
-              <a:defRPr sz="1400"/>
-            </a:lvl2pPr>
-            <a:lvl3pPr marL="914400" indent="0">
-              <a:buNone/>
-              <a:defRPr sz="1200"/>
-            </a:lvl3pPr>
-            <a:lvl4pPr marL="1371600" indent="0">
-              <a:buNone/>
-              <a:defRPr sz="1000"/>
-            </a:lvl4pPr>
-            <a:lvl5pPr marL="1828800" indent="0">
-              <a:buNone/>
-              <a:defRPr sz="1000"/>
-            </a:lvl5pPr>
-            <a:lvl6pPr marL="2286000" indent="0">
-              <a:buNone/>
-              <a:defRPr sz="1000"/>
-            </a:lvl6pPr>
-            <a:lvl7pPr marL="2743200" indent="0">
-              <a:buNone/>
-              <a:defRPr sz="1000"/>
-            </a:lvl7pPr>
-            <a:lvl8pPr marL="3200400" indent="0">
-              <a:buNone/>
-              <a:defRPr sz="1000"/>
-            </a:lvl8pPr>
-            <a:lvl9pPr marL="3657600" indent="0">
-              <a:buNone/>
-              <a:defRPr sz="1000"/>
-            </a:lvl9pPr>
-          </a:lstStyle>
-          <a:p>
             <a:pPr lvl="0"/>
             <a:r>
-              <a:rPr lang="en-US"/>
+              <a:rPr lang="en-US" dirty="0"/>
               <a:t>Click to edit Master text styles</a:t>
             </a:r>
           </a:p>
-        </p:txBody>
-      </p:sp>
-      <p:sp>
-        <p:nvSpPr>
-          <p:cNvPr id="5" name="Date Placeholder 4">
-            <a:extLst>
-              <a:ext uri="{FF2B5EF4-FFF2-40B4-BE49-F238E27FC236}">
-                <a16:creationId xmlns:a16="http://schemas.microsoft.com/office/drawing/2014/main" id="{F7EB7848-ACC2-26E4-1A8C-1EBDE652BE85}"/>
-              </a:ext>
-            </a:extLst>
-          </p:cNvPr>
-          <p:cNvSpPr>
-            <a:spLocks noGrp="1"/>
-          </p:cNvSpPr>
-          <p:nvPr>
-            <p:ph type="dt" sz="half" idx="10"/>
-          </p:nvPr>
-        </p:nvSpPr>
-        <p:spPr/>
-        <p:txBody>
-          <a:bodyPr/>
-          <a:lstStyle/>
-          <a:p>
-            <a:fld id="{3F2082E8-73AE-0443-9211-048CA87033AA}" type="datetimeFigureOut">
-              <a:rPr lang="en-US" smtClean="0"/>
-              <a:t>9/11/23</a:t>
-            </a:fld>
-            <a:endParaRPr lang="en-US"/>
-          </a:p>
-        </p:txBody>
-      </p:sp>
-      <p:sp>
-        <p:nvSpPr>
-          <p:cNvPr id="6" name="Footer Placeholder 5">
-            <a:extLst>
-              <a:ext uri="{FF2B5EF4-FFF2-40B4-BE49-F238E27FC236}">
-                <a16:creationId xmlns:a16="http://schemas.microsoft.com/office/drawing/2014/main" id="{64CAE765-4046-B720-A882-F3BBE2331652}"/>
-              </a:ext>
-            </a:extLst>
-          </p:cNvPr>
-          <p:cNvSpPr>
-            <a:spLocks noGrp="1"/>
-          </p:cNvSpPr>
-          <p:nvPr>
-            <p:ph type="ftr" sz="quarter" idx="11"/>
-          </p:nvPr>
-        </p:nvSpPr>
-        <p:spPr/>
-        <p:txBody>
-          <a:bodyPr/>
-          <a:lstStyle/>
-          <a:p>
-            <a:endParaRPr lang="en-US"/>
-          </a:p>
-        </p:txBody>
-      </p:sp>
-      <p:sp>
-        <p:nvSpPr>
-          <p:cNvPr id="7" name="Slide Number Placeholder 6">
-            <a:extLst>
-              <a:ext uri="{FF2B5EF4-FFF2-40B4-BE49-F238E27FC236}">
-                <a16:creationId xmlns:a16="http://schemas.microsoft.com/office/drawing/2014/main" id="{1E22BDB8-36FC-5DF9-0D86-F7ADA743CB13}"/>
-              </a:ext>
-            </a:extLst>
-          </p:cNvPr>
-          <p:cNvSpPr>
-            <a:spLocks noGrp="1"/>
-          </p:cNvSpPr>
-          <p:nvPr>
-            <p:ph type="sldNum" sz="quarter" idx="12"/>
-          </p:nvPr>
-        </p:nvSpPr>
-        <p:spPr/>
-        <p:txBody>
-          <a:bodyPr/>
-          <a:lstStyle/>
-          <a:p>
-            <a:fld id="{BC43744F-32DB-BD4B-B697-C0670FE089A5}" type="slidenum">
-              <a:rPr lang="en-US" smtClean="0"/>
-              <a:t>‹#›</a:t>
-            </a:fld>
-            <a:endParaRPr lang="en-US"/>
+          <a:p>
+            <a:pPr lvl="1"/>
+            <a:r>
+              <a:rPr lang="en-US" dirty="0"/>
+              <a:t>Second level</a:t>
+            </a:r>
+          </a:p>
+          <a:p>
+            <a:pPr lvl="2"/>
+            <a:r>
+              <a:rPr lang="en-US" dirty="0"/>
+              <a:t>Third level</a:t>
+            </a:r>
+          </a:p>
+          <a:p>
+            <a:pPr lvl="3"/>
+            <a:r>
+              <a:rPr lang="en-US" dirty="0"/>
+              <a:t>Fourth level</a:t>
+            </a:r>
+          </a:p>
+          <a:p>
+            <a:pPr lvl="4"/>
+            <a:r>
+              <a:rPr lang="en-US" dirty="0"/>
+              <a:t>Fifth level</a:t>
+            </a:r>
           </a:p>
         </p:txBody>
       </p:sp>
     </p:spTree>
     <p:extLst>
       <p:ext uri="{BB962C8B-B14F-4D97-AF65-F5344CB8AC3E}">
-        <p14:creationId xmlns:p14="http://schemas.microsoft.com/office/powerpoint/2010/main" val="3425159626"/>
-      </p:ext>
-    </p:extLst>
-  </p:cSld>
-  <p:clrMapOvr>
-    <a:masterClrMapping/>
-  </p:clrMapOvr>
-</p:sldLayout>
-</file>
-
-<file path=ppt/slideLayouts/slideLayout11.xml><?xml version="1.0" encoding="utf-8"?>
-<p:sldLayout xmlns:a="http://schemas.openxmlformats.org/drawingml/2006/main" xmlns:r="http://schemas.openxmlformats.org/officeDocument/2006/relationships" xmlns:p="http://schemas.openxmlformats.org/presentationml/2006/main" type="vertTx" preserve="1">
-  <p:cSld name="Title and Vertical Text">
-    <p:spTree>
-      <p:nvGrpSpPr>
-        <p:cNvPr id="1" name=""/>
-        <p:cNvGrpSpPr/>
-        <p:nvPr/>
-      </p:nvGrpSpPr>
-      <p:grpSpPr>
-        <a:xfrm>
-          <a:off x="0" y="0"/>
-          <a:ext cx="0" cy="0"/>
-          <a:chOff x="0" y="0"/>
-          <a:chExt cx="0" cy="0"/>
-        </a:xfrm>
-      </p:grpSpPr>
-      <p:sp>
-        <p:nvSpPr>
-          <p:cNvPr id="2" name="Title 1">
-            <a:extLst>
-              <a:ext uri="{FF2B5EF4-FFF2-40B4-BE49-F238E27FC236}">
-                <a16:creationId xmlns:a16="http://schemas.microsoft.com/office/drawing/2014/main" id="{93513188-34AC-D656-2045-0118B19BE8A9}"/>
-              </a:ext>
-            </a:extLst>
-          </p:cNvPr>
-          <p:cNvSpPr>
-            <a:spLocks noGrp="1"/>
-          </p:cNvSpPr>
-          <p:nvPr>
-            <p:ph type="title"/>
-          </p:nvPr>
-        </p:nvSpPr>
-        <p:spPr/>
-        <p:txBody>
-          <a:bodyPr/>
-          <a:lstStyle/>
-          <a:p>
-            <a:r>
-              <a:rPr lang="en-US"/>
-              <a:t>Click to edit Master title style</a:t>
-            </a:r>
-          </a:p>
-        </p:txBody>
-      </p:sp>
-      <p:sp>
-        <p:nvSpPr>
-          <p:cNvPr id="3" name="Vertical Text Placeholder 2">
-            <a:extLst>
-              <a:ext uri="{FF2B5EF4-FFF2-40B4-BE49-F238E27FC236}">
-                <a16:creationId xmlns:a16="http://schemas.microsoft.com/office/drawing/2014/main" id="{13C37917-643F-AFB9-B96A-9654A66B01A8}"/>
-              </a:ext>
-            </a:extLst>
-          </p:cNvPr>
-          <p:cNvSpPr>
-            <a:spLocks noGrp="1"/>
-          </p:cNvSpPr>
-          <p:nvPr>
-            <p:ph type="body" orient="vert" idx="1"/>
-          </p:nvPr>
-        </p:nvSpPr>
-        <p:spPr/>
-        <p:txBody>
-          <a:bodyPr vert="eaVert"/>
-          <a:lstStyle/>
-          <a:p>
-            <a:pPr lvl="0"/>
-            <a:r>
-              <a:rPr lang="en-US"/>
-              <a:t>Click to edit Master text styles</a:t>
-            </a:r>
-          </a:p>
-          <a:p>
-            <a:pPr lvl="1"/>
-            <a:r>
-              <a:rPr lang="en-US"/>
-              <a:t>Second level</a:t>
-            </a:r>
-          </a:p>
-          <a:p>
-            <a:pPr lvl="2"/>
-            <a:r>
-              <a:rPr lang="en-US"/>
-              <a:t>Third level</a:t>
-            </a:r>
-          </a:p>
-          <a:p>
-            <a:pPr lvl="3"/>
-            <a:r>
-              <a:rPr lang="en-US"/>
-              <a:t>Fourth level</a:t>
-            </a:r>
-          </a:p>
-          <a:p>
-            <a:pPr lvl="4"/>
-            <a:r>
-              <a:rPr lang="en-US"/>
-              <a:t>Fifth level</a:t>
-            </a:r>
-          </a:p>
-        </p:txBody>
-      </p:sp>
-      <p:sp>
-        <p:nvSpPr>
-          <p:cNvPr id="4" name="Date Placeholder 3">
-            <a:extLst>
-              <a:ext uri="{FF2B5EF4-FFF2-40B4-BE49-F238E27FC236}">
-                <a16:creationId xmlns:a16="http://schemas.microsoft.com/office/drawing/2014/main" id="{7E6581DF-6A51-40F9-25D5-FAAA31898B13}"/>
-              </a:ext>
-            </a:extLst>
-          </p:cNvPr>
-          <p:cNvSpPr>
-            <a:spLocks noGrp="1"/>
-          </p:cNvSpPr>
-          <p:nvPr>
-            <p:ph type="dt" sz="half" idx="10"/>
-          </p:nvPr>
-        </p:nvSpPr>
-        <p:spPr/>
-        <p:txBody>
-          <a:bodyPr/>
-          <a:lstStyle/>
-          <a:p>
-            <a:fld id="{3F2082E8-73AE-0443-9211-048CA87033AA}" type="datetimeFigureOut">
-              <a:rPr lang="en-US" smtClean="0"/>
-              <a:t>9/11/23</a:t>
-            </a:fld>
-            <a:endParaRPr lang="en-US"/>
-          </a:p>
-        </p:txBody>
-      </p:sp>
-      <p:sp>
-        <p:nvSpPr>
-          <p:cNvPr id="5" name="Footer Placeholder 4">
-            <a:extLst>
-              <a:ext uri="{FF2B5EF4-FFF2-40B4-BE49-F238E27FC236}">
-                <a16:creationId xmlns:a16="http://schemas.microsoft.com/office/drawing/2014/main" id="{06409EC1-AA45-3092-1451-BB493C9D941B}"/>
-              </a:ext>
-            </a:extLst>
-          </p:cNvPr>
-          <p:cNvSpPr>
-            <a:spLocks noGrp="1"/>
-          </p:cNvSpPr>
-          <p:nvPr>
-            <p:ph type="ftr" sz="quarter" idx="11"/>
-          </p:nvPr>
-        </p:nvSpPr>
-        <p:spPr/>
-        <p:txBody>
-          <a:bodyPr/>
-          <a:lstStyle/>
-          <a:p>
-            <a:endParaRPr lang="en-US"/>
-          </a:p>
-        </p:txBody>
-      </p:sp>
-      <p:sp>
-        <p:nvSpPr>
-          <p:cNvPr id="6" name="Slide Number Placeholder 5">
-            <a:extLst>
-              <a:ext uri="{FF2B5EF4-FFF2-40B4-BE49-F238E27FC236}">
-                <a16:creationId xmlns:a16="http://schemas.microsoft.com/office/drawing/2014/main" id="{632F6CD4-8FF8-B858-06E9-1EA47D64EC2E}"/>
-              </a:ext>
-            </a:extLst>
-          </p:cNvPr>
-          <p:cNvSpPr>
-            <a:spLocks noGrp="1"/>
-          </p:cNvSpPr>
-          <p:nvPr>
-            <p:ph type="sldNum" sz="quarter" idx="12"/>
-          </p:nvPr>
-        </p:nvSpPr>
-        <p:spPr/>
-        <p:txBody>
-          <a:bodyPr/>
-          <a:lstStyle/>
-          <a:p>
-            <a:fld id="{BC43744F-32DB-BD4B-B697-C0670FE089A5}" type="slidenum">
-              <a:rPr lang="en-US" smtClean="0"/>
-              <a:t>‹#›</a:t>
-            </a:fld>
-            <a:endParaRPr lang="en-US"/>
-          </a:p>
-        </p:txBody>
-      </p:sp>
-    </p:spTree>
-    <p:extLst>
-      <p:ext uri="{BB962C8B-B14F-4D97-AF65-F5344CB8AC3E}">
-        <p14:creationId xmlns:p14="http://schemas.microsoft.com/office/powerpoint/2010/main" val="1429792901"/>
-      </p:ext>
-    </p:extLst>
-  </p:cSld>
-  <p:clrMapOvr>
-    <a:masterClrMapping/>
-  </p:clrMapOvr>
-</p:sldLayout>
-</file>
-
-<file path=ppt/slideLayouts/slideLayout12.xml><?xml version="1.0" encoding="utf-8"?>
-<p:sldLayout xmlns:a="http://schemas.openxmlformats.org/drawingml/2006/main" xmlns:r="http://schemas.openxmlformats.org/officeDocument/2006/relationships" xmlns:p="http://schemas.openxmlformats.org/presentationml/2006/main" type="vertTitleAndTx" preserve="1">
-  <p:cSld name="Vertical Title and Text">
-    <p:spTree>
-      <p:nvGrpSpPr>
-        <p:cNvPr id="1" name=""/>
-        <p:cNvGrpSpPr/>
-        <p:nvPr/>
-      </p:nvGrpSpPr>
-      <p:grpSpPr>
-        <a:xfrm>
-          <a:off x="0" y="0"/>
-          <a:ext cx="0" cy="0"/>
-          <a:chOff x="0" y="0"/>
-          <a:chExt cx="0" cy="0"/>
-        </a:xfrm>
-      </p:grpSpPr>
-      <p:sp>
-        <p:nvSpPr>
-          <p:cNvPr id="2" name="Vertical Title 1">
-            <a:extLst>
-              <a:ext uri="{FF2B5EF4-FFF2-40B4-BE49-F238E27FC236}">
-                <a16:creationId xmlns:a16="http://schemas.microsoft.com/office/drawing/2014/main" id="{913FBF10-AB27-EF32-18AE-457882012735}"/>
-              </a:ext>
-            </a:extLst>
-          </p:cNvPr>
-          <p:cNvSpPr>
-            <a:spLocks noGrp="1"/>
-          </p:cNvSpPr>
-          <p:nvPr>
-            <p:ph type="title" orient="vert"/>
-          </p:nvPr>
-        </p:nvSpPr>
-        <p:spPr>
-          <a:xfrm>
-            <a:off x="8724900" y="365125"/>
-            <a:ext cx="2628900" cy="5811838"/>
-          </a:xfrm>
-        </p:spPr>
-        <p:txBody>
-          <a:bodyPr vert="eaVert"/>
-          <a:lstStyle/>
-          <a:p>
-            <a:r>
-              <a:rPr lang="en-US"/>
-              <a:t>Click to edit Master title style</a:t>
-            </a:r>
-          </a:p>
-        </p:txBody>
-      </p:sp>
-      <p:sp>
-        <p:nvSpPr>
-          <p:cNvPr id="3" name="Vertical Text Placeholder 2">
-            <a:extLst>
-              <a:ext uri="{FF2B5EF4-FFF2-40B4-BE49-F238E27FC236}">
-                <a16:creationId xmlns:a16="http://schemas.microsoft.com/office/drawing/2014/main" id="{2BB6DADE-5F4A-8B10-2F4D-3C7F31530954}"/>
-              </a:ext>
-            </a:extLst>
-          </p:cNvPr>
-          <p:cNvSpPr>
-            <a:spLocks noGrp="1"/>
-          </p:cNvSpPr>
-          <p:nvPr>
-            <p:ph type="body" orient="vert" idx="1"/>
-          </p:nvPr>
-        </p:nvSpPr>
-        <p:spPr>
-          <a:xfrm>
-            <a:off x="838200" y="365125"/>
-            <a:ext cx="7734300" cy="5811838"/>
-          </a:xfrm>
-        </p:spPr>
-        <p:txBody>
-          <a:bodyPr vert="eaVert"/>
-          <a:lstStyle/>
-          <a:p>
-            <a:pPr lvl="0"/>
-            <a:r>
-              <a:rPr lang="en-US"/>
-              <a:t>Click to edit Master text styles</a:t>
-            </a:r>
-          </a:p>
-          <a:p>
-            <a:pPr lvl="1"/>
-            <a:r>
-              <a:rPr lang="en-US"/>
-              <a:t>Second level</a:t>
-            </a:r>
-          </a:p>
-          <a:p>
-            <a:pPr lvl="2"/>
-            <a:r>
-              <a:rPr lang="en-US"/>
-              <a:t>Third level</a:t>
-            </a:r>
-          </a:p>
-          <a:p>
-            <a:pPr lvl="3"/>
-            <a:r>
-              <a:rPr lang="en-US"/>
-              <a:t>Fourth level</a:t>
-            </a:r>
-          </a:p>
-          <a:p>
-            <a:pPr lvl="4"/>
-            <a:r>
-              <a:rPr lang="en-US"/>
-              <a:t>Fifth level</a:t>
-            </a:r>
-          </a:p>
-        </p:txBody>
-      </p:sp>
-      <p:sp>
-        <p:nvSpPr>
-          <p:cNvPr id="4" name="Date Placeholder 3">
-            <a:extLst>
-              <a:ext uri="{FF2B5EF4-FFF2-40B4-BE49-F238E27FC236}">
-                <a16:creationId xmlns:a16="http://schemas.microsoft.com/office/drawing/2014/main" id="{BD1D14CA-3FCF-3AF7-ADDD-90ED72021563}"/>
-              </a:ext>
-            </a:extLst>
-          </p:cNvPr>
-          <p:cNvSpPr>
-            <a:spLocks noGrp="1"/>
-          </p:cNvSpPr>
-          <p:nvPr>
-            <p:ph type="dt" sz="half" idx="10"/>
-          </p:nvPr>
-        </p:nvSpPr>
-        <p:spPr/>
-        <p:txBody>
-          <a:bodyPr/>
-          <a:lstStyle/>
-          <a:p>
-            <a:fld id="{3F2082E8-73AE-0443-9211-048CA87033AA}" type="datetimeFigureOut">
-              <a:rPr lang="en-US" smtClean="0"/>
-              <a:t>9/11/23</a:t>
-            </a:fld>
-            <a:endParaRPr lang="en-US"/>
-          </a:p>
-        </p:txBody>
-      </p:sp>
-      <p:sp>
-        <p:nvSpPr>
-          <p:cNvPr id="5" name="Footer Placeholder 4">
-            <a:extLst>
-              <a:ext uri="{FF2B5EF4-FFF2-40B4-BE49-F238E27FC236}">
-                <a16:creationId xmlns:a16="http://schemas.microsoft.com/office/drawing/2014/main" id="{010937AD-EC18-D8B7-99FB-B24CE651EAF4}"/>
-              </a:ext>
-            </a:extLst>
-          </p:cNvPr>
-          <p:cNvSpPr>
-            <a:spLocks noGrp="1"/>
-          </p:cNvSpPr>
-          <p:nvPr>
-            <p:ph type="ftr" sz="quarter" idx="11"/>
-          </p:nvPr>
-        </p:nvSpPr>
-        <p:spPr/>
-        <p:txBody>
-          <a:bodyPr/>
-          <a:lstStyle/>
-          <a:p>
-            <a:endParaRPr lang="en-US"/>
-          </a:p>
-        </p:txBody>
-      </p:sp>
-      <p:sp>
-        <p:nvSpPr>
-          <p:cNvPr id="6" name="Slide Number Placeholder 5">
-            <a:extLst>
-              <a:ext uri="{FF2B5EF4-FFF2-40B4-BE49-F238E27FC236}">
-                <a16:creationId xmlns:a16="http://schemas.microsoft.com/office/drawing/2014/main" id="{8529F521-09DB-302B-7295-1FE8460E68F0}"/>
-              </a:ext>
-            </a:extLst>
-          </p:cNvPr>
-          <p:cNvSpPr>
-            <a:spLocks noGrp="1"/>
-          </p:cNvSpPr>
-          <p:nvPr>
-            <p:ph type="sldNum" sz="quarter" idx="12"/>
-          </p:nvPr>
-        </p:nvSpPr>
-        <p:spPr/>
-        <p:txBody>
-          <a:bodyPr/>
-          <a:lstStyle/>
-          <a:p>
-            <a:fld id="{BC43744F-32DB-BD4B-B697-C0670FE089A5}" type="slidenum">
-              <a:rPr lang="en-US" smtClean="0"/>
-              <a:t>‹#›</a:t>
-            </a:fld>
-            <a:endParaRPr lang="en-US"/>
-          </a:p>
-        </p:txBody>
-      </p:sp>
-    </p:spTree>
-    <p:extLst>
-      <p:ext uri="{BB962C8B-B14F-4D97-AF65-F5344CB8AC3E}">
-        <p14:creationId xmlns:p14="http://schemas.microsoft.com/office/powerpoint/2010/main" val="101494739"/>
-      </p:ext>
-    </p:extLst>
-  </p:cSld>
-  <p:clrMapOvr>
-    <a:masterClrMapping/>
-  </p:clrMapOvr>
-</p:sldLayout>
-</file>
-
-<file path=ppt/slideLayouts/slideLayout13.xml><?xml version="1.0" encoding="utf-8"?>
-<p:sldLayout xmlns:a="http://schemas.openxmlformats.org/drawingml/2006/main" xmlns:r="http://schemas.openxmlformats.org/officeDocument/2006/relationships" xmlns:p="http://schemas.openxmlformats.org/presentationml/2006/main" preserve="1" userDrawn="1">
-  <p:cSld name="Title 3">
-    <p:bg>
-      <p:bgPr>
-        <a:solidFill>
-          <a:schemeClr val="tx1"/>
-        </a:solidFill>
-        <a:effectLst/>
-      </p:bgPr>
-    </p:bg>
-    <p:spTree>
-      <p:nvGrpSpPr>
-        <p:cNvPr id="1" name=""/>
-        <p:cNvGrpSpPr/>
-        <p:nvPr/>
-      </p:nvGrpSpPr>
-      <p:grpSpPr>
-        <a:xfrm>
-          <a:off x="0" y="0"/>
-          <a:ext cx="0" cy="0"/>
-          <a:chOff x="0" y="0"/>
-          <a:chExt cx="0" cy="0"/>
-        </a:xfrm>
-      </p:grpSpPr>
-      <p:sp>
-        <p:nvSpPr>
-          <p:cNvPr id="29" name="Picture Placeholder 28">
-            <a:extLst>
-              <a:ext uri="{FF2B5EF4-FFF2-40B4-BE49-F238E27FC236}">
-                <a16:creationId xmlns:a16="http://schemas.microsoft.com/office/drawing/2014/main" id="{E2613DF8-3B01-5433-BB6D-F11366722BA7}"/>
-              </a:ext>
-            </a:extLst>
-          </p:cNvPr>
-          <p:cNvSpPr>
-            <a:spLocks noGrp="1"/>
-          </p:cNvSpPr>
-          <p:nvPr>
-            <p:ph type="pic" sz="quarter" idx="12"/>
-          </p:nvPr>
-        </p:nvSpPr>
-        <p:spPr>
-          <a:xfrm>
-            <a:off x="-30162" y="0"/>
-            <a:ext cx="7928911" cy="6858000"/>
-          </a:xfrm>
-          <a:custGeom>
-            <a:avLst/>
-            <a:gdLst>
-              <a:gd name="connsiteX0" fmla="*/ 0 w 7928911"/>
-              <a:gd name="connsiteY0" fmla="*/ 0 h 6858000"/>
-              <a:gd name="connsiteX1" fmla="*/ 7928911 w 7928911"/>
-              <a:gd name="connsiteY1" fmla="*/ 0 h 6858000"/>
-              <a:gd name="connsiteX2" fmla="*/ 1070911 w 7928911"/>
-              <a:gd name="connsiteY2" fmla="*/ 6858000 h 6858000"/>
-              <a:gd name="connsiteX3" fmla="*/ 0 w 7928911"/>
-              <a:gd name="connsiteY3" fmla="*/ 6858000 h 6858000"/>
-            </a:gdLst>
-            <a:ahLst/>
-            <a:cxnLst>
-              <a:cxn ang="0">
-                <a:pos x="connsiteX0" y="connsiteY0"/>
-              </a:cxn>
-              <a:cxn ang="0">
-                <a:pos x="connsiteX1" y="connsiteY1"/>
-              </a:cxn>
-              <a:cxn ang="0">
-                <a:pos x="connsiteX2" y="connsiteY2"/>
-              </a:cxn>
-              <a:cxn ang="0">
-                <a:pos x="connsiteX3" y="connsiteY3"/>
-              </a:cxn>
-            </a:cxnLst>
-            <a:rect l="l" t="t" r="r" b="b"/>
-            <a:pathLst>
-              <a:path w="7928911" h="6858000">
-                <a:moveTo>
-                  <a:pt x="0" y="0"/>
-                </a:moveTo>
-                <a:lnTo>
-                  <a:pt x="7928911" y="0"/>
-                </a:lnTo>
-                <a:lnTo>
-                  <a:pt x="1070911" y="6858000"/>
-                </a:lnTo>
-                <a:lnTo>
-                  <a:pt x="0" y="6858000"/>
-                </a:lnTo>
-                <a:close/>
-              </a:path>
-            </a:pathLst>
-          </a:custGeom>
-        </p:spPr>
-        <p:txBody>
-          <a:bodyPr wrap="square">
-            <a:noAutofit/>
-          </a:bodyPr>
-          <a:lstStyle/>
-          <a:p>
-            <a:endParaRPr lang="en-US" dirty="0"/>
-          </a:p>
-        </p:txBody>
-      </p:sp>
-      <p:sp>
-        <p:nvSpPr>
-          <p:cNvPr id="26" name="Presentation_TItle">
-            <a:extLst>
-              <a:ext uri="{FF2B5EF4-FFF2-40B4-BE49-F238E27FC236}">
-                <a16:creationId xmlns:a16="http://schemas.microsoft.com/office/drawing/2014/main" id="{ADD87412-82D6-A515-DF8B-025EDE80E7BF}"/>
-              </a:ext>
-            </a:extLst>
-          </p:cNvPr>
-          <p:cNvSpPr>
-            <a:spLocks noGrp="1"/>
-          </p:cNvSpPr>
-          <p:nvPr>
-            <p:ph type="title" hasCustomPrompt="1"/>
-          </p:nvPr>
-        </p:nvSpPr>
-        <p:spPr>
-          <a:xfrm>
-            <a:off x="6149365" y="3505200"/>
-            <a:ext cx="5562600" cy="1143001"/>
-          </a:xfrm>
-          <a:prstGeom prst="rect">
-            <a:avLst/>
-          </a:prstGeom>
-        </p:spPr>
-        <p:txBody>
-          <a:bodyPr vert="horz" lIns="91440" tIns="45720" rIns="91440" bIns="45720" rtlCol="0" anchor="ctr">
-            <a:noAutofit/>
-          </a:bodyPr>
-          <a:lstStyle>
-            <a:lvl1pPr>
-              <a:defRPr sz="4400"/>
-            </a:lvl1pPr>
-          </a:lstStyle>
-          <a:p>
-            <a:r>
-              <a:rPr lang="en-US" dirty="0"/>
-              <a:t>Multi-Line</a:t>
-            </a:r>
-            <a:br>
-              <a:rPr lang="en-US" dirty="0"/>
-            </a:br>
-            <a:r>
-              <a:rPr lang="en-US" dirty="0"/>
-              <a:t>Title of Presentation</a:t>
-            </a:r>
-          </a:p>
-        </p:txBody>
-      </p:sp>
-      <p:pic>
-        <p:nvPicPr>
-          <p:cNvPr id="2" name="Picture 1">
-            <a:extLst>
-              <a:ext uri="{FF2B5EF4-FFF2-40B4-BE49-F238E27FC236}">
-                <a16:creationId xmlns:a16="http://schemas.microsoft.com/office/drawing/2014/main" id="{B5422D96-EB6F-9EE4-2D78-3043BC60F2C3}"/>
-              </a:ext>
-            </a:extLst>
-          </p:cNvPr>
-          <p:cNvPicPr>
-            <a:picLocks noChangeAspect="1"/>
-          </p:cNvPicPr>
-          <p:nvPr userDrawn="1"/>
-        </p:nvPicPr>
-        <p:blipFill>
-          <a:blip r:embed="rId2">
-            <a:extLst>
-              <a:ext uri="{28A0092B-C50C-407E-A947-70E740481C1C}">
-                <a14:useLocalDpi xmlns:a14="http://schemas.microsoft.com/office/drawing/2010/main"/>
-              </a:ext>
-            </a:extLst>
-          </a:blip>
-          <a:stretch>
-            <a:fillRect/>
-          </a:stretch>
-        </p:blipFill>
-        <p:spPr>
-          <a:xfrm>
-            <a:off x="10703753" y="536878"/>
-            <a:ext cx="1018401" cy="590745"/>
-          </a:xfrm>
-          <a:prstGeom prst="rect">
-            <a:avLst/>
-          </a:prstGeom>
-        </p:spPr>
-      </p:pic>
-      <p:sp>
-        <p:nvSpPr>
-          <p:cNvPr id="5" name="orgname">
-            <a:extLst>
-              <a:ext uri="{FF2B5EF4-FFF2-40B4-BE49-F238E27FC236}">
-                <a16:creationId xmlns:a16="http://schemas.microsoft.com/office/drawing/2014/main" id="{33A7C9B6-DBD7-2B61-DD27-B359459C6DBE}"/>
-              </a:ext>
-            </a:extLst>
-          </p:cNvPr>
-          <p:cNvSpPr>
-            <a:spLocks noGrp="1"/>
-          </p:cNvSpPr>
-          <p:nvPr>
-            <p:ph type="body" sz="quarter" idx="13"/>
-          </p:nvPr>
-        </p:nvSpPr>
-        <p:spPr>
-          <a:xfrm>
-            <a:off x="6149365" y="4924425"/>
-            <a:ext cx="5561012" cy="320040"/>
-          </a:xfrm>
-        </p:spPr>
-        <p:txBody>
-          <a:bodyPr tIns="0" bIns="0" anchor="ctr" anchorCtr="0"/>
-          <a:lstStyle/>
-          <a:p>
-            <a:pPr lvl="0"/>
-            <a:endParaRPr lang="en-US" dirty="0"/>
-          </a:p>
-        </p:txBody>
-      </p:sp>
-      <p:sp>
-        <p:nvSpPr>
-          <p:cNvPr id="7" name="month_year">
-            <a:extLst>
-              <a:ext uri="{FF2B5EF4-FFF2-40B4-BE49-F238E27FC236}">
-                <a16:creationId xmlns:a16="http://schemas.microsoft.com/office/drawing/2014/main" id="{6F5952BE-55A5-1C39-5E5E-035243667E75}"/>
-              </a:ext>
-            </a:extLst>
-          </p:cNvPr>
-          <p:cNvSpPr>
-            <a:spLocks noGrp="1"/>
-          </p:cNvSpPr>
-          <p:nvPr>
-            <p:ph type="body" sz="quarter" idx="14"/>
-          </p:nvPr>
-        </p:nvSpPr>
-        <p:spPr>
-          <a:xfrm>
-            <a:off x="6149365" y="5275070"/>
-            <a:ext cx="5561012" cy="320040"/>
-          </a:xfrm>
-        </p:spPr>
-        <p:txBody>
-          <a:bodyPr tIns="0" bIns="0" anchor="ctr" anchorCtr="0"/>
-          <a:lstStyle/>
-          <a:p>
-            <a:pPr lvl="0"/>
-            <a:endParaRPr lang="en-US" dirty="0"/>
-          </a:p>
-        </p:txBody>
-      </p:sp>
-    </p:spTree>
-    <p:extLst>
-      <p:ext uri="{BB962C8B-B14F-4D97-AF65-F5344CB8AC3E}">
-        <p14:creationId xmlns:p14="http://schemas.microsoft.com/office/powerpoint/2010/main" val="2057324489"/>
+        <p14:creationId xmlns:p14="http://schemas.microsoft.com/office/powerpoint/2010/main" val="176462580"/>
       </p:ext>
     </p:extLst>
   </p:cSld>
@@ -2722,7 +2032,7 @@
           <p:cNvPr id="2" name="Title 1">
             <a:extLst>
               <a:ext uri="{FF2B5EF4-FFF2-40B4-BE49-F238E27FC236}">
-                <a16:creationId xmlns:a16="http://schemas.microsoft.com/office/drawing/2014/main" id="{4AB7A6A1-F19B-CAE7-7C43-C29B21E8A1FB}"/>
+                <a16:creationId xmlns:a16="http://schemas.microsoft.com/office/drawing/2014/main" id="{EF51E5CF-B57F-11D8-4B7E-93D12B29611C}"/>
               </a:ext>
             </a:extLst>
           </p:cNvPr>
@@ -2759,7 +2069,7 @@
           <p:cNvPr id="3" name="Subtitle 2">
             <a:extLst>
               <a:ext uri="{FF2B5EF4-FFF2-40B4-BE49-F238E27FC236}">
-                <a16:creationId xmlns:a16="http://schemas.microsoft.com/office/drawing/2014/main" id="{5FB927EC-4779-9909-2039-50449FA506C0}"/>
+                <a16:creationId xmlns:a16="http://schemas.microsoft.com/office/drawing/2014/main" id="{33F38BD7-A342-3C04-1BA8-09A7137324FC}"/>
               </a:ext>
             </a:extLst>
           </p:cNvPr>
@@ -2829,7 +2139,7 @@
           <p:cNvPr id="4" name="Date Placeholder 3">
             <a:extLst>
               <a:ext uri="{FF2B5EF4-FFF2-40B4-BE49-F238E27FC236}">
-                <a16:creationId xmlns:a16="http://schemas.microsoft.com/office/drawing/2014/main" id="{6877C745-8B37-019E-A5A2-816CE93522EB}"/>
+                <a16:creationId xmlns:a16="http://schemas.microsoft.com/office/drawing/2014/main" id="{10D274C2-C52A-3D2B-F812-8AB561AED140}"/>
               </a:ext>
             </a:extLst>
           </p:cNvPr>
@@ -2845,9 +2155,9 @@
           <a:bodyPr/>
           <a:lstStyle/>
           <a:p>
-            <a:fld id="{3F2082E8-73AE-0443-9211-048CA87033AA}" type="datetimeFigureOut">
+            <a:fld id="{35B24283-4C9C-384C-9A69-259DDC60D95C}" type="datetimeFigureOut">
               <a:rPr lang="en-US" smtClean="0"/>
-              <a:t>9/11/23</a:t>
+              <a:t>3/26/2026</a:t>
             </a:fld>
             <a:endParaRPr lang="en-US"/>
           </a:p>
@@ -2858,7 +2168,7 @@
           <p:cNvPr id="5" name="Footer Placeholder 4">
             <a:extLst>
               <a:ext uri="{FF2B5EF4-FFF2-40B4-BE49-F238E27FC236}">
-                <a16:creationId xmlns:a16="http://schemas.microsoft.com/office/drawing/2014/main" id="{38614025-14F6-0B01-03FD-5CE69B2CF28F}"/>
+                <a16:creationId xmlns:a16="http://schemas.microsoft.com/office/drawing/2014/main" id="{E03B1A77-BB61-9A64-9618-B84C13CCE5F0}"/>
               </a:ext>
             </a:extLst>
           </p:cNvPr>
@@ -2883,7 +2193,7 @@
           <p:cNvPr id="6" name="Slide Number Placeholder 5">
             <a:extLst>
               <a:ext uri="{FF2B5EF4-FFF2-40B4-BE49-F238E27FC236}">
-                <a16:creationId xmlns:a16="http://schemas.microsoft.com/office/drawing/2014/main" id="{D6A98613-786E-FE37-4073-93FBA723AE4F}"/>
+                <a16:creationId xmlns:a16="http://schemas.microsoft.com/office/drawing/2014/main" id="{92AE0434-5983-1589-9437-D1DCC3A1F76D}"/>
               </a:ext>
             </a:extLst>
           </p:cNvPr>
@@ -2899,7 +2209,7 @@
           <a:bodyPr/>
           <a:lstStyle/>
           <a:p>
-            <a:fld id="{BC43744F-32DB-BD4B-B697-C0670FE089A5}" type="slidenum">
+            <a:fld id="{37587DFE-4FDB-D24C-BF31-EE770609F131}" type="slidenum">
               <a:rPr lang="en-US" smtClean="0"/>
               <a:t>‹#›</a:t>
             </a:fld>
@@ -2910,7 +2220,7 @@
     </p:spTree>
     <p:extLst>
       <p:ext uri="{BB962C8B-B14F-4D97-AF65-F5344CB8AC3E}">
-        <p14:creationId xmlns:p14="http://schemas.microsoft.com/office/powerpoint/2010/main" val="1478776492"/>
+        <p14:creationId xmlns:p14="http://schemas.microsoft.com/office/powerpoint/2010/main" val="2694958804"/>
       </p:ext>
     </p:extLst>
   </p:cSld>
@@ -2921,204 +2231,6 @@
 </file>
 
 <file path=ppt/slideLayouts/slideLayout3.xml><?xml version="1.0" encoding="utf-8"?>
-<p:sldLayout xmlns:a="http://schemas.openxmlformats.org/drawingml/2006/main" xmlns:r="http://schemas.openxmlformats.org/officeDocument/2006/relationships" xmlns:p="http://schemas.openxmlformats.org/presentationml/2006/main" type="obj" preserve="1">
-  <p:cSld name="Title and Content">
-    <p:spTree>
-      <p:nvGrpSpPr>
-        <p:cNvPr id="1" name=""/>
-        <p:cNvGrpSpPr/>
-        <p:nvPr/>
-      </p:nvGrpSpPr>
-      <p:grpSpPr>
-        <a:xfrm>
-          <a:off x="0" y="0"/>
-          <a:ext cx="0" cy="0"/>
-          <a:chOff x="0" y="0"/>
-          <a:chExt cx="0" cy="0"/>
-        </a:xfrm>
-      </p:grpSpPr>
-      <p:sp>
-        <p:nvSpPr>
-          <p:cNvPr id="2" name="Title 1">
-            <a:extLst>
-              <a:ext uri="{FF2B5EF4-FFF2-40B4-BE49-F238E27FC236}">
-                <a16:creationId xmlns:a16="http://schemas.microsoft.com/office/drawing/2014/main" id="{338C5DE3-4644-7048-BAE7-56B52ACF830D}"/>
-              </a:ext>
-            </a:extLst>
-          </p:cNvPr>
-          <p:cNvSpPr>
-            <a:spLocks noGrp="1"/>
-          </p:cNvSpPr>
-          <p:nvPr>
-            <p:ph type="title"/>
-          </p:nvPr>
-        </p:nvSpPr>
-        <p:spPr/>
-        <p:txBody>
-          <a:bodyPr/>
-          <a:lstStyle/>
-          <a:p>
-            <a:r>
-              <a:rPr lang="en-US"/>
-              <a:t>Click to edit Master title style</a:t>
-            </a:r>
-          </a:p>
-        </p:txBody>
-      </p:sp>
-      <p:sp>
-        <p:nvSpPr>
-          <p:cNvPr id="3" name="Content Placeholder 2">
-            <a:extLst>
-              <a:ext uri="{FF2B5EF4-FFF2-40B4-BE49-F238E27FC236}">
-                <a16:creationId xmlns:a16="http://schemas.microsoft.com/office/drawing/2014/main" id="{B869A51A-20FB-8824-EBC9-2DDB78C13E62}"/>
-              </a:ext>
-            </a:extLst>
-          </p:cNvPr>
-          <p:cNvSpPr>
-            <a:spLocks noGrp="1"/>
-          </p:cNvSpPr>
-          <p:nvPr>
-            <p:ph idx="1"/>
-          </p:nvPr>
-        </p:nvSpPr>
-        <p:spPr/>
-        <p:txBody>
-          <a:bodyPr/>
-          <a:lstStyle/>
-          <a:p>
-            <a:pPr lvl="0"/>
-            <a:r>
-              <a:rPr lang="en-US"/>
-              <a:t>Click to edit Master text styles</a:t>
-            </a:r>
-          </a:p>
-          <a:p>
-            <a:pPr lvl="1"/>
-            <a:r>
-              <a:rPr lang="en-US"/>
-              <a:t>Second level</a:t>
-            </a:r>
-          </a:p>
-          <a:p>
-            <a:pPr lvl="2"/>
-            <a:r>
-              <a:rPr lang="en-US"/>
-              <a:t>Third level</a:t>
-            </a:r>
-          </a:p>
-          <a:p>
-            <a:pPr lvl="3"/>
-            <a:r>
-              <a:rPr lang="en-US"/>
-              <a:t>Fourth level</a:t>
-            </a:r>
-          </a:p>
-          <a:p>
-            <a:pPr lvl="4"/>
-            <a:r>
-              <a:rPr lang="en-US"/>
-              <a:t>Fifth level</a:t>
-            </a:r>
-          </a:p>
-        </p:txBody>
-      </p:sp>
-      <p:sp>
-        <p:nvSpPr>
-          <p:cNvPr id="4" name="Date Placeholder 3">
-            <a:extLst>
-              <a:ext uri="{FF2B5EF4-FFF2-40B4-BE49-F238E27FC236}">
-                <a16:creationId xmlns:a16="http://schemas.microsoft.com/office/drawing/2014/main" id="{EEABF2CF-163A-F386-E355-C01AEC4B1080}"/>
-              </a:ext>
-            </a:extLst>
-          </p:cNvPr>
-          <p:cNvSpPr>
-            <a:spLocks noGrp="1"/>
-          </p:cNvSpPr>
-          <p:nvPr>
-            <p:ph type="dt" sz="half" idx="10"/>
-          </p:nvPr>
-        </p:nvSpPr>
-        <p:spPr/>
-        <p:txBody>
-          <a:bodyPr/>
-          <a:lstStyle/>
-          <a:p>
-            <a:fld id="{3F2082E8-73AE-0443-9211-048CA87033AA}" type="datetimeFigureOut">
-              <a:rPr lang="en-US" smtClean="0"/>
-              <a:t>9/11/23</a:t>
-            </a:fld>
-            <a:endParaRPr lang="en-US"/>
-          </a:p>
-        </p:txBody>
-      </p:sp>
-      <p:sp>
-        <p:nvSpPr>
-          <p:cNvPr id="5" name="Footer Placeholder 4">
-            <a:extLst>
-              <a:ext uri="{FF2B5EF4-FFF2-40B4-BE49-F238E27FC236}">
-                <a16:creationId xmlns:a16="http://schemas.microsoft.com/office/drawing/2014/main" id="{031BCC50-FF40-EF6F-CF12-EA0BB79837EC}"/>
-              </a:ext>
-            </a:extLst>
-          </p:cNvPr>
-          <p:cNvSpPr>
-            <a:spLocks noGrp="1"/>
-          </p:cNvSpPr>
-          <p:nvPr>
-            <p:ph type="ftr" sz="quarter" idx="11"/>
-          </p:nvPr>
-        </p:nvSpPr>
-        <p:spPr/>
-        <p:txBody>
-          <a:bodyPr/>
-          <a:lstStyle/>
-          <a:p>
-            <a:endParaRPr lang="en-US"/>
-          </a:p>
-        </p:txBody>
-      </p:sp>
-      <p:sp>
-        <p:nvSpPr>
-          <p:cNvPr id="6" name="Slide Number Placeholder 5">
-            <a:extLst>
-              <a:ext uri="{FF2B5EF4-FFF2-40B4-BE49-F238E27FC236}">
-                <a16:creationId xmlns:a16="http://schemas.microsoft.com/office/drawing/2014/main" id="{D152516B-FE6F-EADD-6328-F800C149CE69}"/>
-              </a:ext>
-            </a:extLst>
-          </p:cNvPr>
-          <p:cNvSpPr>
-            <a:spLocks noGrp="1"/>
-          </p:cNvSpPr>
-          <p:nvPr>
-            <p:ph type="sldNum" sz="quarter" idx="12"/>
-          </p:nvPr>
-        </p:nvSpPr>
-        <p:spPr/>
-        <p:txBody>
-          <a:bodyPr/>
-          <a:lstStyle/>
-          <a:p>
-            <a:fld id="{BC43744F-32DB-BD4B-B697-C0670FE089A5}" type="slidenum">
-              <a:rPr lang="en-US" smtClean="0"/>
-              <a:t>‹#›</a:t>
-            </a:fld>
-            <a:endParaRPr lang="en-US"/>
-          </a:p>
-        </p:txBody>
-      </p:sp>
-    </p:spTree>
-    <p:extLst>
-      <p:ext uri="{BB962C8B-B14F-4D97-AF65-F5344CB8AC3E}">
-        <p14:creationId xmlns:p14="http://schemas.microsoft.com/office/powerpoint/2010/main" val="1958294226"/>
-      </p:ext>
-    </p:extLst>
-  </p:cSld>
-  <p:clrMapOvr>
-    <a:masterClrMapping/>
-  </p:clrMapOvr>
-</p:sldLayout>
-</file>
-
-<file path=ppt/slideLayouts/slideLayout4.xml><?xml version="1.0" encoding="utf-8"?>
 <p:sldLayout xmlns:a="http://schemas.openxmlformats.org/drawingml/2006/main" xmlns:r="http://schemas.openxmlformats.org/officeDocument/2006/relationships" xmlns:p="http://schemas.openxmlformats.org/presentationml/2006/main" type="secHead" preserve="1">
   <p:cSld name="Section Header">
     <p:spTree>
@@ -3140,7 +2252,7 @@
           <p:cNvPr id="2" name="Title 1">
             <a:extLst>
               <a:ext uri="{FF2B5EF4-FFF2-40B4-BE49-F238E27FC236}">
-                <a16:creationId xmlns:a16="http://schemas.microsoft.com/office/drawing/2014/main" id="{C3A9E0F1-3BC5-6811-2CE6-33AB2B022376}"/>
+                <a16:creationId xmlns:a16="http://schemas.microsoft.com/office/drawing/2014/main" id="{EF96FDDD-6DEB-0CC8-F7D2-E678FFB543AB}"/>
               </a:ext>
             </a:extLst>
           </p:cNvPr>
@@ -3177,7 +2289,7 @@
           <p:cNvPr id="3" name="Text Placeholder 2">
             <a:extLst>
               <a:ext uri="{FF2B5EF4-FFF2-40B4-BE49-F238E27FC236}">
-                <a16:creationId xmlns:a16="http://schemas.microsoft.com/office/drawing/2014/main" id="{A10744E3-F095-4BC1-14C1-85AF02D8700C}"/>
+                <a16:creationId xmlns:a16="http://schemas.microsoft.com/office/drawing/2014/main" id="{B7C17EEE-972D-BDA4-51AE-1CD089BCAB35}"/>
               </a:ext>
             </a:extLst>
           </p:cNvPr>
@@ -3202,7 +2314,7 @@
               <a:defRPr sz="2400">
                 <a:solidFill>
                   <a:schemeClr val="tx1">
-                    <a:tint val="75000"/>
+                    <a:tint val="82000"/>
                   </a:schemeClr>
                 </a:solidFill>
               </a:defRPr>
@@ -3212,7 +2324,7 @@
               <a:defRPr sz="2000">
                 <a:solidFill>
                   <a:schemeClr val="tx1">
-                    <a:tint val="75000"/>
+                    <a:tint val="82000"/>
                   </a:schemeClr>
                 </a:solidFill>
               </a:defRPr>
@@ -3222,7 +2334,7 @@
               <a:defRPr sz="1800">
                 <a:solidFill>
                   <a:schemeClr val="tx1">
-                    <a:tint val="75000"/>
+                    <a:tint val="82000"/>
                   </a:schemeClr>
                 </a:solidFill>
               </a:defRPr>
@@ -3232,7 +2344,7 @@
               <a:defRPr sz="1600">
                 <a:solidFill>
                   <a:schemeClr val="tx1">
-                    <a:tint val="75000"/>
+                    <a:tint val="82000"/>
                   </a:schemeClr>
                 </a:solidFill>
               </a:defRPr>
@@ -3242,7 +2354,7 @@
               <a:defRPr sz="1600">
                 <a:solidFill>
                   <a:schemeClr val="tx1">
-                    <a:tint val="75000"/>
+                    <a:tint val="82000"/>
                   </a:schemeClr>
                 </a:solidFill>
               </a:defRPr>
@@ -3252,7 +2364,7 @@
               <a:defRPr sz="1600">
                 <a:solidFill>
                   <a:schemeClr val="tx1">
-                    <a:tint val="75000"/>
+                    <a:tint val="82000"/>
                   </a:schemeClr>
                 </a:solidFill>
               </a:defRPr>
@@ -3262,7 +2374,7 @@
               <a:defRPr sz="1600">
                 <a:solidFill>
                   <a:schemeClr val="tx1">
-                    <a:tint val="75000"/>
+                    <a:tint val="82000"/>
                   </a:schemeClr>
                 </a:solidFill>
               </a:defRPr>
@@ -3272,7 +2384,7 @@
               <a:defRPr sz="1600">
                 <a:solidFill>
                   <a:schemeClr val="tx1">
-                    <a:tint val="75000"/>
+                    <a:tint val="82000"/>
                   </a:schemeClr>
                 </a:solidFill>
               </a:defRPr>
@@ -3282,7 +2394,7 @@
               <a:defRPr sz="1600">
                 <a:solidFill>
                   <a:schemeClr val="tx1">
-                    <a:tint val="75000"/>
+                    <a:tint val="82000"/>
                   </a:schemeClr>
                 </a:solidFill>
               </a:defRPr>
@@ -3302,7 +2414,7 @@
           <p:cNvPr id="4" name="Date Placeholder 3">
             <a:extLst>
               <a:ext uri="{FF2B5EF4-FFF2-40B4-BE49-F238E27FC236}">
-                <a16:creationId xmlns:a16="http://schemas.microsoft.com/office/drawing/2014/main" id="{AA7E1176-205A-6A47-8FCB-FA54B4091813}"/>
+                <a16:creationId xmlns:a16="http://schemas.microsoft.com/office/drawing/2014/main" id="{10CBDE5B-A11F-7CFB-9DBB-D7F3C0512BDE}"/>
               </a:ext>
             </a:extLst>
           </p:cNvPr>
@@ -3318,9 +2430,9 @@
           <a:bodyPr/>
           <a:lstStyle/>
           <a:p>
-            <a:fld id="{3F2082E8-73AE-0443-9211-048CA87033AA}" type="datetimeFigureOut">
+            <a:fld id="{35B24283-4C9C-384C-9A69-259DDC60D95C}" type="datetimeFigureOut">
               <a:rPr lang="en-US" smtClean="0"/>
-              <a:t>9/11/23</a:t>
+              <a:t>3/26/2026</a:t>
             </a:fld>
             <a:endParaRPr lang="en-US"/>
           </a:p>
@@ -3331,7 +2443,7 @@
           <p:cNvPr id="5" name="Footer Placeholder 4">
             <a:extLst>
               <a:ext uri="{FF2B5EF4-FFF2-40B4-BE49-F238E27FC236}">
-                <a16:creationId xmlns:a16="http://schemas.microsoft.com/office/drawing/2014/main" id="{377ED5AB-B95A-F7DB-A7CF-9626921F108A}"/>
+                <a16:creationId xmlns:a16="http://schemas.microsoft.com/office/drawing/2014/main" id="{09D984E3-F8EC-5DF5-D384-415A1875B006}"/>
               </a:ext>
             </a:extLst>
           </p:cNvPr>
@@ -3356,7 +2468,7 @@
           <p:cNvPr id="6" name="Slide Number Placeholder 5">
             <a:extLst>
               <a:ext uri="{FF2B5EF4-FFF2-40B4-BE49-F238E27FC236}">
-                <a16:creationId xmlns:a16="http://schemas.microsoft.com/office/drawing/2014/main" id="{186DCFC5-27D6-3BEB-184A-82456CEF7789}"/>
+                <a16:creationId xmlns:a16="http://schemas.microsoft.com/office/drawing/2014/main" id="{E2089436-E38C-5CC2-360B-534411C1F0C5}"/>
               </a:ext>
             </a:extLst>
           </p:cNvPr>
@@ -3372,7 +2484,7 @@
           <a:bodyPr/>
           <a:lstStyle/>
           <a:p>
-            <a:fld id="{BC43744F-32DB-BD4B-B697-C0670FE089A5}" type="slidenum">
+            <a:fld id="{37587DFE-4FDB-D24C-BF31-EE770609F131}" type="slidenum">
               <a:rPr lang="en-US" smtClean="0"/>
               <a:t>‹#›</a:t>
             </a:fld>
@@ -3383,7 +2495,7 @@
     </p:spTree>
     <p:extLst>
       <p:ext uri="{BB962C8B-B14F-4D97-AF65-F5344CB8AC3E}">
-        <p14:creationId xmlns:p14="http://schemas.microsoft.com/office/powerpoint/2010/main" val="385001653"/>
+        <p14:creationId xmlns:p14="http://schemas.microsoft.com/office/powerpoint/2010/main" val="1829292990"/>
       </p:ext>
     </p:extLst>
   </p:cSld>
@@ -3393,7 +2505,7 @@
 </p:sldLayout>
 </file>
 
-<file path=ppt/slideLayouts/slideLayout5.xml><?xml version="1.0" encoding="utf-8"?>
+<file path=ppt/slideLayouts/slideLayout4.xml><?xml version="1.0" encoding="utf-8"?>
 <p:sldLayout xmlns:a="http://schemas.openxmlformats.org/drawingml/2006/main" xmlns:r="http://schemas.openxmlformats.org/officeDocument/2006/relationships" xmlns:p="http://schemas.openxmlformats.org/presentationml/2006/main" type="twoObj" preserve="1">
   <p:cSld name="Two Content">
     <p:spTree>
@@ -3415,7 +2527,7 @@
           <p:cNvPr id="2" name="Title 1">
             <a:extLst>
               <a:ext uri="{FF2B5EF4-FFF2-40B4-BE49-F238E27FC236}">
-                <a16:creationId xmlns:a16="http://schemas.microsoft.com/office/drawing/2014/main" id="{25957614-4B78-CA02-3682-7DE582F0FBAB}"/>
+                <a16:creationId xmlns:a16="http://schemas.microsoft.com/office/drawing/2014/main" id="{A3745619-E2A7-0CDB-DEF7-3DF4A87ACE26}"/>
               </a:ext>
             </a:extLst>
           </p:cNvPr>
@@ -3443,7 +2555,7 @@
           <p:cNvPr id="3" name="Content Placeholder 2">
             <a:extLst>
               <a:ext uri="{FF2B5EF4-FFF2-40B4-BE49-F238E27FC236}">
-                <a16:creationId xmlns:a16="http://schemas.microsoft.com/office/drawing/2014/main" id="{E88BB2D6-B82A-8743-C188-912D4E9C57DB}"/>
+                <a16:creationId xmlns:a16="http://schemas.microsoft.com/office/drawing/2014/main" id="{0C27C8F3-733B-AB4F-1DD9-C6D274F43EF7}"/>
               </a:ext>
             </a:extLst>
           </p:cNvPr>
@@ -3505,7 +2617,7 @@
           <p:cNvPr id="4" name="Content Placeholder 3">
             <a:extLst>
               <a:ext uri="{FF2B5EF4-FFF2-40B4-BE49-F238E27FC236}">
-                <a16:creationId xmlns:a16="http://schemas.microsoft.com/office/drawing/2014/main" id="{1EAD1BA5-8701-9587-AA85-0D953BBB3DC5}"/>
+                <a16:creationId xmlns:a16="http://schemas.microsoft.com/office/drawing/2014/main" id="{34AD702D-8651-EDB2-6A13-81810ACD1133}"/>
               </a:ext>
             </a:extLst>
           </p:cNvPr>
@@ -3567,7 +2679,7 @@
           <p:cNvPr id="5" name="Date Placeholder 4">
             <a:extLst>
               <a:ext uri="{FF2B5EF4-FFF2-40B4-BE49-F238E27FC236}">
-                <a16:creationId xmlns:a16="http://schemas.microsoft.com/office/drawing/2014/main" id="{18787327-2DDF-3256-9563-3765A359F84D}"/>
+                <a16:creationId xmlns:a16="http://schemas.microsoft.com/office/drawing/2014/main" id="{6980D182-7E8E-62E8-C21F-A2EAB16F7804}"/>
               </a:ext>
             </a:extLst>
           </p:cNvPr>
@@ -3583,9 +2695,9 @@
           <a:bodyPr/>
           <a:lstStyle/>
           <a:p>
-            <a:fld id="{3F2082E8-73AE-0443-9211-048CA87033AA}" type="datetimeFigureOut">
+            <a:fld id="{35B24283-4C9C-384C-9A69-259DDC60D95C}" type="datetimeFigureOut">
               <a:rPr lang="en-US" smtClean="0"/>
-              <a:t>9/11/23</a:t>
+              <a:t>3/26/2026</a:t>
             </a:fld>
             <a:endParaRPr lang="en-US"/>
           </a:p>
@@ -3596,7 +2708,7 @@
           <p:cNvPr id="6" name="Footer Placeholder 5">
             <a:extLst>
               <a:ext uri="{FF2B5EF4-FFF2-40B4-BE49-F238E27FC236}">
-                <a16:creationId xmlns:a16="http://schemas.microsoft.com/office/drawing/2014/main" id="{CF9563D5-1FC8-E08B-6EF7-F85EEB0176AD}"/>
+                <a16:creationId xmlns:a16="http://schemas.microsoft.com/office/drawing/2014/main" id="{9ACD7B99-7356-05F8-11FF-55E9D4DC19D5}"/>
               </a:ext>
             </a:extLst>
           </p:cNvPr>
@@ -3621,7 +2733,7 @@
           <p:cNvPr id="7" name="Slide Number Placeholder 6">
             <a:extLst>
               <a:ext uri="{FF2B5EF4-FFF2-40B4-BE49-F238E27FC236}">
-                <a16:creationId xmlns:a16="http://schemas.microsoft.com/office/drawing/2014/main" id="{5C35C2D1-14E1-5DDE-8CD4-4B60C8A2CDBE}"/>
+                <a16:creationId xmlns:a16="http://schemas.microsoft.com/office/drawing/2014/main" id="{66D69FAD-31A5-6DC0-51F0-F3316D81C818}"/>
               </a:ext>
             </a:extLst>
           </p:cNvPr>
@@ -3637,7 +2749,7 @@
           <a:bodyPr/>
           <a:lstStyle/>
           <a:p>
-            <a:fld id="{BC43744F-32DB-BD4B-B697-C0670FE089A5}" type="slidenum">
+            <a:fld id="{37587DFE-4FDB-D24C-BF31-EE770609F131}" type="slidenum">
               <a:rPr lang="en-US" smtClean="0"/>
               <a:t>‹#›</a:t>
             </a:fld>
@@ -3648,7 +2760,7 @@
     </p:spTree>
     <p:extLst>
       <p:ext uri="{BB962C8B-B14F-4D97-AF65-F5344CB8AC3E}">
-        <p14:creationId xmlns:p14="http://schemas.microsoft.com/office/powerpoint/2010/main" val="1473286501"/>
+        <p14:creationId xmlns:p14="http://schemas.microsoft.com/office/powerpoint/2010/main" val="972000682"/>
       </p:ext>
     </p:extLst>
   </p:cSld>
@@ -3658,7 +2770,7 @@
 </p:sldLayout>
 </file>
 
-<file path=ppt/slideLayouts/slideLayout6.xml><?xml version="1.0" encoding="utf-8"?>
+<file path=ppt/slideLayouts/slideLayout5.xml><?xml version="1.0" encoding="utf-8"?>
 <p:sldLayout xmlns:a="http://schemas.openxmlformats.org/drawingml/2006/main" xmlns:r="http://schemas.openxmlformats.org/officeDocument/2006/relationships" xmlns:p="http://schemas.openxmlformats.org/presentationml/2006/main" type="twoTxTwoObj" preserve="1">
   <p:cSld name="Comparison">
     <p:spTree>
@@ -3680,7 +2792,7 @@
           <p:cNvPr id="2" name="Title 1">
             <a:extLst>
               <a:ext uri="{FF2B5EF4-FFF2-40B4-BE49-F238E27FC236}">
-                <a16:creationId xmlns:a16="http://schemas.microsoft.com/office/drawing/2014/main" id="{69FA1FFB-92BE-D9D0-F7FB-002EB899BB69}"/>
+                <a16:creationId xmlns:a16="http://schemas.microsoft.com/office/drawing/2014/main" id="{B165D074-70E5-69DA-2FD9-2FE09DDB9FBC}"/>
               </a:ext>
             </a:extLst>
           </p:cNvPr>
@@ -3713,7 +2825,7 @@
           <p:cNvPr id="3" name="Text Placeholder 2">
             <a:extLst>
               <a:ext uri="{FF2B5EF4-FFF2-40B4-BE49-F238E27FC236}">
-                <a16:creationId xmlns:a16="http://schemas.microsoft.com/office/drawing/2014/main" id="{EC6E4169-FFB5-C702-C64B-E84342466B05}"/>
+                <a16:creationId xmlns:a16="http://schemas.microsoft.com/office/drawing/2014/main" id="{341CA872-8725-AE64-893F-D65F314EC5B5}"/>
               </a:ext>
             </a:extLst>
           </p:cNvPr>
@@ -3784,7 +2896,7 @@
           <p:cNvPr id="4" name="Content Placeholder 3">
             <a:extLst>
               <a:ext uri="{FF2B5EF4-FFF2-40B4-BE49-F238E27FC236}">
-                <a16:creationId xmlns:a16="http://schemas.microsoft.com/office/drawing/2014/main" id="{A75E8D40-575C-4337-FABD-96B5177129DF}"/>
+                <a16:creationId xmlns:a16="http://schemas.microsoft.com/office/drawing/2014/main" id="{827A1DA4-D98A-4B25-B064-108D3CB0871A}"/>
               </a:ext>
             </a:extLst>
           </p:cNvPr>
@@ -3846,7 +2958,7 @@
           <p:cNvPr id="5" name="Text Placeholder 4">
             <a:extLst>
               <a:ext uri="{FF2B5EF4-FFF2-40B4-BE49-F238E27FC236}">
-                <a16:creationId xmlns:a16="http://schemas.microsoft.com/office/drawing/2014/main" id="{01E2A698-2C71-EAAE-36F0-7FEB65F48AD9}"/>
+                <a16:creationId xmlns:a16="http://schemas.microsoft.com/office/drawing/2014/main" id="{94B6FB19-1698-209D-DEC5-637B881D43CF}"/>
               </a:ext>
             </a:extLst>
           </p:cNvPr>
@@ -3917,7 +3029,7 @@
           <p:cNvPr id="6" name="Content Placeholder 5">
             <a:extLst>
               <a:ext uri="{FF2B5EF4-FFF2-40B4-BE49-F238E27FC236}">
-                <a16:creationId xmlns:a16="http://schemas.microsoft.com/office/drawing/2014/main" id="{827AAF46-B69E-9460-CF51-3946D5EFCF61}"/>
+                <a16:creationId xmlns:a16="http://schemas.microsoft.com/office/drawing/2014/main" id="{B18175BB-CA7E-E16B-3DC9-7E60C73A23E5}"/>
               </a:ext>
             </a:extLst>
           </p:cNvPr>
@@ -3979,7 +3091,7 @@
           <p:cNvPr id="7" name="Date Placeholder 6">
             <a:extLst>
               <a:ext uri="{FF2B5EF4-FFF2-40B4-BE49-F238E27FC236}">
-                <a16:creationId xmlns:a16="http://schemas.microsoft.com/office/drawing/2014/main" id="{EE843B74-615F-984B-6F51-47296B86E695}"/>
+                <a16:creationId xmlns:a16="http://schemas.microsoft.com/office/drawing/2014/main" id="{852E1672-E604-BF9E-A250-F88FCAE9A60D}"/>
               </a:ext>
             </a:extLst>
           </p:cNvPr>
@@ -3995,9 +3107,9 @@
           <a:bodyPr/>
           <a:lstStyle/>
           <a:p>
-            <a:fld id="{3F2082E8-73AE-0443-9211-048CA87033AA}" type="datetimeFigureOut">
+            <a:fld id="{35B24283-4C9C-384C-9A69-259DDC60D95C}" type="datetimeFigureOut">
               <a:rPr lang="en-US" smtClean="0"/>
-              <a:t>9/11/23</a:t>
+              <a:t>3/26/2026</a:t>
             </a:fld>
             <a:endParaRPr lang="en-US"/>
           </a:p>
@@ -4008,7 +3120,7 @@
           <p:cNvPr id="8" name="Footer Placeholder 7">
             <a:extLst>
               <a:ext uri="{FF2B5EF4-FFF2-40B4-BE49-F238E27FC236}">
-                <a16:creationId xmlns:a16="http://schemas.microsoft.com/office/drawing/2014/main" id="{49C58917-D64D-6AE3-8152-6B66BE196193}"/>
+                <a16:creationId xmlns:a16="http://schemas.microsoft.com/office/drawing/2014/main" id="{8832827A-2145-BAE1-A005-9EE4648DC8EB}"/>
               </a:ext>
             </a:extLst>
           </p:cNvPr>
@@ -4033,7 +3145,7 @@
           <p:cNvPr id="9" name="Slide Number Placeholder 8">
             <a:extLst>
               <a:ext uri="{FF2B5EF4-FFF2-40B4-BE49-F238E27FC236}">
-                <a16:creationId xmlns:a16="http://schemas.microsoft.com/office/drawing/2014/main" id="{BEDE45BA-7094-2AF7-25F1-6BA702849F34}"/>
+                <a16:creationId xmlns:a16="http://schemas.microsoft.com/office/drawing/2014/main" id="{E3243C6A-E4F1-B7C6-3B6A-7345CCAA66A7}"/>
               </a:ext>
             </a:extLst>
           </p:cNvPr>
@@ -4049,7 +3161,7 @@
           <a:bodyPr/>
           <a:lstStyle/>
           <a:p>
-            <a:fld id="{BC43744F-32DB-BD4B-B697-C0670FE089A5}" type="slidenum">
+            <a:fld id="{37587DFE-4FDB-D24C-BF31-EE770609F131}" type="slidenum">
               <a:rPr lang="en-US" smtClean="0"/>
               <a:t>‹#›</a:t>
             </a:fld>
@@ -4060,7 +3172,7 @@
     </p:spTree>
     <p:extLst>
       <p:ext uri="{BB962C8B-B14F-4D97-AF65-F5344CB8AC3E}">
-        <p14:creationId xmlns:p14="http://schemas.microsoft.com/office/powerpoint/2010/main" val="1934921637"/>
+        <p14:creationId xmlns:p14="http://schemas.microsoft.com/office/powerpoint/2010/main" val="3012613683"/>
       </p:ext>
     </p:extLst>
   </p:cSld>
@@ -4070,7 +3182,7 @@
 </p:sldLayout>
 </file>
 
-<file path=ppt/slideLayouts/slideLayout7.xml><?xml version="1.0" encoding="utf-8"?>
+<file path=ppt/slideLayouts/slideLayout6.xml><?xml version="1.0" encoding="utf-8"?>
 <p:sldLayout xmlns:a="http://schemas.openxmlformats.org/drawingml/2006/main" xmlns:r="http://schemas.openxmlformats.org/officeDocument/2006/relationships" xmlns:p="http://schemas.openxmlformats.org/presentationml/2006/main" type="titleOnly" preserve="1">
   <p:cSld name="Title Only">
     <p:spTree>
@@ -4092,7 +3204,7 @@
           <p:cNvPr id="2" name="Title 1">
             <a:extLst>
               <a:ext uri="{FF2B5EF4-FFF2-40B4-BE49-F238E27FC236}">
-                <a16:creationId xmlns:a16="http://schemas.microsoft.com/office/drawing/2014/main" id="{DB03E950-F0BB-74A7-F390-06E26FA42A3B}"/>
+                <a16:creationId xmlns:a16="http://schemas.microsoft.com/office/drawing/2014/main" id="{EE3291D0-8A13-B188-9C8D-9D1B75EF3D81}"/>
               </a:ext>
             </a:extLst>
           </p:cNvPr>
@@ -4109,7 +3221,7 @@
           <a:lstStyle/>
           <a:p>
             <a:r>
-              <a:rPr lang="en-US"/>
+              <a:rPr lang="en-US" dirty="0"/>
               <a:t>Click to edit Master title style</a:t>
             </a:r>
           </a:p>
@@ -4120,7 +3232,7 @@
           <p:cNvPr id="3" name="Date Placeholder 2">
             <a:extLst>
               <a:ext uri="{FF2B5EF4-FFF2-40B4-BE49-F238E27FC236}">
-                <a16:creationId xmlns:a16="http://schemas.microsoft.com/office/drawing/2014/main" id="{A57DA55F-DD1F-F4D0-F878-76EBC37A4805}"/>
+                <a16:creationId xmlns:a16="http://schemas.microsoft.com/office/drawing/2014/main" id="{E7CF389F-53F3-8AD1-5720-9239FE08F9B3}"/>
               </a:ext>
             </a:extLst>
           </p:cNvPr>
@@ -4136,9 +3248,9 @@
           <a:bodyPr/>
           <a:lstStyle/>
           <a:p>
-            <a:fld id="{3F2082E8-73AE-0443-9211-048CA87033AA}" type="datetimeFigureOut">
+            <a:fld id="{35B24283-4C9C-384C-9A69-259DDC60D95C}" type="datetimeFigureOut">
               <a:rPr lang="en-US" smtClean="0"/>
-              <a:t>9/11/23</a:t>
+              <a:t>3/26/2026</a:t>
             </a:fld>
             <a:endParaRPr lang="en-US"/>
           </a:p>
@@ -4149,7 +3261,7 @@
           <p:cNvPr id="4" name="Footer Placeholder 3">
             <a:extLst>
               <a:ext uri="{FF2B5EF4-FFF2-40B4-BE49-F238E27FC236}">
-                <a16:creationId xmlns:a16="http://schemas.microsoft.com/office/drawing/2014/main" id="{8D91BC15-C7CD-5775-C593-D95653B4F4CF}"/>
+                <a16:creationId xmlns:a16="http://schemas.microsoft.com/office/drawing/2014/main" id="{AFB2B374-7F88-4CCC-D654-9E1E76B1DA91}"/>
               </a:ext>
             </a:extLst>
           </p:cNvPr>
@@ -4174,7 +3286,7 @@
           <p:cNvPr id="5" name="Slide Number Placeholder 4">
             <a:extLst>
               <a:ext uri="{FF2B5EF4-FFF2-40B4-BE49-F238E27FC236}">
-                <a16:creationId xmlns:a16="http://schemas.microsoft.com/office/drawing/2014/main" id="{F28BC3CE-EDD8-7555-B681-02DACB364412}"/>
+                <a16:creationId xmlns:a16="http://schemas.microsoft.com/office/drawing/2014/main" id="{984A2FD7-CF06-FC7C-9E2E-FD8EA68F50C8}"/>
               </a:ext>
             </a:extLst>
           </p:cNvPr>
@@ -4190,7 +3302,7 @@
           <a:bodyPr/>
           <a:lstStyle/>
           <a:p>
-            <a:fld id="{BC43744F-32DB-BD4B-B697-C0670FE089A5}" type="slidenum">
+            <a:fld id="{37587DFE-4FDB-D24C-BF31-EE770609F131}" type="slidenum">
               <a:rPr lang="en-US" smtClean="0"/>
               <a:t>‹#›</a:t>
             </a:fld>
@@ -4201,7 +3313,7 @@
     </p:spTree>
     <p:extLst>
       <p:ext uri="{BB962C8B-B14F-4D97-AF65-F5344CB8AC3E}">
-        <p14:creationId xmlns:p14="http://schemas.microsoft.com/office/powerpoint/2010/main" val="3175046048"/>
+        <p14:creationId xmlns:p14="http://schemas.microsoft.com/office/powerpoint/2010/main" val="2241740354"/>
       </p:ext>
     </p:extLst>
   </p:cSld>
@@ -4211,7 +3323,7 @@
 </p:sldLayout>
 </file>
 
-<file path=ppt/slideLayouts/slideLayout8.xml><?xml version="1.0" encoding="utf-8"?>
+<file path=ppt/slideLayouts/slideLayout7.xml><?xml version="1.0" encoding="utf-8"?>
 <p:sldLayout xmlns:a="http://schemas.openxmlformats.org/drawingml/2006/main" xmlns:r="http://schemas.openxmlformats.org/officeDocument/2006/relationships" xmlns:p="http://schemas.openxmlformats.org/presentationml/2006/main" type="blank" preserve="1">
   <p:cSld name="Blank">
     <p:spTree>
@@ -4233,7 +3345,7 @@
           <p:cNvPr id="2" name="Date Placeholder 1">
             <a:extLst>
               <a:ext uri="{FF2B5EF4-FFF2-40B4-BE49-F238E27FC236}">
-                <a16:creationId xmlns:a16="http://schemas.microsoft.com/office/drawing/2014/main" id="{A82E8D3C-4713-3A1A-D788-F69D3126FF28}"/>
+                <a16:creationId xmlns:a16="http://schemas.microsoft.com/office/drawing/2014/main" id="{980868B3-6050-E4A0-D327-CED0AFE112B0}"/>
               </a:ext>
             </a:extLst>
           </p:cNvPr>
@@ -4249,9 +3361,9 @@
           <a:bodyPr/>
           <a:lstStyle/>
           <a:p>
-            <a:fld id="{3F2082E8-73AE-0443-9211-048CA87033AA}" type="datetimeFigureOut">
+            <a:fld id="{35B24283-4C9C-384C-9A69-259DDC60D95C}" type="datetimeFigureOut">
               <a:rPr lang="en-US" smtClean="0"/>
-              <a:t>9/11/23</a:t>
+              <a:t>3/26/2026</a:t>
             </a:fld>
             <a:endParaRPr lang="en-US"/>
           </a:p>
@@ -4262,7 +3374,7 @@
           <p:cNvPr id="3" name="Footer Placeholder 2">
             <a:extLst>
               <a:ext uri="{FF2B5EF4-FFF2-40B4-BE49-F238E27FC236}">
-                <a16:creationId xmlns:a16="http://schemas.microsoft.com/office/drawing/2014/main" id="{B851C1D4-CEDE-C632-0CF5-ED8DC75CFADD}"/>
+                <a16:creationId xmlns:a16="http://schemas.microsoft.com/office/drawing/2014/main" id="{A551A859-7003-3B9A-2C3B-BA0930531220}"/>
               </a:ext>
             </a:extLst>
           </p:cNvPr>
@@ -4287,7 +3399,7 @@
           <p:cNvPr id="4" name="Slide Number Placeholder 3">
             <a:extLst>
               <a:ext uri="{FF2B5EF4-FFF2-40B4-BE49-F238E27FC236}">
-                <a16:creationId xmlns:a16="http://schemas.microsoft.com/office/drawing/2014/main" id="{878E0B80-643D-683C-BC31-5B0DA953CAE3}"/>
+                <a16:creationId xmlns:a16="http://schemas.microsoft.com/office/drawing/2014/main" id="{BDFE14A9-DF26-896D-2B4A-CCF8221ED86E}"/>
               </a:ext>
             </a:extLst>
           </p:cNvPr>
@@ -4303,7 +3415,7 @@
           <a:bodyPr/>
           <a:lstStyle/>
           <a:p>
-            <a:fld id="{BC43744F-32DB-BD4B-B697-C0670FE089A5}" type="slidenum">
+            <a:fld id="{37587DFE-4FDB-D24C-BF31-EE770609F131}" type="slidenum">
               <a:rPr lang="en-US" smtClean="0"/>
               <a:t>‹#›</a:t>
             </a:fld>
@@ -4314,7 +3426,7 @@
     </p:spTree>
     <p:extLst>
       <p:ext uri="{BB962C8B-B14F-4D97-AF65-F5344CB8AC3E}">
-        <p14:creationId xmlns:p14="http://schemas.microsoft.com/office/powerpoint/2010/main" val="1521871201"/>
+        <p14:creationId xmlns:p14="http://schemas.microsoft.com/office/powerpoint/2010/main" val="410799302"/>
       </p:ext>
     </p:extLst>
   </p:cSld>
@@ -4324,7 +3436,7 @@
 </p:sldLayout>
 </file>
 
-<file path=ppt/slideLayouts/slideLayout9.xml><?xml version="1.0" encoding="utf-8"?>
+<file path=ppt/slideLayouts/slideLayout8.xml><?xml version="1.0" encoding="utf-8"?>
 <p:sldLayout xmlns:a="http://schemas.openxmlformats.org/drawingml/2006/main" xmlns:r="http://schemas.openxmlformats.org/officeDocument/2006/relationships" xmlns:p="http://schemas.openxmlformats.org/presentationml/2006/main" type="objTx" preserve="1">
   <p:cSld name="Content with Caption">
     <p:spTree>
@@ -4346,7 +3458,7 @@
           <p:cNvPr id="2" name="Title 1">
             <a:extLst>
               <a:ext uri="{FF2B5EF4-FFF2-40B4-BE49-F238E27FC236}">
-                <a16:creationId xmlns:a16="http://schemas.microsoft.com/office/drawing/2014/main" id="{F05F0A80-2DFA-178F-21F2-A91B42438CF1}"/>
+                <a16:creationId xmlns:a16="http://schemas.microsoft.com/office/drawing/2014/main" id="{75895E43-7108-6400-4ACB-8D3B64870E8C}"/>
               </a:ext>
             </a:extLst>
           </p:cNvPr>
@@ -4383,7 +3495,7 @@
           <p:cNvPr id="3" name="Content Placeholder 2">
             <a:extLst>
               <a:ext uri="{FF2B5EF4-FFF2-40B4-BE49-F238E27FC236}">
-                <a16:creationId xmlns:a16="http://schemas.microsoft.com/office/drawing/2014/main" id="{D54C4127-125A-F370-3F11-839BA4462381}"/>
+                <a16:creationId xmlns:a16="http://schemas.microsoft.com/office/drawing/2014/main" id="{FF6145E6-EB02-A5D5-8429-4F34E33E7D33}"/>
               </a:ext>
             </a:extLst>
           </p:cNvPr>
@@ -4473,7 +3585,7 @@
           <p:cNvPr id="4" name="Text Placeholder 3">
             <a:extLst>
               <a:ext uri="{FF2B5EF4-FFF2-40B4-BE49-F238E27FC236}">
-                <a16:creationId xmlns:a16="http://schemas.microsoft.com/office/drawing/2014/main" id="{0A759A62-9615-39D0-B379-00607E0A5544}"/>
+                <a16:creationId xmlns:a16="http://schemas.microsoft.com/office/drawing/2014/main" id="{0F42A8D1-435D-E831-ECC4-6EDF22B9CD09}"/>
               </a:ext>
             </a:extLst>
           </p:cNvPr>
@@ -4544,7 +3656,7 @@
           <p:cNvPr id="5" name="Date Placeholder 4">
             <a:extLst>
               <a:ext uri="{FF2B5EF4-FFF2-40B4-BE49-F238E27FC236}">
-                <a16:creationId xmlns:a16="http://schemas.microsoft.com/office/drawing/2014/main" id="{F3569317-C034-A545-7CFE-B5AED8B493C3}"/>
+                <a16:creationId xmlns:a16="http://schemas.microsoft.com/office/drawing/2014/main" id="{A283C4F4-4EC6-BA35-6A63-9E22BA7DB0B1}"/>
               </a:ext>
             </a:extLst>
           </p:cNvPr>
@@ -4560,9 +3672,9 @@
           <a:bodyPr/>
           <a:lstStyle/>
           <a:p>
-            <a:fld id="{3F2082E8-73AE-0443-9211-048CA87033AA}" type="datetimeFigureOut">
+            <a:fld id="{35B24283-4C9C-384C-9A69-259DDC60D95C}" type="datetimeFigureOut">
               <a:rPr lang="en-US" smtClean="0"/>
-              <a:t>9/11/23</a:t>
+              <a:t>3/26/2026</a:t>
             </a:fld>
             <a:endParaRPr lang="en-US"/>
           </a:p>
@@ -4573,7 +3685,7 @@
           <p:cNvPr id="6" name="Footer Placeholder 5">
             <a:extLst>
               <a:ext uri="{FF2B5EF4-FFF2-40B4-BE49-F238E27FC236}">
-                <a16:creationId xmlns:a16="http://schemas.microsoft.com/office/drawing/2014/main" id="{1DD3CF8E-0FA8-D615-29F2-A7F8FE6E6C7B}"/>
+                <a16:creationId xmlns:a16="http://schemas.microsoft.com/office/drawing/2014/main" id="{A7887943-497B-A4D3-CA7A-122E311ADC9D}"/>
               </a:ext>
             </a:extLst>
           </p:cNvPr>
@@ -4598,7 +3710,7 @@
           <p:cNvPr id="7" name="Slide Number Placeholder 6">
             <a:extLst>
               <a:ext uri="{FF2B5EF4-FFF2-40B4-BE49-F238E27FC236}">
-                <a16:creationId xmlns:a16="http://schemas.microsoft.com/office/drawing/2014/main" id="{08011B68-4934-FDDA-8E21-7751222C555D}"/>
+                <a16:creationId xmlns:a16="http://schemas.microsoft.com/office/drawing/2014/main" id="{9E1263D5-750B-10E2-A772-F87DC6E489F5}"/>
               </a:ext>
             </a:extLst>
           </p:cNvPr>
@@ -4614,7 +3726,7 @@
           <a:bodyPr/>
           <a:lstStyle/>
           <a:p>
-            <a:fld id="{BC43744F-32DB-BD4B-B697-C0670FE089A5}" type="slidenum">
+            <a:fld id="{37587DFE-4FDB-D24C-BF31-EE770609F131}" type="slidenum">
               <a:rPr lang="en-US" smtClean="0"/>
               <a:t>‹#›</a:t>
             </a:fld>
@@ -4625,7 +3737,7 @@
     </p:spTree>
     <p:extLst>
       <p:ext uri="{BB962C8B-B14F-4D97-AF65-F5344CB8AC3E}">
-        <p14:creationId xmlns:p14="http://schemas.microsoft.com/office/powerpoint/2010/main" val="4267360594"/>
+        <p14:creationId xmlns:p14="http://schemas.microsoft.com/office/powerpoint/2010/main" val="3360140516"/>
       </p:ext>
     </p:extLst>
   </p:cSld>
@@ -4635,14 +3747,9 @@
 </p:sldLayout>
 </file>
 
-<file path=ppt/slideMasters/slideMaster1.xml><?xml version="1.0" encoding="utf-8"?>
-<p:sldMaster xmlns:a="http://schemas.openxmlformats.org/drawingml/2006/main" xmlns:r="http://schemas.openxmlformats.org/officeDocument/2006/relationships" xmlns:p="http://schemas.openxmlformats.org/presentationml/2006/main">
-  <p:cSld>
-    <p:bg>
-      <p:bgRef idx="1001">
-        <a:schemeClr val="bg1"/>
-      </p:bgRef>
-    </p:bg>
+<file path=ppt/slideLayouts/slideLayout9.xml><?xml version="1.0" encoding="utf-8"?>
+<p:sldLayout xmlns:a="http://schemas.openxmlformats.org/drawingml/2006/main" xmlns:r="http://schemas.openxmlformats.org/officeDocument/2006/relationships" xmlns:p="http://schemas.openxmlformats.org/presentationml/2006/main" type="picTx" preserve="1">
+  <p:cSld name="Picture with Caption">
     <p:spTree>
       <p:nvGrpSpPr>
         <p:cNvPr id="1" name=""/>
@@ -4659,10 +3766,10 @@
       </p:grpSpPr>
       <p:sp>
         <p:nvSpPr>
-          <p:cNvPr id="2" name="Title Placeholder 1">
-            <a:extLst>
-              <a:ext uri="{FF2B5EF4-FFF2-40B4-BE49-F238E27FC236}">
-                <a16:creationId xmlns:a16="http://schemas.microsoft.com/office/drawing/2014/main" id="{2A8B244E-D6DC-AC06-8731-12716794E0CC}"/>
+          <p:cNvPr id="2" name="Title 1">
+            <a:extLst>
+              <a:ext uri="{FF2B5EF4-FFF2-40B4-BE49-F238E27FC236}">
+                <a16:creationId xmlns:a16="http://schemas.microsoft.com/office/drawing/2014/main" id="{04E7F149-1518-FB8F-C977-0035F552F480}"/>
               </a:ext>
             </a:extLst>
           </p:cNvPr>
@@ -4675,21 +3782,20 @@
         </p:nvSpPr>
         <p:spPr>
           <a:xfrm>
-            <a:off x="838200" y="365125"/>
-            <a:ext cx="10515600" cy="1325563"/>
+            <a:off x="839788" y="457200"/>
+            <a:ext cx="3932237" cy="1600200"/>
           </a:xfrm>
-          <a:prstGeom prst="rect">
-            <a:avLst/>
-          </a:prstGeom>
         </p:spPr>
         <p:txBody>
-          <a:bodyPr vert="horz" lIns="91440" tIns="45720" rIns="91440" bIns="45720" rtlCol="0" anchor="ctr">
-            <a:normAutofit/>
-          </a:bodyPr>
-          <a:lstStyle/>
-          <a:p>
-            <a:r>
-              <a:rPr lang="en-US"/>
+          <a:bodyPr anchor="b"/>
+          <a:lstStyle>
+            <a:lvl1pPr>
+              <a:defRPr sz="3200"/>
+            </a:lvl1pPr>
+          </a:lstStyle>
+          <a:p>
+            <a:r>
+              <a:rPr lang="en-US" dirty="0"/>
               <a:t>Click to edit Master title style</a:t>
             </a:r>
           </a:p>
@@ -4697,34 +3803,136 @@
       </p:sp>
       <p:sp>
         <p:nvSpPr>
-          <p:cNvPr id="3" name="Text Placeholder 2">
-            <a:extLst>
-              <a:ext uri="{FF2B5EF4-FFF2-40B4-BE49-F238E27FC236}">
-                <a16:creationId xmlns:a16="http://schemas.microsoft.com/office/drawing/2014/main" id="{E45CBEDB-7E0B-1179-605A-A0459E83DB89}"/>
-              </a:ext>
-            </a:extLst>
-          </p:cNvPr>
-          <p:cNvSpPr>
-            <a:spLocks noGrp="1"/>
-          </p:cNvSpPr>
-          <p:nvPr>
-            <p:ph type="body" idx="1"/>
+          <p:cNvPr id="3" name="Picture Placeholder 2">
+            <a:extLst>
+              <a:ext uri="{FF2B5EF4-FFF2-40B4-BE49-F238E27FC236}">
+                <a16:creationId xmlns:a16="http://schemas.microsoft.com/office/drawing/2014/main" id="{8C558619-ADB3-BFD1-F76D-4B9629730DEC}"/>
+              </a:ext>
+            </a:extLst>
+          </p:cNvPr>
+          <p:cNvSpPr>
+            <a:spLocks noGrp="1"/>
+          </p:cNvSpPr>
+          <p:nvPr>
+            <p:ph type="pic" idx="1"/>
           </p:nvPr>
         </p:nvSpPr>
         <p:spPr>
           <a:xfrm>
-            <a:off x="838200" y="1825625"/>
-            <a:ext cx="10515600" cy="4351338"/>
+            <a:off x="5183188" y="987425"/>
+            <a:ext cx="6172200" cy="4873625"/>
           </a:xfrm>
-          <a:prstGeom prst="rect">
-            <a:avLst/>
-          </a:prstGeom>
         </p:spPr>
         <p:txBody>
-          <a:bodyPr vert="horz" lIns="91440" tIns="45720" rIns="91440" bIns="45720" rtlCol="0">
-            <a:normAutofit/>
-          </a:bodyPr>
-          <a:lstStyle/>
+          <a:bodyPr/>
+          <a:lstStyle>
+            <a:lvl1pPr marL="0" indent="0">
+              <a:buNone/>
+              <a:defRPr sz="3200"/>
+            </a:lvl1pPr>
+            <a:lvl2pPr marL="457200" indent="0">
+              <a:buNone/>
+              <a:defRPr sz="2800"/>
+            </a:lvl2pPr>
+            <a:lvl3pPr marL="914400" indent="0">
+              <a:buNone/>
+              <a:defRPr sz="2400"/>
+            </a:lvl3pPr>
+            <a:lvl4pPr marL="1371600" indent="0">
+              <a:buNone/>
+              <a:defRPr sz="2000"/>
+            </a:lvl4pPr>
+            <a:lvl5pPr marL="1828800" indent="0">
+              <a:buNone/>
+              <a:defRPr sz="2000"/>
+            </a:lvl5pPr>
+            <a:lvl6pPr marL="2286000" indent="0">
+              <a:buNone/>
+              <a:defRPr sz="2000"/>
+            </a:lvl6pPr>
+            <a:lvl7pPr marL="2743200" indent="0">
+              <a:buNone/>
+              <a:defRPr sz="2000"/>
+            </a:lvl7pPr>
+            <a:lvl8pPr marL="3200400" indent="0">
+              <a:buNone/>
+              <a:defRPr sz="2000"/>
+            </a:lvl8pPr>
+            <a:lvl9pPr marL="3657600" indent="0">
+              <a:buNone/>
+              <a:defRPr sz="2000"/>
+            </a:lvl9pPr>
+          </a:lstStyle>
+          <a:p>
+            <a:r>
+              <a:rPr lang="en-US"/>
+              <a:t>Click icon to add picture</a:t>
+            </a:r>
+          </a:p>
+        </p:txBody>
+      </p:sp>
+      <p:sp>
+        <p:nvSpPr>
+          <p:cNvPr id="4" name="Text Placeholder 3">
+            <a:extLst>
+              <a:ext uri="{FF2B5EF4-FFF2-40B4-BE49-F238E27FC236}">
+                <a16:creationId xmlns:a16="http://schemas.microsoft.com/office/drawing/2014/main" id="{36C3AA6D-9909-E025-E0F3-EF99C11195D1}"/>
+              </a:ext>
+            </a:extLst>
+          </p:cNvPr>
+          <p:cNvSpPr>
+            <a:spLocks noGrp="1"/>
+          </p:cNvSpPr>
+          <p:nvPr>
+            <p:ph type="body" sz="half" idx="2"/>
+          </p:nvPr>
+        </p:nvSpPr>
+        <p:spPr>
+          <a:xfrm>
+            <a:off x="839788" y="2057400"/>
+            <a:ext cx="3932237" cy="3811588"/>
+          </a:xfrm>
+        </p:spPr>
+        <p:txBody>
+          <a:bodyPr/>
+          <a:lstStyle>
+            <a:lvl1pPr marL="0" indent="0">
+              <a:buNone/>
+              <a:defRPr sz="1600"/>
+            </a:lvl1pPr>
+            <a:lvl2pPr marL="457200" indent="0">
+              <a:buNone/>
+              <a:defRPr sz="1400"/>
+            </a:lvl2pPr>
+            <a:lvl3pPr marL="914400" indent="0">
+              <a:buNone/>
+              <a:defRPr sz="1200"/>
+            </a:lvl3pPr>
+            <a:lvl4pPr marL="1371600" indent="0">
+              <a:buNone/>
+              <a:defRPr sz="1000"/>
+            </a:lvl4pPr>
+            <a:lvl5pPr marL="1828800" indent="0">
+              <a:buNone/>
+              <a:defRPr sz="1000"/>
+            </a:lvl5pPr>
+            <a:lvl6pPr marL="2286000" indent="0">
+              <a:buNone/>
+              <a:defRPr sz="1000"/>
+            </a:lvl6pPr>
+            <a:lvl7pPr marL="2743200" indent="0">
+              <a:buNone/>
+              <a:defRPr sz="1000"/>
+            </a:lvl7pPr>
+            <a:lvl8pPr marL="3200400" indent="0">
+              <a:buNone/>
+              <a:defRPr sz="1000"/>
+            </a:lvl8pPr>
+            <a:lvl9pPr marL="3657600" indent="0">
+              <a:buNone/>
+              <a:defRPr sz="1000"/>
+            </a:lvl9pPr>
+          </a:lstStyle>
           <a:p>
             <a:pPr lvl="0"/>
             <a:r>
@@ -4732,80 +3940,32 @@
               <a:t>Click to edit Master text styles</a:t>
             </a:r>
           </a:p>
-          <a:p>
-            <a:pPr lvl="1"/>
-            <a:r>
-              <a:rPr lang="en-US"/>
-              <a:t>Second level</a:t>
-            </a:r>
-          </a:p>
-          <a:p>
-            <a:pPr lvl="2"/>
-            <a:r>
-              <a:rPr lang="en-US"/>
-              <a:t>Third level</a:t>
-            </a:r>
-          </a:p>
-          <a:p>
-            <a:pPr lvl="3"/>
-            <a:r>
-              <a:rPr lang="en-US"/>
-              <a:t>Fourth level</a:t>
-            </a:r>
-          </a:p>
-          <a:p>
-            <a:pPr lvl="4"/>
-            <a:r>
-              <a:rPr lang="en-US"/>
-              <a:t>Fifth level</a:t>
-            </a:r>
-          </a:p>
-        </p:txBody>
-      </p:sp>
-      <p:sp>
-        <p:nvSpPr>
-          <p:cNvPr id="4" name="Date Placeholder 3">
-            <a:extLst>
-              <a:ext uri="{FF2B5EF4-FFF2-40B4-BE49-F238E27FC236}">
-                <a16:creationId xmlns:a16="http://schemas.microsoft.com/office/drawing/2014/main" id="{E5A6065F-BDDE-A678-9BD9-7172382CBBF7}"/>
-              </a:ext>
-            </a:extLst>
-          </p:cNvPr>
-          <p:cNvSpPr>
-            <a:spLocks noGrp="1"/>
-          </p:cNvSpPr>
-          <p:nvPr>
-            <p:ph type="dt" sz="half" idx="2"/>
-          </p:nvPr>
-        </p:nvSpPr>
-        <p:spPr>
-          <a:xfrm>
-            <a:off x="838200" y="6356350"/>
-            <a:ext cx="2743200" cy="365125"/>
-          </a:xfrm>
-          <a:prstGeom prst="rect">
-            <a:avLst/>
-          </a:prstGeom>
-        </p:spPr>
-        <p:txBody>
-          <a:bodyPr vert="horz" lIns="91440" tIns="45720" rIns="91440" bIns="45720" rtlCol="0" anchor="ctr"/>
-          <a:lstStyle>
-            <a:lvl1pPr algn="l">
-              <a:defRPr sz="1200">
-                <a:solidFill>
-                  <a:schemeClr val="tx1">
-                    <a:tint val="75000"/>
-                  </a:schemeClr>
-                </a:solidFill>
-                <a:latin typeface="Karla" panose="020B0004030503030003" pitchFamily="34" charset="77"/>
-              </a:defRPr>
-            </a:lvl1pPr>
-          </a:lstStyle>
-          <a:p>
-            <a:fld id="{3F2082E8-73AE-0443-9211-048CA87033AA}" type="datetimeFigureOut">
+        </p:txBody>
+      </p:sp>
+      <p:sp>
+        <p:nvSpPr>
+          <p:cNvPr id="5" name="Date Placeholder 4">
+            <a:extLst>
+              <a:ext uri="{FF2B5EF4-FFF2-40B4-BE49-F238E27FC236}">
+                <a16:creationId xmlns:a16="http://schemas.microsoft.com/office/drawing/2014/main" id="{18712D33-CA25-A92F-127B-A864A73C2440}"/>
+              </a:ext>
+            </a:extLst>
+          </p:cNvPr>
+          <p:cNvSpPr>
+            <a:spLocks noGrp="1"/>
+          </p:cNvSpPr>
+          <p:nvPr>
+            <p:ph type="dt" sz="half" idx="10"/>
+          </p:nvPr>
+        </p:nvSpPr>
+        <p:spPr/>
+        <p:txBody>
+          <a:bodyPr/>
+          <a:lstStyle/>
+          <a:p>
+            <a:fld id="{35B24283-4C9C-384C-9A69-259DDC60D95C}" type="datetimeFigureOut">
               <a:rPr lang="en-US" smtClean="0"/>
-              <a:pPr/>
-              <a:t>9/11/23</a:t>
+              <a:t>3/26/2026</a:t>
             </a:fld>
             <a:endParaRPr lang="en-US"/>
           </a:p>
@@ -4813,43 +3973,24 @@
       </p:sp>
       <p:sp>
         <p:nvSpPr>
-          <p:cNvPr id="5" name="Footer Placeholder 4">
-            <a:extLst>
-              <a:ext uri="{FF2B5EF4-FFF2-40B4-BE49-F238E27FC236}">
-                <a16:creationId xmlns:a16="http://schemas.microsoft.com/office/drawing/2014/main" id="{1184C7BD-39DD-AC35-2B56-48C2E0B85E59}"/>
-              </a:ext>
-            </a:extLst>
-          </p:cNvPr>
-          <p:cNvSpPr>
-            <a:spLocks noGrp="1"/>
-          </p:cNvSpPr>
-          <p:nvPr>
-            <p:ph type="ftr" sz="quarter" idx="3"/>
-          </p:nvPr>
-        </p:nvSpPr>
-        <p:spPr>
-          <a:xfrm>
-            <a:off x="4038600" y="6356350"/>
-            <a:ext cx="4114800" cy="365125"/>
-          </a:xfrm>
-          <a:prstGeom prst="rect">
-            <a:avLst/>
-          </a:prstGeom>
-        </p:spPr>
-        <p:txBody>
-          <a:bodyPr vert="horz" lIns="91440" tIns="45720" rIns="91440" bIns="45720" rtlCol="0" anchor="ctr"/>
-          <a:lstStyle>
-            <a:lvl1pPr algn="ctr">
-              <a:defRPr sz="1200">
-                <a:solidFill>
-                  <a:schemeClr val="tx1">
-                    <a:tint val="75000"/>
-                  </a:schemeClr>
-                </a:solidFill>
-                <a:latin typeface="Karla" panose="020B0004030503030003" pitchFamily="34" charset="77"/>
-              </a:defRPr>
-            </a:lvl1pPr>
-          </a:lstStyle>
+          <p:cNvPr id="6" name="Footer Placeholder 5">
+            <a:extLst>
+              <a:ext uri="{FF2B5EF4-FFF2-40B4-BE49-F238E27FC236}">
+                <a16:creationId xmlns:a16="http://schemas.microsoft.com/office/drawing/2014/main" id="{96DDB349-3FE1-AEA8-22DF-E39DD90DA0BD}"/>
+              </a:ext>
+            </a:extLst>
+          </p:cNvPr>
+          <p:cNvSpPr>
+            <a:spLocks noGrp="1"/>
+          </p:cNvSpPr>
+          <p:nvPr>
+            <p:ph type="ftr" sz="quarter" idx="11"/>
+          </p:nvPr>
+        </p:nvSpPr>
+        <p:spPr/>
+        <p:txBody>
+          <a:bodyPr/>
+          <a:lstStyle/>
           <a:p>
             <a:endParaRPr lang="en-US"/>
           </a:p>
@@ -4857,47 +3998,27 @@
       </p:sp>
       <p:sp>
         <p:nvSpPr>
-          <p:cNvPr id="6" name="Slide Number Placeholder 5">
-            <a:extLst>
-              <a:ext uri="{FF2B5EF4-FFF2-40B4-BE49-F238E27FC236}">
-                <a16:creationId xmlns:a16="http://schemas.microsoft.com/office/drawing/2014/main" id="{607E4D4F-8FE6-B9A3-1901-67F06AF7B179}"/>
-              </a:ext>
-            </a:extLst>
-          </p:cNvPr>
-          <p:cNvSpPr>
-            <a:spLocks noGrp="1"/>
-          </p:cNvSpPr>
-          <p:nvPr>
-            <p:ph type="sldNum" sz="quarter" idx="4"/>
-          </p:nvPr>
-        </p:nvSpPr>
-        <p:spPr>
-          <a:xfrm>
-            <a:off x="8610600" y="6356350"/>
-            <a:ext cx="2743200" cy="365125"/>
-          </a:xfrm>
-          <a:prstGeom prst="rect">
-            <a:avLst/>
-          </a:prstGeom>
-        </p:spPr>
-        <p:txBody>
-          <a:bodyPr vert="horz" lIns="91440" tIns="45720" rIns="91440" bIns="45720" rtlCol="0" anchor="ctr"/>
-          <a:lstStyle>
-            <a:lvl1pPr algn="r">
-              <a:defRPr sz="1200">
-                <a:solidFill>
-                  <a:schemeClr val="tx1">
-                    <a:tint val="75000"/>
-                  </a:schemeClr>
-                </a:solidFill>
-                <a:latin typeface="Karla" panose="020B0004030503030003" pitchFamily="34" charset="77"/>
-              </a:defRPr>
-            </a:lvl1pPr>
-          </a:lstStyle>
-          <a:p>
-            <a:fld id="{BC43744F-32DB-BD4B-B697-C0670FE089A5}" type="slidenum">
+          <p:cNvPr id="7" name="Slide Number Placeholder 6">
+            <a:extLst>
+              <a:ext uri="{FF2B5EF4-FFF2-40B4-BE49-F238E27FC236}">
+                <a16:creationId xmlns:a16="http://schemas.microsoft.com/office/drawing/2014/main" id="{154520DE-E8CE-DBDE-4994-4473BA5F5E18}"/>
+              </a:ext>
+            </a:extLst>
+          </p:cNvPr>
+          <p:cNvSpPr>
+            <a:spLocks noGrp="1"/>
+          </p:cNvSpPr>
+          <p:nvPr>
+            <p:ph type="sldNum" sz="quarter" idx="12"/>
+          </p:nvPr>
+        </p:nvSpPr>
+        <p:spPr/>
+        <p:txBody>
+          <a:bodyPr/>
+          <a:lstStyle/>
+          <a:p>
+            <a:fld id="{37587DFE-4FDB-D24C-BF31-EE770609F131}" type="slidenum">
               <a:rPr lang="en-US" smtClean="0"/>
-              <a:pPr/>
               <a:t>‹#›</a:t>
             </a:fld>
             <a:endParaRPr lang="en-US"/>
@@ -4907,309 +4028,17 @@
     </p:spTree>
     <p:extLst>
       <p:ext uri="{BB962C8B-B14F-4D97-AF65-F5344CB8AC3E}">
-        <p14:creationId xmlns:p14="http://schemas.microsoft.com/office/powerpoint/2010/main" val="983183760"/>
+        <p14:creationId xmlns:p14="http://schemas.microsoft.com/office/powerpoint/2010/main" val="2696116981"/>
       </p:ext>
     </p:extLst>
   </p:cSld>
-  <p:clrMap bg1="lt1" tx1="dk1" bg2="lt2" tx2="dk2" accent1="accent1" accent2="accent2" accent3="accent3" accent4="accent4" accent5="accent5" accent6="accent6" hlink="hlink" folHlink="folHlink"/>
-  <p:sldLayoutIdLst>
-    <p:sldLayoutId id="2147483661" r:id="rId1"/>
-    <p:sldLayoutId id="2147483649" r:id="rId2"/>
-    <p:sldLayoutId id="2147483650" r:id="rId3"/>
-    <p:sldLayoutId id="2147483651" r:id="rId4"/>
-    <p:sldLayoutId id="2147483652" r:id="rId5"/>
-    <p:sldLayoutId id="2147483653" r:id="rId6"/>
-    <p:sldLayoutId id="2147483654" r:id="rId7"/>
-    <p:sldLayoutId id="2147483655" r:id="rId8"/>
-    <p:sldLayoutId id="2147483656" r:id="rId9"/>
-    <p:sldLayoutId id="2147483657" r:id="rId10"/>
-    <p:sldLayoutId id="2147483658" r:id="rId11"/>
-    <p:sldLayoutId id="2147483659" r:id="rId12"/>
-  </p:sldLayoutIdLst>
-  <p:txStyles>
-    <p:titleStyle>
-      <a:lvl1pPr algn="l" defTabSz="914400" rtl="0" eaLnBrk="1" latinLnBrk="0" hangingPunct="1">
-        <a:lnSpc>
-          <a:spcPct val="90000"/>
-        </a:lnSpc>
-        <a:spcBef>
-          <a:spcPct val="0"/>
-        </a:spcBef>
-        <a:buNone/>
-        <a:defRPr sz="4400" kern="1200">
-          <a:solidFill>
-            <a:schemeClr val="tx1"/>
-          </a:solidFill>
-          <a:latin typeface="Karla" panose="020B0004030503030003" pitchFamily="34" charset="77"/>
-          <a:ea typeface="+mj-ea"/>
-          <a:cs typeface="+mj-cs"/>
-        </a:defRPr>
-      </a:lvl1pPr>
-    </p:titleStyle>
-    <p:bodyStyle>
-      <a:lvl1pPr marL="228600" indent="-228600" algn="l" defTabSz="914400" rtl="0" eaLnBrk="1" latinLnBrk="0" hangingPunct="1">
-        <a:lnSpc>
-          <a:spcPct val="90000"/>
-        </a:lnSpc>
-        <a:spcBef>
-          <a:spcPts val="1000"/>
-        </a:spcBef>
-        <a:buFont typeface="Arial" panose="020B0604020202020204" pitchFamily="34" charset="0"/>
-        <a:buChar char="•"/>
-        <a:defRPr sz="2800" kern="1200">
-          <a:solidFill>
-            <a:schemeClr val="tx1"/>
-          </a:solidFill>
-          <a:latin typeface="Karla" panose="020B0004030503030003" pitchFamily="34" charset="77"/>
-          <a:ea typeface="+mn-ea"/>
-          <a:cs typeface="+mn-cs"/>
-        </a:defRPr>
-      </a:lvl1pPr>
-      <a:lvl2pPr marL="685800" indent="-228600" algn="l" defTabSz="914400" rtl="0" eaLnBrk="1" latinLnBrk="0" hangingPunct="1">
-        <a:lnSpc>
-          <a:spcPct val="90000"/>
-        </a:lnSpc>
-        <a:spcBef>
-          <a:spcPts val="500"/>
-        </a:spcBef>
-        <a:buFont typeface="Arial" panose="020B0604020202020204" pitchFamily="34" charset="0"/>
-        <a:buChar char="•"/>
-        <a:defRPr sz="2400" kern="1200">
-          <a:solidFill>
-            <a:schemeClr val="tx1"/>
-          </a:solidFill>
-          <a:latin typeface="Karla" panose="020B0004030503030003" pitchFamily="34" charset="77"/>
-          <a:ea typeface="+mn-ea"/>
-          <a:cs typeface="+mn-cs"/>
-        </a:defRPr>
-      </a:lvl2pPr>
-      <a:lvl3pPr marL="1143000" indent="-228600" algn="l" defTabSz="914400" rtl="0" eaLnBrk="1" latinLnBrk="0" hangingPunct="1">
-        <a:lnSpc>
-          <a:spcPct val="90000"/>
-        </a:lnSpc>
-        <a:spcBef>
-          <a:spcPts val="500"/>
-        </a:spcBef>
-        <a:buFont typeface="Arial" panose="020B0604020202020204" pitchFamily="34" charset="0"/>
-        <a:buChar char="•"/>
-        <a:defRPr sz="2000" kern="1200">
-          <a:solidFill>
-            <a:schemeClr val="tx1"/>
-          </a:solidFill>
-          <a:latin typeface="Karla" panose="020B0004030503030003" pitchFamily="34" charset="77"/>
-          <a:ea typeface="+mn-ea"/>
-          <a:cs typeface="+mn-cs"/>
-        </a:defRPr>
-      </a:lvl3pPr>
-      <a:lvl4pPr marL="1600200" indent="-228600" algn="l" defTabSz="914400" rtl="0" eaLnBrk="1" latinLnBrk="0" hangingPunct="1">
-        <a:lnSpc>
-          <a:spcPct val="90000"/>
-        </a:lnSpc>
-        <a:spcBef>
-          <a:spcPts val="500"/>
-        </a:spcBef>
-        <a:buFont typeface="Arial" panose="020B0604020202020204" pitchFamily="34" charset="0"/>
-        <a:buChar char="•"/>
-        <a:defRPr sz="1800" kern="1200">
-          <a:solidFill>
-            <a:schemeClr val="tx1"/>
-          </a:solidFill>
-          <a:latin typeface="Karla" panose="020B0004030503030003" pitchFamily="34" charset="77"/>
-          <a:ea typeface="+mn-ea"/>
-          <a:cs typeface="+mn-cs"/>
-        </a:defRPr>
-      </a:lvl4pPr>
-      <a:lvl5pPr marL="2057400" indent="-228600" algn="l" defTabSz="914400" rtl="0" eaLnBrk="1" latinLnBrk="0" hangingPunct="1">
-        <a:lnSpc>
-          <a:spcPct val="90000"/>
-        </a:lnSpc>
-        <a:spcBef>
-          <a:spcPts val="500"/>
-        </a:spcBef>
-        <a:buFont typeface="Arial" panose="020B0604020202020204" pitchFamily="34" charset="0"/>
-        <a:buChar char="•"/>
-        <a:defRPr sz="1800" kern="1200">
-          <a:solidFill>
-            <a:schemeClr val="tx1"/>
-          </a:solidFill>
-          <a:latin typeface="Karla" panose="020B0004030503030003" pitchFamily="34" charset="77"/>
-          <a:ea typeface="+mn-ea"/>
-          <a:cs typeface="+mn-cs"/>
-        </a:defRPr>
-      </a:lvl5pPr>
-      <a:lvl6pPr marL="2514600" indent="-228600" algn="l" defTabSz="914400" rtl="0" eaLnBrk="1" latinLnBrk="0" hangingPunct="1">
-        <a:lnSpc>
-          <a:spcPct val="90000"/>
-        </a:lnSpc>
-        <a:spcBef>
-          <a:spcPts val="500"/>
-        </a:spcBef>
-        <a:buFont typeface="Arial" panose="020B0604020202020204" pitchFamily="34" charset="0"/>
-        <a:buChar char="•"/>
-        <a:defRPr sz="1800" kern="1200">
-          <a:solidFill>
-            <a:schemeClr val="tx1"/>
-          </a:solidFill>
-          <a:latin typeface="+mn-lt"/>
-          <a:ea typeface="+mn-ea"/>
-          <a:cs typeface="+mn-cs"/>
-        </a:defRPr>
-      </a:lvl6pPr>
-      <a:lvl7pPr marL="2971800" indent="-228600" algn="l" defTabSz="914400" rtl="0" eaLnBrk="1" latinLnBrk="0" hangingPunct="1">
-        <a:lnSpc>
-          <a:spcPct val="90000"/>
-        </a:lnSpc>
-        <a:spcBef>
-          <a:spcPts val="500"/>
-        </a:spcBef>
-        <a:buFont typeface="Arial" panose="020B0604020202020204" pitchFamily="34" charset="0"/>
-        <a:buChar char="•"/>
-        <a:defRPr sz="1800" kern="1200">
-          <a:solidFill>
-            <a:schemeClr val="tx1"/>
-          </a:solidFill>
-          <a:latin typeface="+mn-lt"/>
-          <a:ea typeface="+mn-ea"/>
-          <a:cs typeface="+mn-cs"/>
-        </a:defRPr>
-      </a:lvl7pPr>
-      <a:lvl8pPr marL="3429000" indent="-228600" algn="l" defTabSz="914400" rtl="0" eaLnBrk="1" latinLnBrk="0" hangingPunct="1">
-        <a:lnSpc>
-          <a:spcPct val="90000"/>
-        </a:lnSpc>
-        <a:spcBef>
-          <a:spcPts val="500"/>
-        </a:spcBef>
-        <a:buFont typeface="Arial" panose="020B0604020202020204" pitchFamily="34" charset="0"/>
-        <a:buChar char="•"/>
-        <a:defRPr sz="1800" kern="1200">
-          <a:solidFill>
-            <a:schemeClr val="tx1"/>
-          </a:solidFill>
-          <a:latin typeface="+mn-lt"/>
-          <a:ea typeface="+mn-ea"/>
-          <a:cs typeface="+mn-cs"/>
-        </a:defRPr>
-      </a:lvl8pPr>
-      <a:lvl9pPr marL="3886200" indent="-228600" algn="l" defTabSz="914400" rtl="0" eaLnBrk="1" latinLnBrk="0" hangingPunct="1">
-        <a:lnSpc>
-          <a:spcPct val="90000"/>
-        </a:lnSpc>
-        <a:spcBef>
-          <a:spcPts val="500"/>
-        </a:spcBef>
-        <a:buFont typeface="Arial" panose="020B0604020202020204" pitchFamily="34" charset="0"/>
-        <a:buChar char="•"/>
-        <a:defRPr sz="1800" kern="1200">
-          <a:solidFill>
-            <a:schemeClr val="tx1"/>
-          </a:solidFill>
-          <a:latin typeface="+mn-lt"/>
-          <a:ea typeface="+mn-ea"/>
-          <a:cs typeface="+mn-cs"/>
-        </a:defRPr>
-      </a:lvl9pPr>
-    </p:bodyStyle>
-    <p:otherStyle>
-      <a:defPPr>
-        <a:defRPr lang="en-US"/>
-      </a:defPPr>
-      <a:lvl1pPr marL="0" algn="l" defTabSz="914400" rtl="0" eaLnBrk="1" latinLnBrk="0" hangingPunct="1">
-        <a:defRPr sz="1800" kern="1200">
-          <a:solidFill>
-            <a:schemeClr val="tx1"/>
-          </a:solidFill>
-          <a:latin typeface="+mn-lt"/>
-          <a:ea typeface="+mn-ea"/>
-          <a:cs typeface="+mn-cs"/>
-        </a:defRPr>
-      </a:lvl1pPr>
-      <a:lvl2pPr marL="457200" algn="l" defTabSz="914400" rtl="0" eaLnBrk="1" latinLnBrk="0" hangingPunct="1">
-        <a:defRPr sz="1800" kern="1200">
-          <a:solidFill>
-            <a:schemeClr val="tx1"/>
-          </a:solidFill>
-          <a:latin typeface="+mn-lt"/>
-          <a:ea typeface="+mn-ea"/>
-          <a:cs typeface="+mn-cs"/>
-        </a:defRPr>
-      </a:lvl2pPr>
-      <a:lvl3pPr marL="914400" algn="l" defTabSz="914400" rtl="0" eaLnBrk="1" latinLnBrk="0" hangingPunct="1">
-        <a:defRPr sz="1800" kern="1200">
-          <a:solidFill>
-            <a:schemeClr val="tx1"/>
-          </a:solidFill>
-          <a:latin typeface="+mn-lt"/>
-          <a:ea typeface="+mn-ea"/>
-          <a:cs typeface="+mn-cs"/>
-        </a:defRPr>
-      </a:lvl3pPr>
-      <a:lvl4pPr marL="1371600" algn="l" defTabSz="914400" rtl="0" eaLnBrk="1" latinLnBrk="0" hangingPunct="1">
-        <a:defRPr sz="1800" kern="1200">
-          <a:solidFill>
-            <a:schemeClr val="tx1"/>
-          </a:solidFill>
-          <a:latin typeface="+mn-lt"/>
-          <a:ea typeface="+mn-ea"/>
-          <a:cs typeface="+mn-cs"/>
-        </a:defRPr>
-      </a:lvl4pPr>
-      <a:lvl5pPr marL="1828800" algn="l" defTabSz="914400" rtl="0" eaLnBrk="1" latinLnBrk="0" hangingPunct="1">
-        <a:defRPr sz="1800" kern="1200">
-          <a:solidFill>
-            <a:schemeClr val="tx1"/>
-          </a:solidFill>
-          <a:latin typeface="+mn-lt"/>
-          <a:ea typeface="+mn-ea"/>
-          <a:cs typeface="+mn-cs"/>
-        </a:defRPr>
-      </a:lvl5pPr>
-      <a:lvl6pPr marL="2286000" algn="l" defTabSz="914400" rtl="0" eaLnBrk="1" latinLnBrk="0" hangingPunct="1">
-        <a:defRPr sz="1800" kern="1200">
-          <a:solidFill>
-            <a:schemeClr val="tx1"/>
-          </a:solidFill>
-          <a:latin typeface="+mn-lt"/>
-          <a:ea typeface="+mn-ea"/>
-          <a:cs typeface="+mn-cs"/>
-        </a:defRPr>
-      </a:lvl6pPr>
-      <a:lvl7pPr marL="2743200" algn="l" defTabSz="914400" rtl="0" eaLnBrk="1" latinLnBrk="0" hangingPunct="1">
-        <a:defRPr sz="1800" kern="1200">
-          <a:solidFill>
-            <a:schemeClr val="tx1"/>
-          </a:solidFill>
-          <a:latin typeface="+mn-lt"/>
-          <a:ea typeface="+mn-ea"/>
-          <a:cs typeface="+mn-cs"/>
-        </a:defRPr>
-      </a:lvl7pPr>
-      <a:lvl8pPr marL="3200400" algn="l" defTabSz="914400" rtl="0" eaLnBrk="1" latinLnBrk="0" hangingPunct="1">
-        <a:defRPr sz="1800" kern="1200">
-          <a:solidFill>
-            <a:schemeClr val="tx1"/>
-          </a:solidFill>
-          <a:latin typeface="+mn-lt"/>
-          <a:ea typeface="+mn-ea"/>
-          <a:cs typeface="+mn-cs"/>
-        </a:defRPr>
-      </a:lvl8pPr>
-      <a:lvl9pPr marL="3657600" algn="l" defTabSz="914400" rtl="0" eaLnBrk="1" latinLnBrk="0" hangingPunct="1">
-        <a:defRPr sz="1800" kern="1200">
-          <a:solidFill>
-            <a:schemeClr val="tx1"/>
-          </a:solidFill>
-          <a:latin typeface="+mn-lt"/>
-          <a:ea typeface="+mn-ea"/>
-          <a:cs typeface="+mn-cs"/>
-        </a:defRPr>
-      </a:lvl9pPr>
-    </p:otherStyle>
-  </p:txStyles>
-</p:sldMaster>
+  <p:clrMapOvr>
+    <a:masterClrMapping/>
+  </p:clrMapOvr>
+</p:sldLayout>
 </file>
 
-<file path=ppt/slideMasters/slideMaster2.xml><?xml version="1.0" encoding="utf-8"?>
+<file path=ppt/slideMasters/slideMaster1.xml><?xml version="1.0" encoding="utf-8"?>
 <p:sldMaster xmlns:a="http://schemas.openxmlformats.org/drawingml/2006/main" xmlns:r="http://schemas.openxmlformats.org/officeDocument/2006/relationships" xmlns:p="http://schemas.openxmlformats.org/presentationml/2006/main" preserve="1">
   <p:cSld>
     <p:bg>
@@ -5315,7 +4144,7 @@
           <a:lstStyle/>
           <a:p>
             <a:r>
-              <a:rPr lang="en-US"/>
+              <a:rPr lang="en-US" dirty="0"/>
               <a:t>Click to edit Master title style</a:t>
             </a:r>
           </a:p>
@@ -5354,35 +4183,35 @@
           <a:p>
             <a:pPr lvl="0"/>
             <a:r>
-              <a:rPr lang="en-US"/>
+              <a:rPr lang="en-US" dirty="0"/>
               <a:t>Click to edit Master text styles</a:t>
             </a:r>
           </a:p>
           <a:p>
             <a:pPr lvl="1"/>
             <a:r>
-              <a:rPr lang="en-US"/>
+              <a:rPr lang="en-US" dirty="0"/>
               <a:t>Second level</a:t>
             </a:r>
           </a:p>
           <a:p>
             <a:pPr lvl="2"/>
             <a:r>
-              <a:rPr lang="en-US"/>
+              <a:rPr lang="en-US" dirty="0"/>
               <a:t>Third level</a:t>
             </a:r>
           </a:p>
           <a:p>
             <a:pPr lvl="3"/>
             <a:r>
-              <a:rPr lang="en-US"/>
+              <a:rPr lang="en-US" dirty="0"/>
               <a:t>Fourth level</a:t>
             </a:r>
           </a:p>
           <a:p>
             <a:pPr lvl="4"/>
             <a:r>
-              <a:rPr lang="en-US"/>
+              <a:rPr lang="en-US" dirty="0"/>
               <a:t>Fifth level</a:t>
             </a:r>
           </a:p>
@@ -5698,6 +4527,635 @@
 </p:sldMaster>
 </file>
 
+<file path=ppt/slideMasters/slideMaster2.xml><?xml version="1.0" encoding="utf-8"?>
+<p:sldMaster xmlns:a="http://schemas.openxmlformats.org/drawingml/2006/main" xmlns:r="http://schemas.openxmlformats.org/officeDocument/2006/relationships" xmlns:p="http://schemas.openxmlformats.org/presentationml/2006/main">
+  <p:cSld>
+    <p:bg>
+      <p:bgRef idx="1001">
+        <a:schemeClr val="bg1"/>
+      </p:bgRef>
+    </p:bg>
+    <p:spTree>
+      <p:nvGrpSpPr>
+        <p:cNvPr id="1" name=""/>
+        <p:cNvGrpSpPr/>
+        <p:nvPr/>
+      </p:nvGrpSpPr>
+      <p:grpSpPr>
+        <a:xfrm>
+          <a:off x="0" y="0"/>
+          <a:ext cx="0" cy="0"/>
+          <a:chOff x="0" y="0"/>
+          <a:chExt cx="0" cy="0"/>
+        </a:xfrm>
+      </p:grpSpPr>
+      <p:sp>
+        <p:nvSpPr>
+          <p:cNvPr id="2" name="Title Placeholder 1">
+            <a:extLst>
+              <a:ext uri="{FF2B5EF4-FFF2-40B4-BE49-F238E27FC236}">
+                <a16:creationId xmlns:a16="http://schemas.microsoft.com/office/drawing/2014/main" id="{30E36257-67FC-87FA-3C1B-6CE75ED83BA2}"/>
+              </a:ext>
+            </a:extLst>
+          </p:cNvPr>
+          <p:cNvSpPr>
+            <a:spLocks noGrp="1"/>
+          </p:cNvSpPr>
+          <p:nvPr>
+            <p:ph type="title"/>
+          </p:nvPr>
+        </p:nvSpPr>
+        <p:spPr>
+          <a:xfrm>
+            <a:off x="838200" y="365125"/>
+            <a:ext cx="10515600" cy="1325563"/>
+          </a:xfrm>
+          <a:prstGeom prst="rect">
+            <a:avLst/>
+          </a:prstGeom>
+        </p:spPr>
+        <p:txBody>
+          <a:bodyPr vert="horz" lIns="91440" tIns="45720" rIns="91440" bIns="45720" rtlCol="0" anchor="ctr">
+            <a:normAutofit/>
+          </a:bodyPr>
+          <a:lstStyle/>
+          <a:p>
+            <a:r>
+              <a:rPr lang="en-US"/>
+              <a:t>Click to edit Master title style</a:t>
+            </a:r>
+          </a:p>
+        </p:txBody>
+      </p:sp>
+      <p:sp>
+        <p:nvSpPr>
+          <p:cNvPr id="3" name="Text Placeholder 2">
+            <a:extLst>
+              <a:ext uri="{FF2B5EF4-FFF2-40B4-BE49-F238E27FC236}">
+                <a16:creationId xmlns:a16="http://schemas.microsoft.com/office/drawing/2014/main" id="{3C8D7139-CDDB-0909-13EC-021C64634165}"/>
+              </a:ext>
+            </a:extLst>
+          </p:cNvPr>
+          <p:cNvSpPr>
+            <a:spLocks noGrp="1"/>
+          </p:cNvSpPr>
+          <p:nvPr>
+            <p:ph type="body" idx="1"/>
+          </p:nvPr>
+        </p:nvSpPr>
+        <p:spPr>
+          <a:xfrm>
+            <a:off x="838200" y="1825625"/>
+            <a:ext cx="10515600" cy="4351338"/>
+          </a:xfrm>
+          <a:prstGeom prst="rect">
+            <a:avLst/>
+          </a:prstGeom>
+        </p:spPr>
+        <p:txBody>
+          <a:bodyPr vert="horz" lIns="91440" tIns="45720" rIns="91440" bIns="45720" rtlCol="0">
+            <a:normAutofit/>
+          </a:bodyPr>
+          <a:lstStyle/>
+          <a:p>
+            <a:pPr lvl="0"/>
+            <a:r>
+              <a:rPr lang="en-US"/>
+              <a:t>Click to edit Master text styles</a:t>
+            </a:r>
+          </a:p>
+          <a:p>
+            <a:pPr lvl="1"/>
+            <a:r>
+              <a:rPr lang="en-US"/>
+              <a:t>Second level</a:t>
+            </a:r>
+          </a:p>
+          <a:p>
+            <a:pPr lvl="2"/>
+            <a:r>
+              <a:rPr lang="en-US"/>
+              <a:t>Third level</a:t>
+            </a:r>
+          </a:p>
+          <a:p>
+            <a:pPr lvl="3"/>
+            <a:r>
+              <a:rPr lang="en-US"/>
+              <a:t>Fourth level</a:t>
+            </a:r>
+          </a:p>
+          <a:p>
+            <a:pPr lvl="4"/>
+            <a:r>
+              <a:rPr lang="en-US"/>
+              <a:t>Fifth level</a:t>
+            </a:r>
+          </a:p>
+        </p:txBody>
+      </p:sp>
+      <p:sp>
+        <p:nvSpPr>
+          <p:cNvPr id="4" name="Date Placeholder 3">
+            <a:extLst>
+              <a:ext uri="{FF2B5EF4-FFF2-40B4-BE49-F238E27FC236}">
+                <a16:creationId xmlns:a16="http://schemas.microsoft.com/office/drawing/2014/main" id="{B28732F6-288C-17EB-4815-AE9E8D27B947}"/>
+              </a:ext>
+            </a:extLst>
+          </p:cNvPr>
+          <p:cNvSpPr>
+            <a:spLocks noGrp="1"/>
+          </p:cNvSpPr>
+          <p:nvPr>
+            <p:ph type="dt" sz="half" idx="2"/>
+          </p:nvPr>
+        </p:nvSpPr>
+        <p:spPr>
+          <a:xfrm>
+            <a:off x="838200" y="6356350"/>
+            <a:ext cx="2743200" cy="365125"/>
+          </a:xfrm>
+          <a:prstGeom prst="rect">
+            <a:avLst/>
+          </a:prstGeom>
+        </p:spPr>
+        <p:txBody>
+          <a:bodyPr vert="horz" lIns="91440" tIns="45720" rIns="91440" bIns="45720" rtlCol="0" anchor="ctr"/>
+          <a:lstStyle>
+            <a:lvl1pPr algn="l">
+              <a:defRPr sz="1200">
+                <a:solidFill>
+                  <a:schemeClr val="tx1">
+                    <a:tint val="82000"/>
+                  </a:schemeClr>
+                </a:solidFill>
+              </a:defRPr>
+            </a:lvl1pPr>
+          </a:lstStyle>
+          <a:p>
+            <a:fld id="{3F2082E8-73AE-0443-9211-048CA87033AA}" type="datetimeFigureOut">
+              <a:rPr lang="en-US" smtClean="0"/>
+              <a:pPr/>
+              <a:t>3/26/2026</a:t>
+            </a:fld>
+            <a:endParaRPr lang="en-US"/>
+          </a:p>
+        </p:txBody>
+      </p:sp>
+      <p:sp>
+        <p:nvSpPr>
+          <p:cNvPr id="5" name="Footer Placeholder 4">
+            <a:extLst>
+              <a:ext uri="{FF2B5EF4-FFF2-40B4-BE49-F238E27FC236}">
+                <a16:creationId xmlns:a16="http://schemas.microsoft.com/office/drawing/2014/main" id="{CC9578DA-82EA-45DB-2EF0-411536A1C913}"/>
+              </a:ext>
+            </a:extLst>
+          </p:cNvPr>
+          <p:cNvSpPr>
+            <a:spLocks noGrp="1"/>
+          </p:cNvSpPr>
+          <p:nvPr>
+            <p:ph type="ftr" sz="quarter" idx="3"/>
+          </p:nvPr>
+        </p:nvSpPr>
+        <p:spPr>
+          <a:xfrm>
+            <a:off x="4038600" y="6356350"/>
+            <a:ext cx="4114800" cy="365125"/>
+          </a:xfrm>
+          <a:prstGeom prst="rect">
+            <a:avLst/>
+          </a:prstGeom>
+        </p:spPr>
+        <p:txBody>
+          <a:bodyPr vert="horz" lIns="91440" tIns="45720" rIns="91440" bIns="45720" rtlCol="0" anchor="ctr"/>
+          <a:lstStyle>
+            <a:lvl1pPr algn="ctr">
+              <a:defRPr sz="1200">
+                <a:solidFill>
+                  <a:schemeClr val="tx1">
+                    <a:tint val="82000"/>
+                  </a:schemeClr>
+                </a:solidFill>
+              </a:defRPr>
+            </a:lvl1pPr>
+          </a:lstStyle>
+          <a:p>
+            <a:endParaRPr lang="en-US"/>
+          </a:p>
+        </p:txBody>
+      </p:sp>
+      <p:sp>
+        <p:nvSpPr>
+          <p:cNvPr id="6" name="Slide Number Placeholder 5">
+            <a:extLst>
+              <a:ext uri="{FF2B5EF4-FFF2-40B4-BE49-F238E27FC236}">
+                <a16:creationId xmlns:a16="http://schemas.microsoft.com/office/drawing/2014/main" id="{AE3BF62C-487A-F37D-BE06-30ABB8D5B903}"/>
+              </a:ext>
+            </a:extLst>
+          </p:cNvPr>
+          <p:cNvSpPr>
+            <a:spLocks noGrp="1"/>
+          </p:cNvSpPr>
+          <p:nvPr>
+            <p:ph type="sldNum" sz="quarter" idx="4"/>
+          </p:nvPr>
+        </p:nvSpPr>
+        <p:spPr>
+          <a:xfrm>
+            <a:off x="8610600" y="6356350"/>
+            <a:ext cx="2743200" cy="365125"/>
+          </a:xfrm>
+          <a:prstGeom prst="rect">
+            <a:avLst/>
+          </a:prstGeom>
+        </p:spPr>
+        <p:txBody>
+          <a:bodyPr vert="horz" lIns="91440" tIns="45720" rIns="91440" bIns="45720" rtlCol="0" anchor="ctr"/>
+          <a:lstStyle>
+            <a:lvl1pPr algn="r">
+              <a:defRPr sz="1200">
+                <a:solidFill>
+                  <a:schemeClr val="tx1">
+                    <a:tint val="82000"/>
+                  </a:schemeClr>
+                </a:solidFill>
+              </a:defRPr>
+            </a:lvl1pPr>
+          </a:lstStyle>
+          <a:p>
+            <a:fld id="{BC43744F-32DB-BD4B-B697-C0670FE089A5}" type="slidenum">
+              <a:rPr lang="en-US" smtClean="0"/>
+              <a:pPr/>
+              <a:t>‹#›</a:t>
+            </a:fld>
+            <a:endParaRPr lang="en-US"/>
+          </a:p>
+        </p:txBody>
+      </p:sp>
+      <p:sp>
+        <p:nvSpPr>
+          <p:cNvPr id="7" name="Rectangle 6">
+            <a:extLst>
+              <a:ext uri="{FF2B5EF4-FFF2-40B4-BE49-F238E27FC236}">
+                <a16:creationId xmlns:a16="http://schemas.microsoft.com/office/drawing/2014/main" id="{4DB2B117-B05E-B3D6-71CB-835C5A728637}"/>
+              </a:ext>
+            </a:extLst>
+          </p:cNvPr>
+          <p:cNvSpPr/>
+          <p:nvPr userDrawn="1"/>
+        </p:nvSpPr>
+        <p:spPr>
+          <a:xfrm>
+            <a:off x="0" y="0"/>
+            <a:ext cx="12192000" cy="6858000"/>
+          </a:xfrm>
+          <a:prstGeom prst="rect">
+            <a:avLst/>
+          </a:prstGeom>
+          <a:solidFill>
+            <a:schemeClr val="bg1"/>
+          </a:solidFill>
+          <a:ln>
+            <a:noFill/>
+          </a:ln>
+        </p:spPr>
+        <p:style>
+          <a:lnRef idx="2">
+            <a:schemeClr val="accent1">
+              <a:shade val="50000"/>
+            </a:schemeClr>
+          </a:lnRef>
+          <a:fillRef idx="1">
+            <a:schemeClr val="accent1"/>
+          </a:fillRef>
+          <a:effectRef idx="0">
+            <a:schemeClr val="accent1"/>
+          </a:effectRef>
+          <a:fontRef idx="minor">
+            <a:schemeClr val="lt1"/>
+          </a:fontRef>
+        </p:style>
+        <p:txBody>
+          <a:bodyPr rtlCol="0" anchor="ctr"/>
+          <a:lstStyle/>
+          <a:p>
+            <a:pPr algn="ctr"/>
+            <a:endParaRPr lang="en-US" dirty="0"/>
+          </a:p>
+        </p:txBody>
+      </p:sp>
+    </p:spTree>
+    <p:extLst>
+      <p:ext uri="{BB962C8B-B14F-4D97-AF65-F5344CB8AC3E}">
+        <p14:creationId xmlns:p14="http://schemas.microsoft.com/office/powerpoint/2010/main" val="2908370257"/>
+      </p:ext>
+    </p:extLst>
+  </p:cSld>
+  <p:clrMap bg1="lt1" tx1="dk1" bg2="lt2" tx2="dk2" accent1="accent1" accent2="accent2" accent3="accent3" accent4="accent4" accent5="accent5" accent6="accent6" hlink="hlink" folHlink="folHlink"/>
+  <p:sldLayoutIdLst>
+    <p:sldLayoutId id="2147483670" r:id="rId1"/>
+    <p:sldLayoutId id="2147483672" r:id="rId2"/>
+    <p:sldLayoutId id="2147483673" r:id="rId3"/>
+    <p:sldLayoutId id="2147483674" r:id="rId4"/>
+    <p:sldLayoutId id="2147483675" r:id="rId5"/>
+    <p:sldLayoutId id="2147483676" r:id="rId6"/>
+    <p:sldLayoutId id="2147483677" r:id="rId7"/>
+    <p:sldLayoutId id="2147483678" r:id="rId8"/>
+    <p:sldLayoutId id="2147483679" r:id="rId9"/>
+    <p:sldLayoutId id="2147483680" r:id="rId10"/>
+    <p:sldLayoutId id="2147483681" r:id="rId11"/>
+    <p:sldLayoutId id="2147483682" r:id="rId12"/>
+    <p:sldLayoutId id="2147483671" r:id="rId13"/>
+  </p:sldLayoutIdLst>
+  <p:txStyles>
+    <p:titleStyle>
+      <a:lvl1pPr algn="l" defTabSz="914400" rtl="0" eaLnBrk="1" latinLnBrk="0" hangingPunct="1">
+        <a:lnSpc>
+          <a:spcPct val="90000"/>
+        </a:lnSpc>
+        <a:spcBef>
+          <a:spcPct val="0"/>
+        </a:spcBef>
+        <a:buNone/>
+        <a:defRPr sz="4400" kern="1200">
+          <a:solidFill>
+            <a:schemeClr val="tx1"/>
+          </a:solidFill>
+          <a:latin typeface="+mj-lt"/>
+          <a:ea typeface="+mj-ea"/>
+          <a:cs typeface="+mj-cs"/>
+        </a:defRPr>
+      </a:lvl1pPr>
+    </p:titleStyle>
+    <p:bodyStyle>
+      <a:lvl1pPr marL="228600" indent="-228600" algn="l" defTabSz="914400" rtl="0" eaLnBrk="1" latinLnBrk="0" hangingPunct="1">
+        <a:lnSpc>
+          <a:spcPct val="90000"/>
+        </a:lnSpc>
+        <a:spcBef>
+          <a:spcPts val="1000"/>
+        </a:spcBef>
+        <a:buFont typeface="Arial" panose="020B0604020202020204" pitchFamily="34" charset="0"/>
+        <a:buChar char="•"/>
+        <a:defRPr sz="2800" kern="1200">
+          <a:solidFill>
+            <a:schemeClr val="tx1"/>
+          </a:solidFill>
+          <a:latin typeface="+mn-lt"/>
+          <a:ea typeface="+mn-ea"/>
+          <a:cs typeface="+mn-cs"/>
+        </a:defRPr>
+      </a:lvl1pPr>
+      <a:lvl2pPr marL="685800" indent="-228600" algn="l" defTabSz="914400" rtl="0" eaLnBrk="1" latinLnBrk="0" hangingPunct="1">
+        <a:lnSpc>
+          <a:spcPct val="90000"/>
+        </a:lnSpc>
+        <a:spcBef>
+          <a:spcPts val="500"/>
+        </a:spcBef>
+        <a:buFont typeface="Arial" panose="020B0604020202020204" pitchFamily="34" charset="0"/>
+        <a:buChar char="•"/>
+        <a:defRPr sz="2400" kern="1200">
+          <a:solidFill>
+            <a:schemeClr val="tx1"/>
+          </a:solidFill>
+          <a:latin typeface="+mn-lt"/>
+          <a:ea typeface="+mn-ea"/>
+          <a:cs typeface="+mn-cs"/>
+        </a:defRPr>
+      </a:lvl2pPr>
+      <a:lvl3pPr marL="1143000" indent="-228600" algn="l" defTabSz="914400" rtl="0" eaLnBrk="1" latinLnBrk="0" hangingPunct="1">
+        <a:lnSpc>
+          <a:spcPct val="90000"/>
+        </a:lnSpc>
+        <a:spcBef>
+          <a:spcPts val="500"/>
+        </a:spcBef>
+        <a:buFont typeface="Arial" panose="020B0604020202020204" pitchFamily="34" charset="0"/>
+        <a:buChar char="•"/>
+        <a:defRPr sz="2000" kern="1200">
+          <a:solidFill>
+            <a:schemeClr val="tx1"/>
+          </a:solidFill>
+          <a:latin typeface="+mn-lt"/>
+          <a:ea typeface="+mn-ea"/>
+          <a:cs typeface="+mn-cs"/>
+        </a:defRPr>
+      </a:lvl3pPr>
+      <a:lvl4pPr marL="1600200" indent="-228600" algn="l" defTabSz="914400" rtl="0" eaLnBrk="1" latinLnBrk="0" hangingPunct="1">
+        <a:lnSpc>
+          <a:spcPct val="90000"/>
+        </a:lnSpc>
+        <a:spcBef>
+          <a:spcPts val="500"/>
+        </a:spcBef>
+        <a:buFont typeface="Arial" panose="020B0604020202020204" pitchFamily="34" charset="0"/>
+        <a:buChar char="•"/>
+        <a:defRPr sz="1800" kern="1200">
+          <a:solidFill>
+            <a:schemeClr val="tx1"/>
+          </a:solidFill>
+          <a:latin typeface="+mn-lt"/>
+          <a:ea typeface="+mn-ea"/>
+          <a:cs typeface="+mn-cs"/>
+        </a:defRPr>
+      </a:lvl4pPr>
+      <a:lvl5pPr marL="2057400" indent="-228600" algn="l" defTabSz="914400" rtl="0" eaLnBrk="1" latinLnBrk="0" hangingPunct="1">
+        <a:lnSpc>
+          <a:spcPct val="90000"/>
+        </a:lnSpc>
+        <a:spcBef>
+          <a:spcPts val="500"/>
+        </a:spcBef>
+        <a:buFont typeface="Arial" panose="020B0604020202020204" pitchFamily="34" charset="0"/>
+        <a:buChar char="•"/>
+        <a:defRPr sz="1800" kern="1200">
+          <a:solidFill>
+            <a:schemeClr val="tx1"/>
+          </a:solidFill>
+          <a:latin typeface="+mn-lt"/>
+          <a:ea typeface="+mn-ea"/>
+          <a:cs typeface="+mn-cs"/>
+        </a:defRPr>
+      </a:lvl5pPr>
+      <a:lvl6pPr marL="2514600" indent="-228600" algn="l" defTabSz="914400" rtl="0" eaLnBrk="1" latinLnBrk="0" hangingPunct="1">
+        <a:lnSpc>
+          <a:spcPct val="90000"/>
+        </a:lnSpc>
+        <a:spcBef>
+          <a:spcPts val="500"/>
+        </a:spcBef>
+        <a:buFont typeface="Arial" panose="020B0604020202020204" pitchFamily="34" charset="0"/>
+        <a:buChar char="•"/>
+        <a:defRPr sz="1800" kern="1200">
+          <a:solidFill>
+            <a:schemeClr val="tx1"/>
+          </a:solidFill>
+          <a:latin typeface="+mn-lt"/>
+          <a:ea typeface="+mn-ea"/>
+          <a:cs typeface="+mn-cs"/>
+        </a:defRPr>
+      </a:lvl6pPr>
+      <a:lvl7pPr marL="2971800" indent="-228600" algn="l" defTabSz="914400" rtl="0" eaLnBrk="1" latinLnBrk="0" hangingPunct="1">
+        <a:lnSpc>
+          <a:spcPct val="90000"/>
+        </a:lnSpc>
+        <a:spcBef>
+          <a:spcPts val="500"/>
+        </a:spcBef>
+        <a:buFont typeface="Arial" panose="020B0604020202020204" pitchFamily="34" charset="0"/>
+        <a:buChar char="•"/>
+        <a:defRPr sz="1800" kern="1200">
+          <a:solidFill>
+            <a:schemeClr val="tx1"/>
+          </a:solidFill>
+          <a:latin typeface="+mn-lt"/>
+          <a:ea typeface="+mn-ea"/>
+          <a:cs typeface="+mn-cs"/>
+        </a:defRPr>
+      </a:lvl7pPr>
+      <a:lvl8pPr marL="3429000" indent="-228600" algn="l" defTabSz="914400" rtl="0" eaLnBrk="1" latinLnBrk="0" hangingPunct="1">
+        <a:lnSpc>
+          <a:spcPct val="90000"/>
+        </a:lnSpc>
+        <a:spcBef>
+          <a:spcPts val="500"/>
+        </a:spcBef>
+        <a:buFont typeface="Arial" panose="020B0604020202020204" pitchFamily="34" charset="0"/>
+        <a:buChar char="•"/>
+        <a:defRPr sz="1800" kern="1200">
+          <a:solidFill>
+            <a:schemeClr val="tx1"/>
+          </a:solidFill>
+          <a:latin typeface="+mn-lt"/>
+          <a:ea typeface="+mn-ea"/>
+          <a:cs typeface="+mn-cs"/>
+        </a:defRPr>
+      </a:lvl8pPr>
+      <a:lvl9pPr marL="3886200" indent="-228600" algn="l" defTabSz="914400" rtl="0" eaLnBrk="1" latinLnBrk="0" hangingPunct="1">
+        <a:lnSpc>
+          <a:spcPct val="90000"/>
+        </a:lnSpc>
+        <a:spcBef>
+          <a:spcPts val="500"/>
+        </a:spcBef>
+        <a:buFont typeface="Arial" panose="020B0604020202020204" pitchFamily="34" charset="0"/>
+        <a:buChar char="•"/>
+        <a:defRPr sz="1800" kern="1200">
+          <a:solidFill>
+            <a:schemeClr val="tx1"/>
+          </a:solidFill>
+          <a:latin typeface="+mn-lt"/>
+          <a:ea typeface="+mn-ea"/>
+          <a:cs typeface="+mn-cs"/>
+        </a:defRPr>
+      </a:lvl9pPr>
+    </p:bodyStyle>
+    <p:otherStyle>
+      <a:defPPr>
+        <a:defRPr lang="en-US"/>
+      </a:defPPr>
+      <a:lvl1pPr marL="0" algn="l" defTabSz="914400" rtl="0" eaLnBrk="1" latinLnBrk="0" hangingPunct="1">
+        <a:defRPr sz="1800" kern="1200">
+          <a:solidFill>
+            <a:schemeClr val="tx1"/>
+          </a:solidFill>
+          <a:latin typeface="+mn-lt"/>
+          <a:ea typeface="+mn-ea"/>
+          <a:cs typeface="+mn-cs"/>
+        </a:defRPr>
+      </a:lvl1pPr>
+      <a:lvl2pPr marL="457200" algn="l" defTabSz="914400" rtl="0" eaLnBrk="1" latinLnBrk="0" hangingPunct="1">
+        <a:defRPr sz="1800" kern="1200">
+          <a:solidFill>
+            <a:schemeClr val="tx1"/>
+          </a:solidFill>
+          <a:latin typeface="+mn-lt"/>
+          <a:ea typeface="+mn-ea"/>
+          <a:cs typeface="+mn-cs"/>
+        </a:defRPr>
+      </a:lvl2pPr>
+      <a:lvl3pPr marL="914400" algn="l" defTabSz="914400" rtl="0" eaLnBrk="1" latinLnBrk="0" hangingPunct="1">
+        <a:defRPr sz="1800" kern="1200">
+          <a:solidFill>
+            <a:schemeClr val="tx1"/>
+          </a:solidFill>
+          <a:latin typeface="+mn-lt"/>
+          <a:ea typeface="+mn-ea"/>
+          <a:cs typeface="+mn-cs"/>
+        </a:defRPr>
+      </a:lvl3pPr>
+      <a:lvl4pPr marL="1371600" algn="l" defTabSz="914400" rtl="0" eaLnBrk="1" latinLnBrk="0" hangingPunct="1">
+        <a:defRPr sz="1800" kern="1200">
+          <a:solidFill>
+            <a:schemeClr val="tx1"/>
+          </a:solidFill>
+          <a:latin typeface="+mn-lt"/>
+          <a:ea typeface="+mn-ea"/>
+          <a:cs typeface="+mn-cs"/>
+        </a:defRPr>
+      </a:lvl4pPr>
+      <a:lvl5pPr marL="1828800" algn="l" defTabSz="914400" rtl="0" eaLnBrk="1" latinLnBrk="0" hangingPunct="1">
+        <a:defRPr sz="1800" kern="1200">
+          <a:solidFill>
+            <a:schemeClr val="tx1"/>
+          </a:solidFill>
+          <a:latin typeface="+mn-lt"/>
+          <a:ea typeface="+mn-ea"/>
+          <a:cs typeface="+mn-cs"/>
+        </a:defRPr>
+      </a:lvl5pPr>
+      <a:lvl6pPr marL="2286000" algn="l" defTabSz="914400" rtl="0" eaLnBrk="1" latinLnBrk="0" hangingPunct="1">
+        <a:defRPr sz="1800" kern="1200">
+          <a:solidFill>
+            <a:schemeClr val="tx1"/>
+          </a:solidFill>
+          <a:latin typeface="+mn-lt"/>
+          <a:ea typeface="+mn-ea"/>
+          <a:cs typeface="+mn-cs"/>
+        </a:defRPr>
+      </a:lvl6pPr>
+      <a:lvl7pPr marL="2743200" algn="l" defTabSz="914400" rtl="0" eaLnBrk="1" latinLnBrk="0" hangingPunct="1">
+        <a:defRPr sz="1800" kern="1200">
+          <a:solidFill>
+            <a:schemeClr val="tx1"/>
+          </a:solidFill>
+          <a:latin typeface="+mn-lt"/>
+          <a:ea typeface="+mn-ea"/>
+          <a:cs typeface="+mn-cs"/>
+        </a:defRPr>
+      </a:lvl7pPr>
+      <a:lvl8pPr marL="3200400" algn="l" defTabSz="914400" rtl="0" eaLnBrk="1" latinLnBrk="0" hangingPunct="1">
+        <a:defRPr sz="1800" kern="1200">
+          <a:solidFill>
+            <a:schemeClr val="tx1"/>
+          </a:solidFill>
+          <a:latin typeface="+mn-lt"/>
+          <a:ea typeface="+mn-ea"/>
+          <a:cs typeface="+mn-cs"/>
+        </a:defRPr>
+      </a:lvl8pPr>
+      <a:lvl9pPr marL="3657600" algn="l" defTabSz="914400" rtl="0" eaLnBrk="1" latinLnBrk="0" hangingPunct="1">
+        <a:defRPr sz="1800" kern="1200">
+          <a:solidFill>
+            <a:schemeClr val="tx1"/>
+          </a:solidFill>
+          <a:latin typeface="+mn-lt"/>
+          <a:ea typeface="+mn-ea"/>
+          <a:cs typeface="+mn-cs"/>
+        </a:defRPr>
+      </a:lvl9pPr>
+    </p:otherStyle>
+  </p:txStyles>
+  <p:extLst>
+    <p:ext uri="{27BBF7A9-308A-43DC-89C8-2F10F3537804}">
+      <p15:sldGuideLst xmlns:p15="http://schemas.microsoft.com/office/powerpoint/2012/main"/>
+    </p:ext>
+  </p:extLst>
+</p:sldMaster>
+</file>
+
 <file path=ppt/slides/slide1.xml><?xml version="1.0" encoding="utf-8"?>
 <p:sld xmlns:a="http://schemas.openxmlformats.org/drawingml/2006/main" xmlns:r="http://schemas.openxmlformats.org/officeDocument/2006/relationships" xmlns:p="http://schemas.openxmlformats.org/presentationml/2006/main">
   <p:cSld>
@@ -5785,7 +5243,7 @@
             <a:spLocks noGrp="1"/>
           </p:cNvSpPr>
           <p:nvPr>
-            <p:ph type="body" sz="quarter" idx="4294967295"/>
+            <p:ph type="body" sz="quarter" idx="13"/>
           </p:nvPr>
         </p:nvSpPr>
         <p:spPr>
@@ -6033,9 +5491,7 @@
             <a:avLst/>
           </a:prstGeom>
           <a:solidFill>
-            <a:schemeClr val="bg1">
-              <a:lumMod val="95000"/>
-            </a:schemeClr>
+            <a:srgbClr val="F3F6F6"/>
           </a:solidFill>
           <a:ln>
             <a:noFill/>
@@ -6080,339 +5536,44 @@
 </file>
 
 <file path=ppt/theme/theme1.xml><?xml version="1.0" encoding="utf-8"?>
-<a:theme xmlns:a="http://schemas.openxmlformats.org/drawingml/2006/main" name="Office Theme">
-  <a:themeElements>
-    <a:clrScheme name="Office">
-      <a:dk1>
-        <a:sysClr val="windowText" lastClr="000000"/>
-      </a:dk1>
-      <a:lt1>
-        <a:sysClr val="window" lastClr="FFFFFF"/>
-      </a:lt1>
-      <a:dk2>
-        <a:srgbClr val="44546A"/>
-      </a:dk2>
-      <a:lt2>
-        <a:srgbClr val="E7E6E6"/>
-      </a:lt2>
-      <a:accent1>
-        <a:srgbClr val="4472C4"/>
-      </a:accent1>
-      <a:accent2>
-        <a:srgbClr val="ED7D31"/>
-      </a:accent2>
-      <a:accent3>
-        <a:srgbClr val="A5A5A5"/>
-      </a:accent3>
-      <a:accent4>
-        <a:srgbClr val="FFC000"/>
-      </a:accent4>
-      <a:accent5>
-        <a:srgbClr val="5B9BD5"/>
-      </a:accent5>
-      <a:accent6>
-        <a:srgbClr val="70AD47"/>
-      </a:accent6>
-      <a:hlink>
-        <a:srgbClr val="0563C1"/>
-      </a:hlink>
-      <a:folHlink>
-        <a:srgbClr val="954F72"/>
-      </a:folHlink>
-    </a:clrScheme>
-    <a:fontScheme name="Office">
-      <a:majorFont>
-        <a:latin typeface="Calibri Light" panose="020F0302020204030204"/>
-        <a:ea typeface=""/>
-        <a:cs typeface=""/>
-        <a:font script="Jpan" typeface="游ゴシック Light"/>
-        <a:font script="Hang" typeface="맑은 고딕"/>
-        <a:font script="Hans" typeface="等线 Light"/>
-        <a:font script="Hant" typeface="新細明體"/>
-        <a:font script="Arab" typeface="Times New Roman"/>
-        <a:font script="Hebr" typeface="Times New Roman"/>
-        <a:font script="Thai" typeface="Angsana New"/>
-        <a:font script="Ethi" typeface="Nyala"/>
-        <a:font script="Beng" typeface="Vrinda"/>
-        <a:font script="Gujr" typeface="Shruti"/>
-        <a:font script="Khmr" typeface="MoolBoran"/>
-        <a:font script="Knda" typeface="Tunga"/>
-        <a:font script="Guru" typeface="Raavi"/>
-        <a:font script="Cans" typeface="Euphemia"/>
-        <a:font script="Cher" typeface="Plantagenet Cherokee"/>
-        <a:font script="Yiii" typeface="Microsoft Yi Baiti"/>
-        <a:font script="Tibt" typeface="Microsoft Himalaya"/>
-        <a:font script="Thaa" typeface="MV Boli"/>
-        <a:font script="Deva" typeface="Mangal"/>
-        <a:font script="Telu" typeface="Gautami"/>
-        <a:font script="Taml" typeface="Latha"/>
-        <a:font script="Syrc" typeface="Estrangelo Edessa"/>
-        <a:font script="Orya" typeface="Kalinga"/>
-        <a:font script="Mlym" typeface="Kartika"/>
-        <a:font script="Laoo" typeface="DokChampa"/>
-        <a:font script="Sinh" typeface="Iskoola Pota"/>
-        <a:font script="Mong" typeface="Mongolian Baiti"/>
-        <a:font script="Viet" typeface="Times New Roman"/>
-        <a:font script="Uigh" typeface="Microsoft Uighur"/>
-        <a:font script="Geor" typeface="Sylfaen"/>
-        <a:font script="Armn" typeface="Arial"/>
-        <a:font script="Bugi" typeface="Leelawadee UI"/>
-        <a:font script="Bopo" typeface="Microsoft JhengHei"/>
-        <a:font script="Java" typeface="Javanese Text"/>
-        <a:font script="Lisu" typeface="Segoe UI"/>
-        <a:font script="Mymr" typeface="Myanmar Text"/>
-        <a:font script="Nkoo" typeface="Ebrima"/>
-        <a:font script="Olck" typeface="Nirmala UI"/>
-        <a:font script="Osma" typeface="Ebrima"/>
-        <a:font script="Phag" typeface="Phagspa"/>
-        <a:font script="Syrn" typeface="Estrangelo Edessa"/>
-        <a:font script="Syrj" typeface="Estrangelo Edessa"/>
-        <a:font script="Syre" typeface="Estrangelo Edessa"/>
-        <a:font script="Sora" typeface="Nirmala UI"/>
-        <a:font script="Tale" typeface="Microsoft Tai Le"/>
-        <a:font script="Talu" typeface="Microsoft New Tai Lue"/>
-        <a:font script="Tfng" typeface="Ebrima"/>
-      </a:majorFont>
-      <a:minorFont>
-        <a:latin typeface="Calibri" panose="020F0502020204030204"/>
-        <a:ea typeface=""/>
-        <a:cs typeface=""/>
-        <a:font script="Jpan" typeface="游ゴシック"/>
-        <a:font script="Hang" typeface="맑은 고딕"/>
-        <a:font script="Hans" typeface="等线"/>
-        <a:font script="Hant" typeface="新細明體"/>
-        <a:font script="Arab" typeface="Arial"/>
-        <a:font script="Hebr" typeface="Arial"/>
-        <a:font script="Thai" typeface="Cordia New"/>
-        <a:font script="Ethi" typeface="Nyala"/>
-        <a:font script="Beng" typeface="Vrinda"/>
-        <a:font script="Gujr" typeface="Shruti"/>
-        <a:font script="Khmr" typeface="DaunPenh"/>
-        <a:font script="Knda" typeface="Tunga"/>
-        <a:font script="Guru" typeface="Raavi"/>
-        <a:font script="Cans" typeface="Euphemia"/>
-        <a:font script="Cher" typeface="Plantagenet Cherokee"/>
-        <a:font script="Yiii" typeface="Microsoft Yi Baiti"/>
-        <a:font script="Tibt" typeface="Microsoft Himalaya"/>
-        <a:font script="Thaa" typeface="MV Boli"/>
-        <a:font script="Deva" typeface="Mangal"/>
-        <a:font script="Telu" typeface="Gautami"/>
-        <a:font script="Taml" typeface="Latha"/>
-        <a:font script="Syrc" typeface="Estrangelo Edessa"/>
-        <a:font script="Orya" typeface="Kalinga"/>
-        <a:font script="Mlym" typeface="Kartika"/>
-        <a:font script="Laoo" typeface="DokChampa"/>
-        <a:font script="Sinh" typeface="Iskoola Pota"/>
-        <a:font script="Mong" typeface="Mongolian Baiti"/>
-        <a:font script="Viet" typeface="Arial"/>
-        <a:font script="Uigh" typeface="Microsoft Uighur"/>
-        <a:font script="Geor" typeface="Sylfaen"/>
-        <a:font script="Armn" typeface="Arial"/>
-        <a:font script="Bugi" typeface="Leelawadee UI"/>
-        <a:font script="Bopo" typeface="Microsoft JhengHei"/>
-        <a:font script="Java" typeface="Javanese Text"/>
-        <a:font script="Lisu" typeface="Segoe UI"/>
-        <a:font script="Mymr" typeface="Myanmar Text"/>
-        <a:font script="Nkoo" typeface="Ebrima"/>
-        <a:font script="Olck" typeface="Nirmala UI"/>
-        <a:font script="Osma" typeface="Ebrima"/>
-        <a:font script="Phag" typeface="Phagspa"/>
-        <a:font script="Syrn" typeface="Estrangelo Edessa"/>
-        <a:font script="Syrj" typeface="Estrangelo Edessa"/>
-        <a:font script="Syre" typeface="Estrangelo Edessa"/>
-        <a:font script="Sora" typeface="Nirmala UI"/>
-        <a:font script="Tale" typeface="Microsoft Tai Le"/>
-        <a:font script="Talu" typeface="Microsoft New Tai Lue"/>
-        <a:font script="Tfng" typeface="Ebrima"/>
-      </a:minorFont>
-    </a:fontScheme>
-    <a:fmtScheme name="Office">
-      <a:fillStyleLst>
-        <a:solidFill>
-          <a:schemeClr val="phClr"/>
-        </a:solidFill>
-        <a:gradFill rotWithShape="1">
-          <a:gsLst>
-            <a:gs pos="0">
-              <a:schemeClr val="phClr">
-                <a:lumMod val="110000"/>
-                <a:satMod val="105000"/>
-                <a:tint val="67000"/>
-              </a:schemeClr>
-            </a:gs>
-            <a:gs pos="50000">
-              <a:schemeClr val="phClr">
-                <a:lumMod val="105000"/>
-                <a:satMod val="103000"/>
-                <a:tint val="73000"/>
-              </a:schemeClr>
-            </a:gs>
-            <a:gs pos="100000">
-              <a:schemeClr val="phClr">
-                <a:lumMod val="105000"/>
-                <a:satMod val="109000"/>
-                <a:tint val="81000"/>
-              </a:schemeClr>
-            </a:gs>
-          </a:gsLst>
-          <a:lin ang="5400000" scaled="0"/>
-        </a:gradFill>
-        <a:gradFill rotWithShape="1">
-          <a:gsLst>
-            <a:gs pos="0">
-              <a:schemeClr val="phClr">
-                <a:satMod val="103000"/>
-                <a:lumMod val="102000"/>
-                <a:tint val="94000"/>
-              </a:schemeClr>
-            </a:gs>
-            <a:gs pos="50000">
-              <a:schemeClr val="phClr">
-                <a:satMod val="110000"/>
-                <a:lumMod val="100000"/>
-                <a:shade val="100000"/>
-              </a:schemeClr>
-            </a:gs>
-            <a:gs pos="100000">
-              <a:schemeClr val="phClr">
-                <a:lumMod val="99000"/>
-                <a:satMod val="120000"/>
-                <a:shade val="78000"/>
-              </a:schemeClr>
-            </a:gs>
-          </a:gsLst>
-          <a:lin ang="5400000" scaled="0"/>
-        </a:gradFill>
-      </a:fillStyleLst>
-      <a:lnStyleLst>
-        <a:ln w="6350" cap="flat" cmpd="sng" algn="ctr">
-          <a:solidFill>
-            <a:schemeClr val="phClr"/>
-          </a:solidFill>
-          <a:prstDash val="solid"/>
-          <a:miter lim="800000"/>
-        </a:ln>
-        <a:ln w="12700" cap="flat" cmpd="sng" algn="ctr">
-          <a:solidFill>
-            <a:schemeClr val="phClr"/>
-          </a:solidFill>
-          <a:prstDash val="solid"/>
-          <a:miter lim="800000"/>
-        </a:ln>
-        <a:ln w="19050" cap="flat" cmpd="sng" algn="ctr">
-          <a:solidFill>
-            <a:schemeClr val="phClr"/>
-          </a:solidFill>
-          <a:prstDash val="solid"/>
-          <a:miter lim="800000"/>
-        </a:ln>
-      </a:lnStyleLst>
-      <a:effectStyleLst>
-        <a:effectStyle>
-          <a:effectLst/>
-        </a:effectStyle>
-        <a:effectStyle>
-          <a:effectLst/>
-        </a:effectStyle>
-        <a:effectStyle>
-          <a:effectLst>
-            <a:outerShdw blurRad="57150" dist="19050" dir="5400000" algn="ctr" rotWithShape="0">
-              <a:srgbClr val="000000">
-                <a:alpha val="63000"/>
-              </a:srgbClr>
-            </a:outerShdw>
-          </a:effectLst>
-        </a:effectStyle>
-      </a:effectStyleLst>
-      <a:bgFillStyleLst>
-        <a:solidFill>
-          <a:schemeClr val="phClr"/>
-        </a:solidFill>
-        <a:solidFill>
-          <a:schemeClr val="phClr">
-            <a:tint val="95000"/>
-            <a:satMod val="170000"/>
-          </a:schemeClr>
-        </a:solidFill>
-        <a:gradFill rotWithShape="1">
-          <a:gsLst>
-            <a:gs pos="0">
-              <a:schemeClr val="phClr">
-                <a:tint val="93000"/>
-                <a:satMod val="150000"/>
-                <a:shade val="98000"/>
-                <a:lumMod val="102000"/>
-              </a:schemeClr>
-            </a:gs>
-            <a:gs pos="50000">
-              <a:schemeClr val="phClr">
-                <a:tint val="98000"/>
-                <a:satMod val="130000"/>
-                <a:shade val="90000"/>
-                <a:lumMod val="103000"/>
-              </a:schemeClr>
-            </a:gs>
-            <a:gs pos="100000">
-              <a:schemeClr val="phClr">
-                <a:shade val="63000"/>
-                <a:satMod val="120000"/>
-              </a:schemeClr>
-            </a:gs>
-          </a:gsLst>
-          <a:lin ang="5400000" scaled="0"/>
-        </a:gradFill>
-      </a:bgFillStyleLst>
-    </a:fmtScheme>
-  </a:themeElements>
-  <a:objectDefaults/>
-  <a:extraClrSchemeLst/>
-  <a:extLst>
-    <a:ext uri="{05A4C25C-085E-4340-85A3-A5531E510DB2}">
-      <thm15:themeFamily xmlns:thm15="http://schemas.microsoft.com/office/thememl/2012/main" name="Office Theme" id="{62F939B6-93AF-4DB8-9C6B-D6C7DFDC589F}" vid="{4A3C46E8-61CC-4603-A589-7422A47A8E4A}"/>
-    </a:ext>
-  </a:extLst>
-</a:theme>
-</file>
-
-<file path=ppt/theme/theme2.xml><?xml version="1.0" encoding="utf-8"?>
 <a:theme xmlns:a="http://schemas.openxmlformats.org/drawingml/2006/main" name="Title Slides">
   <a:themeElements>
-    <a:clrScheme name="CCS Colors">
+    <a:clrScheme name="CCS Colors 2026">
       <a:dk1>
-        <a:srgbClr val="254A5D"/>
+        <a:srgbClr val="133C50"/>
       </a:dk1>
       <a:lt1>
         <a:srgbClr val="FFFFFF"/>
       </a:lt1>
       <a:dk2>
-        <a:srgbClr val="D9E1E2"/>
+        <a:srgbClr val="0E2841"/>
       </a:dk2>
       <a:lt2>
-        <a:srgbClr val="D9E1E2"/>
+        <a:srgbClr val="E8E8E8"/>
       </a:lt2>
       <a:accent1>
-        <a:srgbClr val="E1523D"/>
+        <a:srgbClr val="FF3838"/>
       </a:accent1>
       <a:accent2>
-        <a:srgbClr val="2DCCD3"/>
+        <a:srgbClr val="F5DFCB"/>
       </a:accent2>
       <a:accent3>
-        <a:srgbClr val="ECB22D"/>
+        <a:srgbClr val="247198"/>
       </a:accent3>
       <a:accent4>
-        <a:srgbClr val="6B8E92"/>
+        <a:srgbClr val="F7BD88"/>
       </a:accent4>
       <a:accent5>
-        <a:srgbClr val="65BAAF"/>
+        <a:srgbClr val="BF2A2A"/>
       </a:accent5>
       <a:accent6>
-        <a:srgbClr val="016273"/>
+        <a:srgbClr val="7C5F44"/>
       </a:accent6>
       <a:hlink>
-        <a:srgbClr val="E1523D"/>
+        <a:srgbClr val="FE4041"/>
       </a:hlink>
       <a:folHlink>
-        <a:srgbClr val="2DCCD3"/>
+        <a:srgbClr val="247198"/>
       </a:folHlink>
     </a:clrScheme>
     <a:fontScheme name="CCS Font">
@@ -6573,4 +5734,319 @@
     </a:ext>
   </a:extLst>
 </a:theme>
+</file>
+
+<file path=ppt/theme/theme2.xml><?xml version="1.0" encoding="utf-8"?>
+<a:theme xmlns:a="http://schemas.openxmlformats.org/drawingml/2006/main" name="CCS 2026 Colors - MS Theme">
+  <a:themeElements>
+    <a:clrScheme name="CCS 2026">
+      <a:dk1>
+        <a:srgbClr val="133C50"/>
+      </a:dk1>
+      <a:lt1>
+        <a:srgbClr val="FFFFFF"/>
+      </a:lt1>
+      <a:dk2>
+        <a:srgbClr val="0E2841"/>
+      </a:dk2>
+      <a:lt2>
+        <a:srgbClr val="E8E8E8"/>
+      </a:lt2>
+      <a:accent1>
+        <a:srgbClr val="FF3838"/>
+      </a:accent1>
+      <a:accent2>
+        <a:srgbClr val="F5DFCB"/>
+      </a:accent2>
+      <a:accent3>
+        <a:srgbClr val="247198"/>
+      </a:accent3>
+      <a:accent4>
+        <a:srgbClr val="F7BD88"/>
+      </a:accent4>
+      <a:accent5>
+        <a:srgbClr val="BF2A2A"/>
+      </a:accent5>
+      <a:accent6>
+        <a:srgbClr val="7C5F44"/>
+      </a:accent6>
+      <a:hlink>
+        <a:srgbClr val="FE4041"/>
+      </a:hlink>
+      <a:folHlink>
+        <a:srgbClr val="247198"/>
+      </a:folHlink>
+    </a:clrScheme>
+    <a:fontScheme name="Office">
+      <a:majorFont>
+        <a:latin typeface="Aptos Display" panose="02110004020202020204"/>
+        <a:ea typeface=""/>
+        <a:cs typeface=""/>
+        <a:font script="Jpan" typeface="游ゴシック Light"/>
+        <a:font script="Hang" typeface="맑은 고딕"/>
+        <a:font script="Hans" typeface="等线 Light"/>
+        <a:font script="Hant" typeface="新細明體"/>
+        <a:font script="Arab" typeface="Times New Roman"/>
+        <a:font script="Hebr" typeface="Times New Roman"/>
+        <a:font script="Thai" typeface="Angsana New"/>
+        <a:font script="Ethi" typeface="Nyala"/>
+        <a:font script="Beng" typeface="Vrinda"/>
+        <a:font script="Gujr" typeface="Shruti"/>
+        <a:font script="Khmr" typeface="MoolBoran"/>
+        <a:font script="Knda" typeface="Tunga"/>
+        <a:font script="Guru" typeface="Raavi"/>
+        <a:font script="Cans" typeface="Euphemia"/>
+        <a:font script="Cher" typeface="Plantagenet Cherokee"/>
+        <a:font script="Yiii" typeface="Microsoft Yi Baiti"/>
+        <a:font script="Tibt" typeface="Microsoft Himalaya"/>
+        <a:font script="Thaa" typeface="MV Boli"/>
+        <a:font script="Deva" typeface="Mangal"/>
+        <a:font script="Telu" typeface="Gautami"/>
+        <a:font script="Taml" typeface="Latha"/>
+        <a:font script="Syrc" typeface="Estrangelo Edessa"/>
+        <a:font script="Orya" typeface="Kalinga"/>
+        <a:font script="Mlym" typeface="Kartika"/>
+        <a:font script="Laoo" typeface="DokChampa"/>
+        <a:font script="Sinh" typeface="Iskoola Pota"/>
+        <a:font script="Mong" typeface="Mongolian Baiti"/>
+        <a:font script="Viet" typeface="Times New Roman"/>
+        <a:font script="Uigh" typeface="Microsoft Uighur"/>
+        <a:font script="Geor" typeface="Sylfaen"/>
+        <a:font script="Armn" typeface="Arial"/>
+        <a:font script="Bugi" typeface="Leelawadee UI"/>
+        <a:font script="Bopo" typeface="Microsoft JhengHei"/>
+        <a:font script="Java" typeface="Javanese Text"/>
+        <a:font script="Lisu" typeface="Segoe UI"/>
+        <a:font script="Mymr" typeface="Myanmar Text"/>
+        <a:font script="Nkoo" typeface="Ebrima"/>
+        <a:font script="Olck" typeface="Nirmala UI"/>
+        <a:font script="Osma" typeface="Ebrima"/>
+        <a:font script="Phag" typeface="Phagspa"/>
+        <a:font script="Syrn" typeface="Estrangelo Edessa"/>
+        <a:font script="Syrj" typeface="Estrangelo Edessa"/>
+        <a:font script="Syre" typeface="Estrangelo Edessa"/>
+        <a:font script="Sora" typeface="Nirmala UI"/>
+        <a:font script="Tale" typeface="Microsoft Tai Le"/>
+        <a:font script="Talu" typeface="Microsoft New Tai Lue"/>
+        <a:font script="Tfng" typeface="Ebrima"/>
+      </a:majorFont>
+      <a:minorFont>
+        <a:latin typeface="Aptos" panose="02110004020202020204"/>
+        <a:ea typeface=""/>
+        <a:cs typeface=""/>
+        <a:font script="Jpan" typeface="游ゴシック"/>
+        <a:font script="Hang" typeface="맑은 고딕"/>
+        <a:font script="Hans" typeface="等线"/>
+        <a:font script="Hant" typeface="新細明體"/>
+        <a:font script="Arab" typeface="Arial"/>
+        <a:font script="Hebr" typeface="Arial"/>
+        <a:font script="Thai" typeface="Cordia New"/>
+        <a:font script="Ethi" typeface="Nyala"/>
+        <a:font script="Beng" typeface="Vrinda"/>
+        <a:font script="Gujr" typeface="Shruti"/>
+        <a:font script="Khmr" typeface="DaunPenh"/>
+        <a:font script="Knda" typeface="Tunga"/>
+        <a:font script="Guru" typeface="Raavi"/>
+        <a:font script="Cans" typeface="Euphemia"/>
+        <a:font script="Cher" typeface="Plantagenet Cherokee"/>
+        <a:font script="Yiii" typeface="Microsoft Yi Baiti"/>
+        <a:font script="Tibt" typeface="Microsoft Himalaya"/>
+        <a:font script="Thaa" typeface="MV Boli"/>
+        <a:font script="Deva" typeface="Mangal"/>
+        <a:font script="Telu" typeface="Gautami"/>
+        <a:font script="Taml" typeface="Latha"/>
+        <a:font script="Syrc" typeface="Estrangelo Edessa"/>
+        <a:font script="Orya" typeface="Kalinga"/>
+        <a:font script="Mlym" typeface="Kartika"/>
+        <a:font script="Laoo" typeface="DokChampa"/>
+        <a:font script="Sinh" typeface="Iskoola Pota"/>
+        <a:font script="Mong" typeface="Mongolian Baiti"/>
+        <a:font script="Viet" typeface="Arial"/>
+        <a:font script="Uigh" typeface="Microsoft Uighur"/>
+        <a:font script="Geor" typeface="Sylfaen"/>
+        <a:font script="Armn" typeface="Arial"/>
+        <a:font script="Bugi" typeface="Leelawadee UI"/>
+        <a:font script="Bopo" typeface="Microsoft JhengHei"/>
+        <a:font script="Java" typeface="Javanese Text"/>
+        <a:font script="Lisu" typeface="Segoe UI"/>
+        <a:font script="Mymr" typeface="Myanmar Text"/>
+        <a:font script="Nkoo" typeface="Ebrima"/>
+        <a:font script="Olck" typeface="Nirmala UI"/>
+        <a:font script="Osma" typeface="Ebrima"/>
+        <a:font script="Phag" typeface="Phagspa"/>
+        <a:font script="Syrn" typeface="Estrangelo Edessa"/>
+        <a:font script="Syrj" typeface="Estrangelo Edessa"/>
+        <a:font script="Syre" typeface="Estrangelo Edessa"/>
+        <a:font script="Sora" typeface="Nirmala UI"/>
+        <a:font script="Tale" typeface="Microsoft Tai Le"/>
+        <a:font script="Talu" typeface="Microsoft New Tai Lue"/>
+        <a:font script="Tfng" typeface="Ebrima"/>
+      </a:minorFont>
+    </a:fontScheme>
+    <a:fmtScheme name="Office">
+      <a:fillStyleLst>
+        <a:solidFill>
+          <a:schemeClr val="phClr"/>
+        </a:solidFill>
+        <a:gradFill rotWithShape="1">
+          <a:gsLst>
+            <a:gs pos="0">
+              <a:schemeClr val="phClr">
+                <a:lumMod val="110000"/>
+                <a:satMod val="105000"/>
+                <a:tint val="67000"/>
+              </a:schemeClr>
+            </a:gs>
+            <a:gs pos="50000">
+              <a:schemeClr val="phClr">
+                <a:lumMod val="105000"/>
+                <a:satMod val="103000"/>
+                <a:tint val="73000"/>
+              </a:schemeClr>
+            </a:gs>
+            <a:gs pos="100000">
+              <a:schemeClr val="phClr">
+                <a:lumMod val="105000"/>
+                <a:satMod val="109000"/>
+                <a:tint val="81000"/>
+              </a:schemeClr>
+            </a:gs>
+          </a:gsLst>
+          <a:lin ang="5400000" scaled="0"/>
+        </a:gradFill>
+        <a:gradFill rotWithShape="1">
+          <a:gsLst>
+            <a:gs pos="0">
+              <a:schemeClr val="phClr">
+                <a:satMod val="103000"/>
+                <a:lumMod val="102000"/>
+                <a:tint val="94000"/>
+              </a:schemeClr>
+            </a:gs>
+            <a:gs pos="50000">
+              <a:schemeClr val="phClr">
+                <a:satMod val="110000"/>
+                <a:lumMod val="100000"/>
+                <a:shade val="100000"/>
+              </a:schemeClr>
+            </a:gs>
+            <a:gs pos="100000">
+              <a:schemeClr val="phClr">
+                <a:lumMod val="99000"/>
+                <a:satMod val="120000"/>
+                <a:shade val="78000"/>
+              </a:schemeClr>
+            </a:gs>
+          </a:gsLst>
+          <a:lin ang="5400000" scaled="0"/>
+        </a:gradFill>
+      </a:fillStyleLst>
+      <a:lnStyleLst>
+        <a:ln w="12700" cap="flat" cmpd="sng" algn="ctr">
+          <a:solidFill>
+            <a:schemeClr val="phClr"/>
+          </a:solidFill>
+          <a:prstDash val="solid"/>
+          <a:miter lim="800000"/>
+        </a:ln>
+        <a:ln w="19050" cap="flat" cmpd="sng" algn="ctr">
+          <a:solidFill>
+            <a:schemeClr val="phClr"/>
+          </a:solidFill>
+          <a:prstDash val="solid"/>
+          <a:miter lim="800000"/>
+        </a:ln>
+        <a:ln w="25400" cap="flat" cmpd="sng" algn="ctr">
+          <a:solidFill>
+            <a:schemeClr val="phClr"/>
+          </a:solidFill>
+          <a:prstDash val="solid"/>
+          <a:miter lim="800000"/>
+        </a:ln>
+      </a:lnStyleLst>
+      <a:effectStyleLst>
+        <a:effectStyle>
+          <a:effectLst/>
+        </a:effectStyle>
+        <a:effectStyle>
+          <a:effectLst/>
+        </a:effectStyle>
+        <a:effectStyle>
+          <a:effectLst>
+            <a:outerShdw blurRad="57150" dist="19050" dir="5400000" algn="ctr" rotWithShape="0">
+              <a:srgbClr val="000000">
+                <a:alpha val="63000"/>
+              </a:srgbClr>
+            </a:outerShdw>
+          </a:effectLst>
+        </a:effectStyle>
+      </a:effectStyleLst>
+      <a:bgFillStyleLst>
+        <a:solidFill>
+          <a:schemeClr val="phClr"/>
+        </a:solidFill>
+        <a:solidFill>
+          <a:schemeClr val="phClr">
+            <a:tint val="95000"/>
+            <a:satMod val="170000"/>
+          </a:schemeClr>
+        </a:solidFill>
+        <a:gradFill rotWithShape="1">
+          <a:gsLst>
+            <a:gs pos="0">
+              <a:schemeClr val="phClr">
+                <a:tint val="93000"/>
+                <a:satMod val="150000"/>
+                <a:shade val="98000"/>
+                <a:lumMod val="102000"/>
+              </a:schemeClr>
+            </a:gs>
+            <a:gs pos="50000">
+              <a:schemeClr val="phClr">
+                <a:tint val="98000"/>
+                <a:satMod val="130000"/>
+                <a:shade val="90000"/>
+                <a:lumMod val="103000"/>
+              </a:schemeClr>
+            </a:gs>
+            <a:gs pos="100000">
+              <a:schemeClr val="phClr">
+                <a:shade val="63000"/>
+                <a:satMod val="120000"/>
+              </a:schemeClr>
+            </a:gs>
+          </a:gsLst>
+          <a:lin ang="5400000" scaled="0"/>
+        </a:gradFill>
+      </a:bgFillStyleLst>
+    </a:fmtScheme>
+  </a:themeElements>
+  <a:objectDefaults>
+    <a:lnDef>
+      <a:spPr/>
+      <a:bodyPr/>
+      <a:lstStyle/>
+      <a:style>
+        <a:lnRef idx="2">
+          <a:schemeClr val="accent1"/>
+        </a:lnRef>
+        <a:fillRef idx="0">
+          <a:schemeClr val="accent1"/>
+        </a:fillRef>
+        <a:effectRef idx="1">
+          <a:schemeClr val="accent1"/>
+        </a:effectRef>
+        <a:fontRef idx="minor">
+          <a:schemeClr val="tx1"/>
+        </a:fontRef>
+      </a:style>
+    </a:lnDef>
+  </a:objectDefaults>
+  <a:extraClrSchemeLst/>
+  <a:extLst>
+    <a:ext uri="{05A4C25C-085E-4340-85A3-A5531E510DB2}">
+      <thm15:themeFamily xmlns:thm15="http://schemas.microsoft.com/office/thememl/2012/main" name="CCS 2026 Colors - MS Theme" id="{A6D7435E-299B-8A4F-9030-5553EF060D5C}" vid="{D584EF1B-16E6-5940-9B6F-C4A6B8A99DA3}"/>
+    </a:ext>
+  </a:extLst>
+</a:theme>
 </file>
--- a/template.pptx
+++ b/template.pptx
@@ -117,20 +117,20 @@
 <file path=ppt/changesInfos/changesInfo1.xml><?xml version="1.0" encoding="utf-8"?>
 <pc:chgInfo xmlns:a="http://schemas.openxmlformats.org/drawingml/2006/main" xmlns:r="http://schemas.openxmlformats.org/officeDocument/2006/relationships" xmlns:ac="http://schemas.microsoft.com/office/drawing/2013/main/command" xmlns:pc="http://schemas.microsoft.com/office/powerpoint/2013/main/command">
   <pc:docChgLst>
-    <pc:chgData name="Devin Heanue" userId="7590fe87-f85b-4db3-af49-40606f5bf96f" providerId="ADAL" clId="{0AE716D6-5FAA-4FA4-BA3F-12263BBDF976}"/>
-    <pc:docChg chg="undo custSel addSld delSld modSld modMainMaster">
-      <pc:chgData name="Devin Heanue" userId="7590fe87-f85b-4db3-af49-40606f5bf96f" providerId="ADAL" clId="{0AE716D6-5FAA-4FA4-BA3F-12263BBDF976}" dt="2026-03-26T14:54:47.439" v="86" actId="1076"/>
+    <pc:chgData name="Devin Heanue" userId="7590fe87-f85b-4db3-af49-40606f5bf96f" providerId="ADAL" clId="{A2D90BA2-02A7-4AB1-8229-4C08CFF0E969}"/>
+    <pc:docChg chg="undo custSel modSld modMainMaster">
+      <pc:chgData name="Devin Heanue" userId="7590fe87-f85b-4db3-af49-40606f5bf96f" providerId="ADAL" clId="{A2D90BA2-02A7-4AB1-8229-4C08CFF0E969}" dt="2026-06-15T20:57:51.406" v="49" actId="14100"/>
       <pc:docMkLst>
         <pc:docMk/>
       </pc:docMkLst>
       <pc:sldChg chg="modSp mod">
-        <pc:chgData name="Devin Heanue" userId="7590fe87-f85b-4db3-af49-40606f5bf96f" providerId="ADAL" clId="{0AE716D6-5FAA-4FA4-BA3F-12263BBDF976}" dt="2026-03-19T15:26:10.314" v="9" actId="207"/>
+        <pc:chgData name="Devin Heanue" userId="7590fe87-f85b-4db3-af49-40606f5bf96f" providerId="ADAL" clId="{A2D90BA2-02A7-4AB1-8229-4C08CFF0E969}" dt="2026-06-15T20:57:51.406" v="49" actId="14100"/>
         <pc:sldMkLst>
           <pc:docMk/>
           <pc:sldMk cId="327460940" sldId="257"/>
         </pc:sldMkLst>
         <pc:spChg chg="mod">
-          <ac:chgData name="Devin Heanue" userId="7590fe87-f85b-4db3-af49-40606f5bf96f" providerId="ADAL" clId="{0AE716D6-5FAA-4FA4-BA3F-12263BBDF976}" dt="2026-03-19T15:26:10.314" v="9" actId="207"/>
+          <ac:chgData name="Devin Heanue" userId="7590fe87-f85b-4db3-af49-40606f5bf96f" providerId="ADAL" clId="{A2D90BA2-02A7-4AB1-8229-4C08CFF0E969}" dt="2026-06-15T20:57:51.406" v="49" actId="14100"/>
           <ac:spMkLst>
             <pc:docMk/>
             <pc:sldMk cId="327460940" sldId="257"/>
@@ -138,93 +138,21 @@
           </ac:spMkLst>
         </pc:spChg>
       </pc:sldChg>
-      <pc:sldChg chg="modSp">
-        <pc:chgData name="Devin Heanue" userId="7590fe87-f85b-4db3-af49-40606f5bf96f" providerId="ADAL" clId="{0AE716D6-5FAA-4FA4-BA3F-12263BBDF976}" dt="2026-03-19T13:58:48.720" v="1"/>
-        <pc:sldMkLst>
-          <pc:docMk/>
-          <pc:sldMk cId="3275027838" sldId="350"/>
-        </pc:sldMkLst>
-        <pc:spChg chg="mod">
-          <ac:chgData name="Devin Heanue" userId="7590fe87-f85b-4db3-af49-40606f5bf96f" providerId="ADAL" clId="{0AE716D6-5FAA-4FA4-BA3F-12263BBDF976}" dt="2026-03-19T13:58:48.720" v="1"/>
-          <ac:spMkLst>
-            <pc:docMk/>
-            <pc:sldMk cId="3275027838" sldId="350"/>
-            <ac:spMk id="3" creationId="{5AC44777-8983-4366-4BC2-D62330047D28}"/>
-          </ac:spMkLst>
-        </pc:spChg>
-        <pc:picChg chg="mod">
-          <ac:chgData name="Devin Heanue" userId="7590fe87-f85b-4db3-af49-40606f5bf96f" providerId="ADAL" clId="{0AE716D6-5FAA-4FA4-BA3F-12263BBDF976}" dt="2026-03-19T13:58:48.720" v="1"/>
-          <ac:picMkLst>
-            <pc:docMk/>
-            <pc:sldMk cId="3275027838" sldId="350"/>
-            <ac:picMk id="7" creationId="{4DB909B4-2FA7-D63C-BE73-8D3C3EDF99F8}"/>
-          </ac:picMkLst>
-        </pc:picChg>
-      </pc:sldChg>
       <pc:sldMasterChg chg="modSldLayout">
-        <pc:chgData name="Devin Heanue" userId="7590fe87-f85b-4db3-af49-40606f5bf96f" providerId="ADAL" clId="{0AE716D6-5FAA-4FA4-BA3F-12263BBDF976}" dt="2026-03-19T13:58:30.797" v="0" actId="16037"/>
-        <pc:sldMasterMkLst>
-          <pc:docMk/>
-          <pc:sldMasterMk cId="1628519446" sldId="2147483662"/>
-        </pc:sldMasterMkLst>
-        <pc:sldLayoutChg chg="modSp">
-          <pc:chgData name="Devin Heanue" userId="7590fe87-f85b-4db3-af49-40606f5bf96f" providerId="ADAL" clId="{0AE716D6-5FAA-4FA4-BA3F-12263BBDF976}" dt="2026-03-19T13:58:30.797" v="0" actId="16037"/>
-          <pc:sldLayoutMkLst>
-            <pc:docMk/>
-            <pc:sldMasterMk cId="1628519446" sldId="2147483662"/>
-            <pc:sldLayoutMk cId="2057324489" sldId="2147483668"/>
-          </pc:sldLayoutMkLst>
-          <pc:spChg chg="mod">
-            <ac:chgData name="Devin Heanue" userId="7590fe87-f85b-4db3-af49-40606f5bf96f" providerId="ADAL" clId="{0AE716D6-5FAA-4FA4-BA3F-12263BBDF976}" dt="2026-03-19T13:58:30.797" v="0" actId="16037"/>
-            <ac:spMkLst>
-              <pc:docMk/>
-              <pc:sldMasterMk cId="1628519446" sldId="2147483662"/>
-              <pc:sldLayoutMk cId="2057324489" sldId="2147483668"/>
-              <ac:spMk id="26" creationId="{ADD87412-82D6-A515-DF8B-025EDE80E7BF}"/>
-            </ac:spMkLst>
-          </pc:spChg>
-        </pc:sldLayoutChg>
-      </pc:sldMasterChg>
-      <pc:sldMasterChg chg="addSp modSldLayout sldLayoutOrd">
-        <pc:chgData name="Devin Heanue" userId="7590fe87-f85b-4db3-af49-40606f5bf96f" providerId="ADAL" clId="{0AE716D6-5FAA-4FA4-BA3F-12263BBDF976}" dt="2026-03-26T14:54:47.439" v="86" actId="1076"/>
+        <pc:chgData name="Devin Heanue" userId="7590fe87-f85b-4db3-af49-40606f5bf96f" providerId="ADAL" clId="{A2D90BA2-02A7-4AB1-8229-4C08CFF0E969}" dt="2026-06-15T20:54:47.839" v="47" actId="1038"/>
         <pc:sldMasterMkLst>
           <pc:docMk/>
           <pc:sldMasterMk cId="2908370257" sldId="2147483669"/>
         </pc:sldMasterMkLst>
-        <pc:spChg chg="add">
-          <ac:chgData name="Devin Heanue" userId="7590fe87-f85b-4db3-af49-40606f5bf96f" providerId="ADAL" clId="{0AE716D6-5FAA-4FA4-BA3F-12263BBDF976}" dt="2026-03-19T13:58:48.720" v="1"/>
-          <ac:spMkLst>
-            <pc:docMk/>
-            <pc:sldMasterMk cId="2908370257" sldId="2147483669"/>
-            <ac:spMk id="7" creationId="{4DB2B117-B05E-B3D6-71CB-835C5A728637}"/>
-          </ac:spMkLst>
-        </pc:spChg>
-        <pc:sldLayoutChg chg="delSp modSp mod ord">
-          <pc:chgData name="Devin Heanue" userId="7590fe87-f85b-4db3-af49-40606f5bf96f" providerId="ADAL" clId="{0AE716D6-5FAA-4FA4-BA3F-12263BBDF976}" dt="2026-03-19T15:55:16.510" v="26" actId="14100"/>
-          <pc:sldLayoutMkLst>
-            <pc:docMk/>
-            <pc:sldMasterMk cId="2908370257" sldId="2147483669"/>
-            <pc:sldLayoutMk cId="176462580" sldId="2147483671"/>
-          </pc:sldLayoutMkLst>
-          <pc:spChg chg="mod">
-            <ac:chgData name="Devin Heanue" userId="7590fe87-f85b-4db3-af49-40606f5bf96f" providerId="ADAL" clId="{0AE716D6-5FAA-4FA4-BA3F-12263BBDF976}" dt="2026-03-19T15:55:16.510" v="26" actId="14100"/>
-            <ac:spMkLst>
-              <pc:docMk/>
-              <pc:sldMasterMk cId="2908370257" sldId="2147483669"/>
-              <pc:sldLayoutMk cId="176462580" sldId="2147483671"/>
-              <ac:spMk id="3" creationId="{161CCDB9-B20B-B812-9DCA-0122035D8EEE}"/>
-            </ac:spMkLst>
-          </pc:spChg>
-        </pc:sldLayoutChg>
-        <pc:sldLayoutChg chg="modSp mod ord">
-          <pc:chgData name="Devin Heanue" userId="7590fe87-f85b-4db3-af49-40606f5bf96f" providerId="ADAL" clId="{0AE716D6-5FAA-4FA4-BA3F-12263BBDF976}" dt="2026-03-19T15:49:12.740" v="19" actId="12"/>
+        <pc:sldLayoutChg chg="addSp delSp modSp mod">
+          <pc:chgData name="Devin Heanue" userId="7590fe87-f85b-4db3-af49-40606f5bf96f" providerId="ADAL" clId="{A2D90BA2-02A7-4AB1-8229-4C08CFF0E969}" dt="2026-06-15T20:54:47.839" v="47" actId="1038"/>
           <pc:sldLayoutMkLst>
             <pc:docMk/>
             <pc:sldMasterMk cId="2908370257" sldId="2147483669"/>
             <pc:sldLayoutMk cId="652845060" sldId="2147483681"/>
           </pc:sldLayoutMkLst>
           <pc:spChg chg="mod">
-            <ac:chgData name="Devin Heanue" userId="7590fe87-f85b-4db3-af49-40606f5bf96f" providerId="ADAL" clId="{0AE716D6-5FAA-4FA4-BA3F-12263BBDF976}" dt="2026-03-19T15:41:37.800" v="10" actId="12"/>
+            <ac:chgData name="Devin Heanue" userId="7590fe87-f85b-4db3-af49-40606f5bf96f" providerId="ADAL" clId="{A2D90BA2-02A7-4AB1-8229-4C08CFF0E969}" dt="2026-06-15T20:49:04.591" v="18" actId="2711"/>
             <ac:spMkLst>
               <pc:docMk/>
               <pc:sldMasterMk cId="2908370257" sldId="2147483669"/>
@@ -233,7 +161,7 @@
             </ac:spMkLst>
           </pc:spChg>
           <pc:spChg chg="mod">
-            <ac:chgData name="Devin Heanue" userId="7590fe87-f85b-4db3-af49-40606f5bf96f" providerId="ADAL" clId="{0AE716D6-5FAA-4FA4-BA3F-12263BBDF976}" dt="2026-03-19T15:49:12.740" v="19" actId="12"/>
+            <ac:chgData name="Devin Heanue" userId="7590fe87-f85b-4db3-af49-40606f5bf96f" providerId="ADAL" clId="{A2D90BA2-02A7-4AB1-8229-4C08CFF0E969}" dt="2026-06-15T20:49:08.446" v="19" actId="2711"/>
             <ac:spMkLst>
               <pc:docMk/>
               <pc:sldMasterMk cId="2908370257" sldId="2147483669"/>
@@ -241,16 +169,43 @@
               <ac:spMk id="7" creationId="{6F5952BE-55A5-1C39-5E5E-035243667E75}"/>
             </ac:spMkLst>
           </pc:spChg>
+          <pc:spChg chg="mod">
+            <ac:chgData name="Devin Heanue" userId="7590fe87-f85b-4db3-af49-40606f5bf96f" providerId="ADAL" clId="{A2D90BA2-02A7-4AB1-8229-4C08CFF0E969}" dt="2026-06-15T20:48:58.139" v="17" actId="2711"/>
+            <ac:spMkLst>
+              <pc:docMk/>
+              <pc:sldMasterMk cId="2908370257" sldId="2147483669"/>
+              <pc:sldLayoutMk cId="652845060" sldId="2147483681"/>
+              <ac:spMk id="26" creationId="{ADD87412-82D6-A515-DF8B-025EDE80E7BF}"/>
+            </ac:spMkLst>
+          </pc:spChg>
+          <pc:picChg chg="del">
+            <ac:chgData name="Devin Heanue" userId="7590fe87-f85b-4db3-af49-40606f5bf96f" providerId="ADAL" clId="{A2D90BA2-02A7-4AB1-8229-4C08CFF0E969}" dt="2026-06-15T20:54:42.428" v="37" actId="478"/>
+            <ac:picMkLst>
+              <pc:docMk/>
+              <pc:sldMasterMk cId="2908370257" sldId="2147483669"/>
+              <pc:sldLayoutMk cId="652845060" sldId="2147483681"/>
+              <ac:picMk id="2" creationId="{B5422D96-EB6F-9EE4-2D78-3043BC60F2C3}"/>
+            </ac:picMkLst>
+          </pc:picChg>
+          <pc:picChg chg="add mod">
+            <ac:chgData name="Devin Heanue" userId="7590fe87-f85b-4db3-af49-40606f5bf96f" providerId="ADAL" clId="{A2D90BA2-02A7-4AB1-8229-4C08CFF0E969}" dt="2026-06-15T20:54:47.839" v="47" actId="1038"/>
+            <ac:picMkLst>
+              <pc:docMk/>
+              <pc:sldMasterMk cId="2908370257" sldId="2147483669"/>
+              <pc:sldLayoutMk cId="652845060" sldId="2147483681"/>
+              <ac:picMk id="4" creationId="{18081953-2D72-9015-BF3C-8DBEEC90855A}"/>
+            </ac:picMkLst>
+          </pc:picChg>
         </pc:sldLayoutChg>
-        <pc:sldLayoutChg chg="modSp mod ord">
-          <pc:chgData name="Devin Heanue" userId="7590fe87-f85b-4db3-af49-40606f5bf96f" providerId="ADAL" clId="{0AE716D6-5FAA-4FA4-BA3F-12263BBDF976}" dt="2026-03-26T14:54:47.439" v="86" actId="1076"/>
+        <pc:sldLayoutChg chg="modSp mod">
+          <pc:chgData name="Devin Heanue" userId="7590fe87-f85b-4db3-af49-40606f5bf96f" providerId="ADAL" clId="{A2D90BA2-02A7-4AB1-8229-4C08CFF0E969}" dt="2026-06-15T20:48:43.934" v="16" actId="1076"/>
           <pc:sldLayoutMkLst>
             <pc:docMk/>
             <pc:sldMasterMk cId="2908370257" sldId="2147483669"/>
             <pc:sldLayoutMk cId="2751855050" sldId="2147483682"/>
           </pc:sldLayoutMkLst>
           <pc:spChg chg="mod">
-            <ac:chgData name="Devin Heanue" userId="7590fe87-f85b-4db3-af49-40606f5bf96f" providerId="ADAL" clId="{0AE716D6-5FAA-4FA4-BA3F-12263BBDF976}" dt="2026-03-26T14:54:47.439" v="86" actId="1076"/>
+            <ac:chgData name="Devin Heanue" userId="7590fe87-f85b-4db3-af49-40606f5bf96f" providerId="ADAL" clId="{A2D90BA2-02A7-4AB1-8229-4C08CFF0E969}" dt="2026-06-15T20:47:03.176" v="3" actId="2711"/>
             <ac:spMkLst>
               <pc:docMk/>
               <pc:sldMasterMk cId="2908370257" sldId="2147483669"/>
@@ -259,7 +214,25 @@
             </ac:spMkLst>
           </pc:spChg>
           <pc:spChg chg="mod">
-            <ac:chgData name="Devin Heanue" userId="7590fe87-f85b-4db3-af49-40606f5bf96f" providerId="ADAL" clId="{0AE716D6-5FAA-4FA4-BA3F-12263BBDF976}" dt="2026-03-26T14:54:20.792" v="63" actId="1035"/>
+            <ac:chgData name="Devin Heanue" userId="7590fe87-f85b-4db3-af49-40606f5bf96f" providerId="ADAL" clId="{A2D90BA2-02A7-4AB1-8229-4C08CFF0E969}" dt="2026-06-15T20:47:18.320" v="6" actId="2711"/>
+            <ac:spMkLst>
+              <pc:docMk/>
+              <pc:sldMasterMk cId="2908370257" sldId="2147483669"/>
+              <pc:sldLayoutMk cId="2751855050" sldId="2147483682"/>
+              <ac:spMk id="4" creationId="{4192AA94-D130-27CA-2D26-05CB7CD00567}"/>
+            </ac:spMkLst>
+          </pc:spChg>
+          <pc:spChg chg="mod">
+            <ac:chgData name="Devin Heanue" userId="7590fe87-f85b-4db3-af49-40606f5bf96f" providerId="ADAL" clId="{A2D90BA2-02A7-4AB1-8229-4C08CFF0E969}" dt="2026-06-15T20:47:06.700" v="4" actId="2711"/>
+            <ac:spMkLst>
+              <pc:docMk/>
+              <pc:sldMasterMk cId="2908370257" sldId="2147483669"/>
+              <pc:sldLayoutMk cId="2751855050" sldId="2147483682"/>
+              <ac:spMk id="5" creationId="{57949E57-FFBE-8336-E4A5-52A4E35DE163}"/>
+            </ac:spMkLst>
+          </pc:spChg>
+          <pc:spChg chg="mod">
+            <ac:chgData name="Devin Heanue" userId="7590fe87-f85b-4db3-af49-40606f5bf96f" providerId="ADAL" clId="{A2D90BA2-02A7-4AB1-8229-4C08CFF0E969}" dt="2026-06-15T20:46:57.242" v="2" actId="2711"/>
             <ac:spMkLst>
               <pc:docMk/>
               <pc:sldMasterMk cId="2908370257" sldId="2147483669"/>
@@ -268,7 +241,25 @@
             </ac:spMkLst>
           </pc:spChg>
           <pc:spChg chg="mod">
-            <ac:chgData name="Devin Heanue" userId="7590fe87-f85b-4db3-af49-40606f5bf96f" providerId="ADAL" clId="{0AE716D6-5FAA-4FA4-BA3F-12263BBDF976}" dt="2026-03-19T15:58:18.529" v="30" actId="2711"/>
+            <ac:chgData name="Devin Heanue" userId="7590fe87-f85b-4db3-af49-40606f5bf96f" providerId="ADAL" clId="{A2D90BA2-02A7-4AB1-8229-4C08CFF0E969}" dt="2026-06-15T20:48:43.934" v="16" actId="1076"/>
+            <ac:spMkLst>
+              <pc:docMk/>
+              <pc:sldMasterMk cId="2908370257" sldId="2147483669"/>
+              <pc:sldLayoutMk cId="2751855050" sldId="2147483682"/>
+              <ac:spMk id="9" creationId="{7D3C532E-6B3B-C5A6-11AF-589BC84B7CC4}"/>
+            </ac:spMkLst>
+          </pc:spChg>
+          <pc:spChg chg="mod">
+            <ac:chgData name="Devin Heanue" userId="7590fe87-f85b-4db3-af49-40606f5bf96f" providerId="ADAL" clId="{A2D90BA2-02A7-4AB1-8229-4C08CFF0E969}" dt="2026-06-15T20:48:18.559" v="14" actId="1076"/>
+            <ac:spMkLst>
+              <pc:docMk/>
+              <pc:sldMasterMk cId="2908370257" sldId="2147483669"/>
+              <pc:sldLayoutMk cId="2751855050" sldId="2147483682"/>
+              <ac:spMk id="10" creationId="{41C25A80-F6EC-A0E7-7DC3-DC27B260E4B8}"/>
+            </ac:spMkLst>
+          </pc:spChg>
+          <pc:spChg chg="mod">
+            <ac:chgData name="Devin Heanue" userId="7590fe87-f85b-4db3-af49-40606f5bf96f" providerId="ADAL" clId="{A2D90BA2-02A7-4AB1-8229-4C08CFF0E969}" dt="2026-06-15T20:46:47.683" v="0" actId="2711"/>
             <ac:spMkLst>
               <pc:docMk/>
               <pc:sldMasterMk cId="2908370257" sldId="2147483669"/>
@@ -277,7 +268,16 @@
             </ac:spMkLst>
           </pc:spChg>
           <pc:spChg chg="mod">
-            <ac:chgData name="Devin Heanue" userId="7590fe87-f85b-4db3-af49-40606f5bf96f" providerId="ADAL" clId="{0AE716D6-5FAA-4FA4-BA3F-12263BBDF976}" dt="2026-03-23T14:00:38.745" v="36" actId="947"/>
+            <ac:chgData name="Devin Heanue" userId="7590fe87-f85b-4db3-af49-40606f5bf96f" providerId="ADAL" clId="{A2D90BA2-02A7-4AB1-8229-4C08CFF0E969}" dt="2026-06-15T20:47:13.163" v="5" actId="2711"/>
+            <ac:spMkLst>
+              <pc:docMk/>
+              <pc:sldMasterMk cId="2908370257" sldId="2147483669"/>
+              <pc:sldLayoutMk cId="2751855050" sldId="2147483682"/>
+              <ac:spMk id="12" creationId="{D692FE7A-E637-D8C3-9655-5D2DC4874DA1}"/>
+            </ac:spMkLst>
+          </pc:spChg>
+          <pc:spChg chg="mod">
+            <ac:chgData name="Devin Heanue" userId="7590fe87-f85b-4db3-af49-40606f5bf96f" providerId="ADAL" clId="{A2D90BA2-02A7-4AB1-8229-4C08CFF0E969}" dt="2026-06-15T20:46:51.808" v="1" actId="2711"/>
             <ac:spMkLst>
               <pc:docMk/>
               <pc:sldMasterMk cId="2908370257" sldId="2147483669"/>
@@ -680,7 +680,7 @@
           <a:p>
             <a:fld id="{35B24283-4C9C-384C-9A69-259DDC60D95C}" type="datetimeFigureOut">
               <a:rPr lang="en-US" smtClean="0"/>
-              <a:t>3/26/2026</a:t>
+              <a:t>6/15/2026</a:t>
             </a:fld>
             <a:endParaRPr lang="en-US"/>
           </a:p>
@@ -888,7 +888,7 @@
           <a:p>
             <a:fld id="{35B24283-4C9C-384C-9A69-259DDC60D95C}" type="datetimeFigureOut">
               <a:rPr lang="en-US" smtClean="0"/>
-              <a:t>3/26/2026</a:t>
+              <a:t>6/15/2026</a:t>
             </a:fld>
             <a:endParaRPr lang="en-US"/>
           </a:p>
@@ -1095,7 +1095,10 @@
           </a:bodyPr>
           <a:lstStyle>
             <a:lvl1pPr>
-              <a:defRPr sz="4400"/>
+              <a:defRPr sz="4400">
+                <a:latin typeface="Arial" panose="020B0604020202020204" pitchFamily="34" charset="0"/>
+                <a:cs typeface="Arial" panose="020B0604020202020204" pitchFamily="34" charset="0"/>
+              </a:defRPr>
             </a:lvl1pPr>
           </a:lstStyle>
           <a:p>
@@ -1113,12 +1116,90 @@
           </a:p>
         </p:txBody>
       </p:sp>
+      <p:sp>
+        <p:nvSpPr>
+          <p:cNvPr id="5" name="orgname">
+            <a:extLst>
+              <a:ext uri="{FF2B5EF4-FFF2-40B4-BE49-F238E27FC236}">
+                <a16:creationId xmlns:a16="http://schemas.microsoft.com/office/drawing/2014/main" id="{33A7C9B6-DBD7-2B61-DD27-B359459C6DBE}"/>
+              </a:ext>
+            </a:extLst>
+          </p:cNvPr>
+          <p:cNvSpPr>
+            <a:spLocks noGrp="1"/>
+          </p:cNvSpPr>
+          <p:nvPr>
+            <p:ph type="body" sz="quarter" idx="13"/>
+          </p:nvPr>
+        </p:nvSpPr>
+        <p:spPr>
+          <a:xfrm>
+            <a:off x="6149365" y="4924425"/>
+            <a:ext cx="5561012" cy="320040"/>
+          </a:xfrm>
+        </p:spPr>
+        <p:txBody>
+          <a:bodyPr tIns="0" bIns="0" anchor="ctr" anchorCtr="0"/>
+          <a:lstStyle>
+            <a:lvl1pPr>
+              <a:buNone/>
+              <a:defRPr>
+                <a:latin typeface="Arial" panose="020B0604020202020204" pitchFamily="34" charset="0"/>
+                <a:cs typeface="Arial" panose="020B0604020202020204" pitchFamily="34" charset="0"/>
+              </a:defRPr>
+            </a:lvl1pPr>
+          </a:lstStyle>
+          <a:p>
+            <a:pPr lvl="0"/>
+            <a:endParaRPr lang="en-US" dirty="0"/>
+          </a:p>
+        </p:txBody>
+      </p:sp>
+      <p:sp>
+        <p:nvSpPr>
+          <p:cNvPr id="7" name="month_year">
+            <a:extLst>
+              <a:ext uri="{FF2B5EF4-FFF2-40B4-BE49-F238E27FC236}">
+                <a16:creationId xmlns:a16="http://schemas.microsoft.com/office/drawing/2014/main" id="{6F5952BE-55A5-1C39-5E5E-035243667E75}"/>
+              </a:ext>
+            </a:extLst>
+          </p:cNvPr>
+          <p:cNvSpPr>
+            <a:spLocks noGrp="1"/>
+          </p:cNvSpPr>
+          <p:nvPr>
+            <p:ph type="body" sz="quarter" idx="14"/>
+          </p:nvPr>
+        </p:nvSpPr>
+        <p:spPr>
+          <a:xfrm>
+            <a:off x="6149365" y="5275070"/>
+            <a:ext cx="5561012" cy="320040"/>
+          </a:xfrm>
+        </p:spPr>
+        <p:txBody>
+          <a:bodyPr tIns="0" bIns="0" anchor="ctr" anchorCtr="0"/>
+          <a:lstStyle>
+            <a:lvl1pPr>
+              <a:buNone/>
+              <a:defRPr>
+                <a:latin typeface="Arial" panose="020B0604020202020204" pitchFamily="34" charset="0"/>
+                <a:cs typeface="Arial" panose="020B0604020202020204" pitchFamily="34" charset="0"/>
+              </a:defRPr>
+            </a:lvl1pPr>
+          </a:lstStyle>
+          <a:p>
+            <a:pPr lvl="0"/>
+            <a:endParaRPr lang="en-US" dirty="0"/>
+          </a:p>
+        </p:txBody>
+      </p:sp>
       <p:pic>
         <p:nvPicPr>
-          <p:cNvPr id="2" name="Picture 1">
-            <a:extLst>
-              <a:ext uri="{FF2B5EF4-FFF2-40B4-BE49-F238E27FC236}">
-                <a16:creationId xmlns:a16="http://schemas.microsoft.com/office/drawing/2014/main" id="{B5422D96-EB6F-9EE4-2D78-3043BC60F2C3}"/>
+          <p:cNvPr id="4" name="Picture 3">
+            <a:extLst>
+              <a:ext uri="{FF2B5EF4-FFF2-40B4-BE49-F238E27FC236}">
+                <a16:creationId xmlns:a16="http://schemas.microsoft.com/office/drawing/2014/main" id="{18081953-2D72-9015-BF3C-8DBEEC90855A}"/>
               </a:ext>
             </a:extLst>
           </p:cNvPr>
@@ -1128,99 +1209,21 @@
           <p:nvPr userDrawn="1"/>
         </p:nvPicPr>
         <p:blipFill>
-          <a:blip r:embed="rId2">
-            <a:extLst>
-              <a:ext uri="{28A0092B-C50C-407E-A947-70E740481C1C}">
-                <a14:useLocalDpi xmlns:a14="http://schemas.microsoft.com/office/drawing/2010/main"/>
-              </a:ext>
-            </a:extLst>
-          </a:blip>
+          <a:blip r:embed="rId2"/>
           <a:stretch>
             <a:fillRect/>
           </a:stretch>
         </p:blipFill>
         <p:spPr>
           <a:xfrm>
-            <a:off x="10703753" y="536878"/>
-            <a:ext cx="1018401" cy="590745"/>
+            <a:off x="10707170" y="519883"/>
+            <a:ext cx="1014984" cy="624734"/>
           </a:xfrm>
           <a:prstGeom prst="rect">
             <a:avLst/>
           </a:prstGeom>
         </p:spPr>
       </p:pic>
-      <p:sp>
-        <p:nvSpPr>
-          <p:cNvPr id="5" name="orgname">
-            <a:extLst>
-              <a:ext uri="{FF2B5EF4-FFF2-40B4-BE49-F238E27FC236}">
-                <a16:creationId xmlns:a16="http://schemas.microsoft.com/office/drawing/2014/main" id="{33A7C9B6-DBD7-2B61-DD27-B359459C6DBE}"/>
-              </a:ext>
-            </a:extLst>
-          </p:cNvPr>
-          <p:cNvSpPr>
-            <a:spLocks noGrp="1"/>
-          </p:cNvSpPr>
-          <p:nvPr>
-            <p:ph type="body" sz="quarter" idx="13"/>
-          </p:nvPr>
-        </p:nvSpPr>
-        <p:spPr>
-          <a:xfrm>
-            <a:off x="6149365" y="4924425"/>
-            <a:ext cx="5561012" cy="320040"/>
-          </a:xfrm>
-        </p:spPr>
-        <p:txBody>
-          <a:bodyPr tIns="0" bIns="0" anchor="ctr" anchorCtr="0"/>
-          <a:lstStyle>
-            <a:lvl1pPr>
-              <a:buNone/>
-              <a:defRPr/>
-            </a:lvl1pPr>
-          </a:lstStyle>
-          <a:p>
-            <a:pPr lvl="0"/>
-            <a:endParaRPr lang="en-US" dirty="0"/>
-          </a:p>
-        </p:txBody>
-      </p:sp>
-      <p:sp>
-        <p:nvSpPr>
-          <p:cNvPr id="7" name="month_year">
-            <a:extLst>
-              <a:ext uri="{FF2B5EF4-FFF2-40B4-BE49-F238E27FC236}">
-                <a16:creationId xmlns:a16="http://schemas.microsoft.com/office/drawing/2014/main" id="{6F5952BE-55A5-1C39-5E5E-035243667E75}"/>
-              </a:ext>
-            </a:extLst>
-          </p:cNvPr>
-          <p:cNvSpPr>
-            <a:spLocks noGrp="1"/>
-          </p:cNvSpPr>
-          <p:nvPr>
-            <p:ph type="body" sz="quarter" idx="14"/>
-          </p:nvPr>
-        </p:nvSpPr>
-        <p:spPr>
-          <a:xfrm>
-            <a:off x="6149365" y="5275070"/>
-            <a:ext cx="5561012" cy="320040"/>
-          </a:xfrm>
-        </p:spPr>
-        <p:txBody>
-          <a:bodyPr tIns="0" bIns="0" anchor="ctr" anchorCtr="0"/>
-          <a:lstStyle>
-            <a:lvl1pPr>
-              <a:buNone/>
-              <a:defRPr/>
-            </a:lvl1pPr>
-          </a:lstStyle>
-          <a:p>
-            <a:pPr lvl="0"/>
-            <a:endParaRPr lang="en-US" dirty="0"/>
-          </a:p>
-        </p:txBody>
-      </p:sp>
     </p:spTree>
     <p:extLst>
       <p:ext uri="{BB962C8B-B14F-4D97-AF65-F5344CB8AC3E}">
@@ -1287,7 +1290,8 @@
                 <a:solidFill>
                   <a:schemeClr val="tx1"/>
                 </a:solidFill>
-                <a:latin typeface="+mn-lt"/>
+                <a:latin typeface="Arial" panose="020B0604020202020204" pitchFamily="34" charset="0"/>
+                <a:cs typeface="Arial" panose="020B0604020202020204" pitchFamily="34" charset="0"/>
               </a:defRPr>
             </a:lvl1pPr>
             <a:lvl2pPr marL="457200" indent="0">
@@ -1376,7 +1380,8 @@
                 <a:solidFill>
                   <a:srgbClr val="254A5D"/>
                 </a:solidFill>
-                <a:latin typeface="+mj-lt"/>
+                <a:latin typeface="Arial" panose="020B0604020202020204" pitchFamily="34" charset="0"/>
+                <a:cs typeface="Arial" panose="020B0604020202020204" pitchFamily="34" charset="0"/>
               </a:defRPr>
             </a:lvl1pPr>
             <a:lvl2pPr marL="457200" indent="0">
@@ -1489,8 +1494,8 @@
         </p:nvSpPr>
         <p:spPr>
           <a:xfrm>
-            <a:off x="10705617" y="165288"/>
-            <a:ext cx="1068479" cy="252587"/>
+            <a:off x="10600268" y="177252"/>
+            <a:ext cx="1173829" cy="228600"/>
           </a:xfrm>
           <a:prstGeom prst="rect">
             <a:avLst/>
@@ -1604,7 +1609,8 @@
                     <a:lumMod val="50000"/>
                   </a:schemeClr>
                 </a:solidFill>
-                <a:latin typeface="Karla Light" panose="020B0004030503030003" pitchFamily="34" charset="77"/>
+                <a:latin typeface="Arial" panose="020B0604020202020204" pitchFamily="34" charset="0"/>
+                <a:cs typeface="Arial" panose="020B0604020202020204" pitchFamily="34" charset="0"/>
               </a:rPr>
               <a:t> CCS Fundraising</a:t>
             </a:r>
@@ -1625,7 +1631,7 @@
         </p:nvSpPr>
         <p:spPr>
           <a:xfrm>
-            <a:off x="11711368" y="187043"/>
+            <a:off x="11711368" y="185007"/>
             <a:ext cx="354057" cy="230832"/>
           </a:xfrm>
           <a:prstGeom prst="rect">
@@ -1645,7 +1651,8 @@
                 <a:solidFill>
                   <a:srgbClr val="757575"/>
                 </a:solidFill>
-                <a:latin typeface="Karla Medium" panose="020B0004030503030003" pitchFamily="34" charset="77"/>
+                <a:latin typeface="Arial" panose="020B0604020202020204" pitchFamily="34" charset="0"/>
+                <a:cs typeface="Arial" panose="020B0604020202020204" pitchFamily="34" charset="0"/>
               </a:rPr>
               <a:pPr algn="ctr"/>
               <a:t>‹#›</a:t>
@@ -1654,6 +1661,8 @@
               <a:solidFill>
                 <a:srgbClr val="757575"/>
               </a:solidFill>
+              <a:latin typeface="Arial" panose="020B0604020202020204" pitchFamily="34" charset="0"/>
+              <a:cs typeface="Arial" panose="020B0604020202020204" pitchFamily="34" charset="0"/>
             </a:endParaRPr>
           </a:p>
         </p:txBody>
@@ -1690,7 +1699,10 @@
           <a:lstStyle>
             <a:lvl1pPr marL="0" indent="0">
               <a:buNone/>
-              <a:defRPr/>
+              <a:defRPr>
+                <a:latin typeface="Arial" panose="020B0604020202020204" pitchFamily="34" charset="0"/>
+                <a:cs typeface="Arial" panose="020B0604020202020204" pitchFamily="34" charset="0"/>
+              </a:defRPr>
             </a:lvl1pPr>
           </a:lstStyle>
           <a:p>
@@ -1726,7 +1738,10 @@
           <a:lstStyle>
             <a:lvl1pPr marL="0" indent="0">
               <a:buNone/>
-              <a:defRPr/>
+              <a:defRPr>
+                <a:latin typeface="Arial" panose="020B0604020202020204" pitchFamily="34" charset="0"/>
+                <a:cs typeface="Arial" panose="020B0604020202020204" pitchFamily="34" charset="0"/>
+              </a:defRPr>
             </a:lvl1pPr>
           </a:lstStyle>
           <a:p>
@@ -1768,6 +1783,8 @@
                 <a:solidFill>
                   <a:srgbClr val="254A5D"/>
                 </a:solidFill>
+                <a:latin typeface="Arial" panose="020B0604020202020204" pitchFamily="34" charset="0"/>
+                <a:cs typeface="Arial" panose="020B0604020202020204" pitchFamily="34" charset="0"/>
               </a:defRPr>
             </a:lvl1pPr>
           </a:lstStyle>
@@ -1804,7 +1821,10 @@
           <a:lstStyle>
             <a:lvl1pPr marL="0" indent="0">
               <a:buNone/>
-              <a:defRPr/>
+              <a:defRPr>
+                <a:latin typeface="Arial" panose="020B0604020202020204" pitchFamily="34" charset="0"/>
+                <a:cs typeface="Arial" panose="020B0604020202020204" pitchFamily="34" charset="0"/>
+              </a:defRPr>
             </a:lvl1pPr>
           </a:lstStyle>
           <a:p>
@@ -1847,6 +1867,8 @@
                     <a:lumMod val="85000"/>
                   </a:schemeClr>
                 </a:solidFill>
+                <a:latin typeface="Arial" panose="020B0604020202020204" pitchFamily="34" charset="0"/>
+                <a:cs typeface="Arial" panose="020B0604020202020204" pitchFamily="34" charset="0"/>
               </a:defRPr>
             </a:lvl1pPr>
           </a:lstStyle>
@@ -2157,7 +2179,7 @@
           <a:p>
             <a:fld id="{35B24283-4C9C-384C-9A69-259DDC60D95C}" type="datetimeFigureOut">
               <a:rPr lang="en-US" smtClean="0"/>
-              <a:t>3/26/2026</a:t>
+              <a:t>6/15/2026</a:t>
             </a:fld>
             <a:endParaRPr lang="en-US"/>
           </a:p>
@@ -2432,7 +2454,7 @@
           <a:p>
             <a:fld id="{35B24283-4C9C-384C-9A69-259DDC60D95C}" type="datetimeFigureOut">
               <a:rPr lang="en-US" smtClean="0"/>
-              <a:t>3/26/2026</a:t>
+              <a:t>6/15/2026</a:t>
             </a:fld>
             <a:endParaRPr lang="en-US"/>
           </a:p>
@@ -2697,7 +2719,7 @@
           <a:p>
             <a:fld id="{35B24283-4C9C-384C-9A69-259DDC60D95C}" type="datetimeFigureOut">
               <a:rPr lang="en-US" smtClean="0"/>
-              <a:t>3/26/2026</a:t>
+              <a:t>6/15/2026</a:t>
             </a:fld>
             <a:endParaRPr lang="en-US"/>
           </a:p>
@@ -3109,7 +3131,7 @@
           <a:p>
             <a:fld id="{35B24283-4C9C-384C-9A69-259DDC60D95C}" type="datetimeFigureOut">
               <a:rPr lang="en-US" smtClean="0"/>
-              <a:t>3/26/2026</a:t>
+              <a:t>6/15/2026</a:t>
             </a:fld>
             <a:endParaRPr lang="en-US"/>
           </a:p>
@@ -3250,7 +3272,7 @@
           <a:p>
             <a:fld id="{35B24283-4C9C-384C-9A69-259DDC60D95C}" type="datetimeFigureOut">
               <a:rPr lang="en-US" smtClean="0"/>
-              <a:t>3/26/2026</a:t>
+              <a:t>6/15/2026</a:t>
             </a:fld>
             <a:endParaRPr lang="en-US"/>
           </a:p>
@@ -3363,7 +3385,7 @@
           <a:p>
             <a:fld id="{35B24283-4C9C-384C-9A69-259DDC60D95C}" type="datetimeFigureOut">
               <a:rPr lang="en-US" smtClean="0"/>
-              <a:t>3/26/2026</a:t>
+              <a:t>6/15/2026</a:t>
             </a:fld>
             <a:endParaRPr lang="en-US"/>
           </a:p>
@@ -3674,7 +3696,7 @@
           <a:p>
             <a:fld id="{35B24283-4C9C-384C-9A69-259DDC60D95C}" type="datetimeFigureOut">
               <a:rPr lang="en-US" smtClean="0"/>
-              <a:t>3/26/2026</a:t>
+              <a:t>6/15/2026</a:t>
             </a:fld>
             <a:endParaRPr lang="en-US"/>
           </a:p>
@@ -3965,7 +3987,7 @@
           <a:p>
             <a:fld id="{35B24283-4C9C-384C-9A69-259DDC60D95C}" type="datetimeFigureOut">
               <a:rPr lang="en-US" smtClean="0"/>
-              <a:t>3/26/2026</a:t>
+              <a:t>6/15/2026</a:t>
             </a:fld>
             <a:endParaRPr lang="en-US"/>
           </a:p>
@@ -4696,7 +4718,7 @@
             <a:fld id="{3F2082E8-73AE-0443-9211-048CA87033AA}" type="datetimeFigureOut">
               <a:rPr lang="en-US" smtClean="0"/>
               <a:pPr/>
-              <a:t>3/26/2026</a:t>
+              <a:t>6/15/2026</a:t>
             </a:fld>
             <a:endParaRPr lang="en-US"/>
           </a:p>
@@ -5485,7 +5507,7 @@
         <p:spPr>
           <a:xfrm>
             <a:off x="457200" y="1783080"/>
-            <a:ext cx="7452360" cy="4745736"/>
+            <a:ext cx="7562088" cy="4407408"/>
           </a:xfrm>
           <a:prstGeom prst="rect">
             <a:avLst/>
